--- a/Project_1_Combined_Cycle/Project1_Presentation.pptx
+++ b/Project_1_Combined_Cycle/Project1_Presentation.pptx
@@ -14,6 +14,7 @@
     <p:sldId id="262" r:id="rId13"/>
     <p:sldId id="263" r:id="rId14"/>
     <p:sldId id="264" r:id="rId15"/>
+    <p:sldId id="265" r:id="rId16"/>
   </p:sldIdLst>
   <p:sldSz cx="12191695" cy="6858000" type="screen4x3"/>
   <p:notesSz cx="6858000" cy="9144000"/>
@@ -3147,8 +3148,8 @@
         </p:nvSpPr>
         <p:spPr>
           <a:xfrm>
-            <a:off x="914400" y="1828800"/>
-            <a:ext cx="10332720" cy="3200400"/>
+            <a:off x="914400" y="1645920"/>
+            <a:ext cx="10332720" cy="3657600"/>
           </a:xfrm>
           <a:prstGeom prst="rect">
             <a:avLst/>
@@ -3169,7 +3170,7 @@
               </a:defRPr>
             </a:pPr>
             <a:r>
-              <a:t>ME3160 Power &amp; Refrigeration Cycles — Term Project 1</a:t>
+              <a:t>ME3160 Power &amp; Refrigeration Cycles — Final Term Project 1</a:t>
             </a:r>
           </a:p>
           <a:p>
@@ -3207,7 +3208,7 @@
             </a:r>
             <a:br/>
             <a:r>
-              <a:t>Surrogate Modeling (RSM &amp; ANN), and Bi-Objective Genetic Algorithm (NSGA-II)</a:t>
+              <a:t>Surrogate Modeling (RSM &amp; ANN), Trust-Region Adaptive Refinement &amp; NSGA-II</a:t>
             </a:r>
           </a:p>
         </p:txBody>
@@ -3220,7 +3221,7 @@
 </p:sld>
 </file>
 
-<file path=ppt/slides/slide2.xml><?xml version="1.0" encoding="utf-8"?>
+<file path=ppt/slides/slide10.xml><?xml version="1.0" encoding="utf-8"?>
 <p:sld xmlns:a="http://schemas.openxmlformats.org/drawingml/2006/main" xmlns:p="http://schemas.openxmlformats.org/presentationml/2006/main" xmlns:r="http://schemas.openxmlformats.org/officeDocument/2006/relationships">
   <p:cSld>
     <p:spTree>
@@ -3260,19 +3261,19 @@
               </a:defRPr>
             </a:pPr>
             <a:r>
-              <a:t>1. SCHEMATIC</a:t>
-            </a:r>
-          </a:p>
-          <a:p>
-            <a:pPr>
-              <a:defRPr sz="2200" b="1">
+              <a:t>5. CONCLUSION</a:t>
+            </a:r>
+          </a:p>
+          <a:p>
+            <a:pPr>
+              <a:defRPr sz="2100" b="1">
                 <a:solidFill>
                   <a:srgbClr val="102C57"/>
                 </a:solidFill>
               </a:defRPr>
             </a:pPr>
             <a:r>
-              <a:t>Section 1: Plant Layout, Cycle Architecture &amp; State Point Definition</a:t>
+              <a:t>Section 5: Final Recommendations, Binding Constraints &amp; Design Levers</a:t>
             </a:r>
           </a:p>
         </p:txBody>
@@ -3286,7 +3287,7 @@
         <p:spPr>
           <a:xfrm>
             <a:off x="731520" y="1463040"/>
-            <a:ext cx="5120640" cy="4846320"/>
+            <a:ext cx="5212080" cy="4937760"/>
           </a:xfrm>
           <a:prstGeom prst="roundRect">
             <a:avLst/>
@@ -3331,7 +3332,7 @@
         <p:spPr>
           <a:xfrm>
             <a:off x="914400" y="1600200"/>
-            <a:ext cx="4754880" cy="4572000"/>
+            <a:ext cx="4846320" cy="4663440"/>
           </a:xfrm>
           <a:prstGeom prst="rect">
             <a:avLst/>
@@ -3346,121 +3347,241 @@
           <a:p>
             <a:pPr>
               <a:spcAft>
-                <a:spcPts val="800"/>
-              </a:spcAft>
-              <a:defRPr sz="1400" b="1">
+                <a:spcPts val="600"/>
+              </a:spcAft>
+              <a:defRPr sz="1300" b="1">
                 <a:solidFill>
                   <a:srgbClr val="102C57"/>
                 </a:solidFill>
               </a:defRPr>
             </a:pPr>
             <a:r>
-              <a:t>Topping Brayton Cycle (Methane Fired)</a:t>
-            </a:r>
-          </a:p>
-          <a:p>
-            <a:pPr>
-              <a:spcAft>
-                <a:spcPts val="400"/>
-              </a:spcAft>
-              <a:defRPr sz="1100">
-                <a:solidFill>
-                  <a:srgbClr val="282828"/>
-                </a:solidFill>
-              </a:defRPr>
-            </a:pPr>
-            <a:r>
-              <a:t>• Compressor: Ambient air (1.013 bar, 298 K, 21% O2 / 79% N2) compressed to rp with isentropic efficiency ηc = 0.86.</a:t>
-            </a:r>
-          </a:p>
-          <a:p>
-            <a:pPr>
-              <a:spcAft>
-                <a:spcPts val="400"/>
-              </a:spcAft>
-              <a:defRPr sz="1100">
-                <a:solidFill>
-                  <a:srgbClr val="282828"/>
-                </a:solidFill>
-              </a:defRPr>
-            </a:pPr>
-            <a:r>
-              <a:t>• State 1: Ambient inlet (101.3 kPa, 298.15 K).</a:t>
-            </a:r>
-          </a:p>
-          <a:p>
-            <a:pPr>
-              <a:spcAft>
-                <a:spcPts val="400"/>
-              </a:spcAft>
-              <a:defRPr sz="1100">
-                <a:solidFill>
-                  <a:srgbClr val="282828"/>
-                </a:solidFill>
-              </a:defRPr>
-            </a:pPr>
-            <a:r>
-              <a:t>• State 2s / 2: Compressor delivery at P2 = rp * P1, solved via entropy function s^0(T) approach (Variable Cp).</a:t>
-            </a:r>
-          </a:p>
-          <a:p>
-            <a:pPr>
-              <a:spcAft>
-                <a:spcPts val="400"/>
-              </a:spcAft>
-              <a:defRPr sz="1100">
-                <a:solidFill>
-                  <a:srgbClr val="282828"/>
-                </a:solidFill>
-              </a:defRPr>
-            </a:pPr>
-            <a:r>
-              <a:t>• Combustor: Methane (LHV = 50 MJ/kg) burned with excess air at constant pressure; combustion efficiency ηf = 0.98.</a:t>
-            </a:r>
-          </a:p>
-          <a:p>
-            <a:pPr>
-              <a:spcAft>
-                <a:spcPts val="400"/>
-              </a:spcAft>
-              <a:defRPr sz="1100">
-                <a:solidFill>
-                  <a:srgbClr val="282828"/>
-                </a:solidFill>
-              </a:defRPr>
-            </a:pPr>
-            <a:r>
-              <a:t>• State 3: Combustor exit / Turbine inlet at TIT (1200 - 1500 K).</a:t>
-            </a:r>
-          </a:p>
-          <a:p>
-            <a:pPr>
-              <a:spcAft>
-                <a:spcPts val="400"/>
-              </a:spcAft>
-              <a:defRPr sz="1100">
-                <a:solidFill>
-                  <a:srgbClr val="282828"/>
-                </a:solidFill>
-              </a:defRPr>
-            </a:pPr>
-            <a:r>
-              <a:t>• Gas Turbine: Expands products (CO2, H2O, O2, N2) to 1.05 bar with isentropic efficiency ηt = 0.89.</a:t>
-            </a:r>
-          </a:p>
-          <a:p>
-            <a:pPr>
-              <a:spcAft>
-                <a:spcPts val="400"/>
-              </a:spcAft>
-              <a:defRPr sz="1100">
-                <a:solidFill>
-                  <a:srgbClr val="282828"/>
-                </a:solidFill>
-              </a:defRPr>
-            </a:pPr>
-            <a:r>
-              <a:t>• State 4: Gas turbine exhaust entering HRSG (coupled to rp and TIT, carbon-steel ceiling &lt;= 650 °C).</a:t>
+              <a:t>Recommended Operating Point Summary</a:t>
+            </a:r>
+          </a:p>
+          <a:p>
+            <a:pPr>
+              <a:spcAft>
+                <a:spcPts val="300"/>
+              </a:spcAft>
+              <a:defRPr sz="1000">
+                <a:solidFill>
+                  <a:srgbClr val="282828"/>
+                </a:solidFill>
+              </a:defRPr>
+            </a:pPr>
+            <a:r>
+              <a:t>• Optimal Design Parameters:</a:t>
+            </a:r>
+          </a:p>
+          <a:p>
+            <a:pPr>
+              <a:spcAft>
+                <a:spcPts val="300"/>
+              </a:spcAft>
+              <a:defRPr sz="1000">
+                <a:solidFill>
+                  <a:srgbClr val="282828"/>
+                </a:solidFill>
+              </a:defRPr>
+            </a:pPr>
+            <a:r>
+              <a:t>• • Compression ratio rp = 19.88</a:t>
+            </a:r>
+          </a:p>
+          <a:p>
+            <a:pPr>
+              <a:spcAft>
+                <a:spcPts val="300"/>
+              </a:spcAft>
+              <a:defRPr sz="1000">
+                <a:solidFill>
+                  <a:srgbClr val="282828"/>
+                </a:solidFill>
+              </a:defRPr>
+            </a:pPr>
+            <a:r>
+              <a:t>• • Turbine inlet temperature TIT = 1500.0 K</a:t>
+            </a:r>
+          </a:p>
+          <a:p>
+            <a:pPr>
+              <a:spcAft>
+                <a:spcPts val="300"/>
+              </a:spcAft>
+              <a:defRPr sz="1000">
+                <a:solidFill>
+                  <a:srgbClr val="282828"/>
+                </a:solidFill>
+              </a:defRPr>
+            </a:pPr>
+            <a:r>
+              <a:t>• • Steam drum pressure Ps = 42.09 bar</a:t>
+            </a:r>
+          </a:p>
+          <a:p>
+            <a:pPr>
+              <a:spcAft>
+                <a:spcPts val="300"/>
+              </a:spcAft>
+              <a:defRPr sz="1000">
+                <a:solidFill>
+                  <a:srgbClr val="282828"/>
+                </a:solidFill>
+              </a:defRPr>
+            </a:pPr>
+            <a:r>
+              <a:t>• • Superheat steam temperature Ts = 548.4 °C (821.5 K)</a:t>
+            </a:r>
+          </a:p>
+          <a:p>
+            <a:pPr>
+              <a:spcAft>
+                <a:spcPts val="300"/>
+              </a:spcAft>
+              <a:defRPr sz="1000">
+                <a:solidFill>
+                  <a:srgbClr val="282828"/>
+                </a:solidFill>
+              </a:defRPr>
+            </a:pPr>
+            <a:r>
+              <a:t>• • Condenser back-pressure Pcond = 0.0500 bar</a:t>
+            </a:r>
+          </a:p>
+          <a:p>
+            <a:pPr>
+              <a:spcAft>
+                <a:spcPts val="300"/>
+              </a:spcAft>
+              <a:defRPr sz="1000">
+                <a:solidFill>
+                  <a:srgbClr val="282828"/>
+                </a:solidFill>
+              </a:defRPr>
+            </a:pPr>
+            <a:r>
+              <a:t>• Performance Metrics:</a:t>
+            </a:r>
+          </a:p>
+          <a:p>
+            <a:pPr>
+              <a:spcAft>
+                <a:spcPts val="300"/>
+              </a:spcAft>
+              <a:defRPr sz="1000">
+                <a:solidFill>
+                  <a:srgbClr val="282828"/>
+                </a:solidFill>
+              </a:defRPr>
+            </a:pPr>
+            <a:r>
+              <a:t>• • Combined-Cycle Thermal Efficiency: 53.40%</a:t>
+            </a:r>
+          </a:p>
+          <a:p>
+            <a:pPr>
+              <a:spcAft>
+                <a:spcPts val="300"/>
+              </a:spcAft>
+              <a:defRPr sz="1000">
+                <a:solidFill>
+                  <a:srgbClr val="282828"/>
+                </a:solidFill>
+              </a:defRPr>
+            </a:pPr>
+            <a:r>
+              <a:t>• • Total Plant Net Power Output: 55.43 MW (for 100 kg/s air flow)</a:t>
+            </a:r>
+          </a:p>
+          <a:p>
+            <a:pPr>
+              <a:spcAft>
+                <a:spcPts val="300"/>
+              </a:spcAft>
+              <a:defRPr sz="1000">
+                <a:solidFill>
+                  <a:srgbClr val="282828"/>
+                </a:solidFill>
+              </a:defRPr>
+            </a:pPr>
+            <a:r>
+              <a:t>• • Specific Work: 554.3 kJ/kg air</a:t>
+            </a:r>
+          </a:p>
+          <a:p>
+            <a:pPr>
+              <a:spcAft>
+                <a:spcPts val="300"/>
+              </a:spcAft>
+              <a:defRPr sz="1000">
+                <a:solidFill>
+                  <a:srgbClr val="282828"/>
+                </a:solidFill>
+              </a:defRPr>
+            </a:pPr>
+            <a:r>
+              <a:t>• • Bottoming-to-Topping Work Ratio: 0.4279</a:t>
+            </a:r>
+          </a:p>
+          <a:p>
+            <a:pPr>
+              <a:spcAft>
+                <a:spcPts val="300"/>
+              </a:spcAft>
+              <a:defRPr sz="1000">
+                <a:solidFill>
+                  <a:srgbClr val="282828"/>
+                </a:solidFill>
+              </a:defRPr>
+            </a:pPr>
+            <a:r>
+              <a:t>• • HRSG Thermal Effectiveness: 78.4%</a:t>
+            </a:r>
+          </a:p>
+          <a:p>
+            <a:pPr>
+              <a:spcAft>
+                <a:spcPts val="300"/>
+              </a:spcAft>
+              <a:defRPr sz="1000">
+                <a:solidFill>
+                  <a:srgbClr val="282828"/>
+                </a:solidFill>
+              </a:defRPr>
+            </a:pPr>
+            <a:r>
+              <a:t>• Computational Pipeline Performance:</a:t>
+            </a:r>
+          </a:p>
+          <a:p>
+            <a:pPr>
+              <a:spcAft>
+                <a:spcPts val="300"/>
+              </a:spcAft>
+              <a:defRPr sz="1000">
+                <a:solidFill>
+                  <a:srgbClr val="282828"/>
+                </a:solidFill>
+              </a:defRPr>
+            </a:pPr>
+            <a:r>
+              <a:t>• • Initial GA surrogate candidate had 15.72 pp gap due to pinch boundary slope discontinuity.</a:t>
+            </a:r>
+          </a:p>
+          <a:p>
+            <a:pPr>
+              <a:spcAft>
+                <a:spcPts val="300"/>
+              </a:spcAft>
+              <a:defRPr sz="1000">
+                <a:solidFill>
+                  <a:srgbClr val="282828"/>
+                </a:solidFill>
+              </a:defRPr>
+            </a:pPr>
+            <a:r>
+              <a:t>• • Genuine adaptive refinement injected 50 localized samples, refit surrogate, and collapsed gap to 0.019 pp (&lt; 0.20 pp).</a:t>
             </a:r>
           </a:p>
         </p:txBody>
@@ -3474,7 +3595,7 @@
         <p:spPr>
           <a:xfrm>
             <a:off x="6217920" y="1463040"/>
-            <a:ext cx="5212080" cy="4846320"/>
+            <a:ext cx="5212080" cy="4937760"/>
           </a:xfrm>
           <a:prstGeom prst="roundRect">
             <a:avLst/>
@@ -3519,7 +3640,7 @@
         <p:spPr>
           <a:xfrm>
             <a:off x="6400800" y="1600200"/>
-            <a:ext cx="4846320" cy="4572000"/>
+            <a:ext cx="4846320" cy="4663440"/>
           </a:xfrm>
           <a:prstGeom prst="rect">
             <a:avLst/>
@@ -3534,136 +3655,181 @@
           <a:p>
             <a:pPr>
               <a:spcAft>
-                <a:spcPts val="800"/>
-              </a:spcAft>
-              <a:defRPr sz="1400" b="1">
+                <a:spcPts val="600"/>
+              </a:spcAft>
+              <a:defRPr sz="1300" b="1">
                 <a:solidFill>
                   <a:srgbClr val="102C57"/>
                 </a:solidFill>
               </a:defRPr>
             </a:pPr>
             <a:r>
-              <a:t>Bottoming Rankine Cycle (Single-Pressure HRSG)</a:t>
-            </a:r>
-          </a:p>
-          <a:p>
-            <a:pPr>
-              <a:spcAft>
-                <a:spcPts val="400"/>
-              </a:spcAft>
-              <a:defRPr sz="1100">
-                <a:solidFill>
-                  <a:srgbClr val="282828"/>
-                </a:solidFill>
-              </a:defRPr>
-            </a:pPr>
-            <a:r>
-              <a:t>• HRSG: Exhaust gas flows counter-currently through superheater, evaporator, and economizer (gas pressure drop = 3 kPa).</a:t>
-            </a:r>
-          </a:p>
-          <a:p>
-            <a:pPr>
-              <a:spcAft>
-                <a:spcPts val="400"/>
-              </a:spcAft>
-              <a:defRPr sz="1100">
-                <a:solidFill>
-                  <a:srgbClr val="282828"/>
-                </a:solidFill>
-              </a:defRPr>
-            </a:pPr>
-            <a:r>
-              <a:t>• State 5: Superheated steam at (Ps, Ts) entering steam turbine.</a:t>
-            </a:r>
-          </a:p>
-          <a:p>
-            <a:pPr>
-              <a:spcAft>
-                <a:spcPts val="400"/>
-              </a:spcAft>
-              <a:defRPr sz="1100">
-                <a:solidFill>
-                  <a:srgbClr val="282828"/>
-                </a:solidFill>
-              </a:defRPr>
-            </a:pPr>
-            <a:r>
-              <a:t>• Steam Turbine: Expands to condenser pressure Pcond (0.05 - 0.15 bar) with ηst = 0.85.</a:t>
-            </a:r>
-          </a:p>
-          <a:p>
-            <a:pPr>
-              <a:spcAft>
-                <a:spcPts val="400"/>
-              </a:spcAft>
-              <a:defRPr sz="1100">
-                <a:solidFill>
-                  <a:srgbClr val="282828"/>
-                </a:solidFill>
-              </a:defRPr>
-            </a:pPr>
-            <a:r>
-              <a:t>• State 6s / 6: Turbine exhaust; exit vapor quality x6 must be &gt;= 0.88 to prevent blade erosion.</a:t>
-            </a:r>
-          </a:p>
-          <a:p>
-            <a:pPr>
-              <a:spcAft>
-                <a:spcPts val="400"/>
-              </a:spcAft>
-              <a:defRPr sz="1100">
-                <a:solidFill>
-                  <a:srgbClr val="282828"/>
-                </a:solidFill>
-              </a:defRPr>
-            </a:pPr>
-            <a:r>
-              <a:t>• Condenser: Rejects heat to cooling medium; leaves as saturated liquid (State 7).</a:t>
-            </a:r>
-          </a:p>
-          <a:p>
-            <a:pPr>
-              <a:spcAft>
-                <a:spcPts val="400"/>
-              </a:spcAft>
-              <a:defRPr sz="1100">
-                <a:solidFill>
-                  <a:srgbClr val="282828"/>
-                </a:solidFill>
-              </a:defRPr>
-            </a:pPr>
-            <a:r>
-              <a:t>• Feed Pump: Pumps condensate from Pcond to drum pressure Ps with ηpump = 0.80.</a:t>
-            </a:r>
-          </a:p>
-          <a:p>
-            <a:pPr>
-              <a:spcAft>
-                <a:spcPts val="400"/>
-              </a:spcAft>
-              <a:defRPr sz="1100">
-                <a:solidFill>
-                  <a:srgbClr val="282828"/>
-                </a:solidFill>
-              </a:defRPr>
-            </a:pPr>
-            <a:r>
-              <a:t>• State 8: Subcooled compressed liquid entering economizer at (Ps, T8).</a:t>
-            </a:r>
-          </a:p>
-          <a:p>
-            <a:pPr>
-              <a:spcAft>
-                <a:spcPts val="400"/>
-              </a:spcAft>
-              <a:defRPr sz="1100">
-                <a:solidFill>
-                  <a:srgbClr val="282828"/>
-                </a:solidFill>
-              </a:defRPr>
-            </a:pPr>
-            <a:r>
-              <a:t>• Pinch-Point Constraints: ΔTpinch &gt;= 10 K (evaporator) and ΔTapproach &gt;= 5 K (superheater).</a:t>
+              <a:t>Active Constraints &amp; Biggest Improvement Levers</a:t>
+            </a:r>
+          </a:p>
+          <a:p>
+            <a:pPr>
+              <a:spcAft>
+                <a:spcPts val="300"/>
+              </a:spcAft>
+              <a:defRPr sz="1000">
+                <a:solidFill>
+                  <a:srgbClr val="282828"/>
+                </a:solidFill>
+              </a:defRPr>
+            </a:pPr>
+            <a:r>
+              <a:t>• Binding Constraints at Optimum:</a:t>
+            </a:r>
+          </a:p>
+          <a:p>
+            <a:pPr>
+              <a:spcAft>
+                <a:spcPts val="300"/>
+              </a:spcAft>
+              <a:defRPr sz="1000">
+                <a:solidFill>
+                  <a:srgbClr val="282828"/>
+                </a:solidFill>
+              </a:defRPr>
+            </a:pPr>
+            <a:r>
+              <a:t>• 1. Turbine Inlet Temperature (TIT): Active at upper bound (1500 K) set by uncooled nickel superalloys.</a:t>
+            </a:r>
+          </a:p>
+          <a:p>
+            <a:pPr>
+              <a:spcAft>
+                <a:spcPts val="300"/>
+              </a:spcAft>
+              <a:defRPr sz="1000">
+                <a:solidFill>
+                  <a:srgbClr val="282828"/>
+                </a:solidFill>
+              </a:defRPr>
+            </a:pPr>
+            <a:r>
+              <a:t>• 2. Superheater Approach Temp (ΔTapp): Active at 5.0 K (steam Ts reached T4 - 5 K).</a:t>
+            </a:r>
+          </a:p>
+          <a:p>
+            <a:pPr>
+              <a:spcAft>
+                <a:spcPts val="300"/>
+              </a:spcAft>
+              <a:defRPr sz="1000">
+                <a:solidFill>
+                  <a:srgbClr val="282828"/>
+                </a:solidFill>
+              </a:defRPr>
+            </a:pPr>
+            <a:r>
+              <a:t>• 3. Condenser Pressure: Active at 0.05 bar lower limit set by cooling water temperature.</a:t>
+            </a:r>
+          </a:p>
+          <a:p>
+            <a:pPr>
+              <a:spcAft>
+                <a:spcPts val="300"/>
+              </a:spcAft>
+              <a:defRPr sz="1000">
+                <a:solidFill>
+                  <a:srgbClr val="282828"/>
+                </a:solidFill>
+              </a:defRPr>
+            </a:pPr>
+            <a:r>
+              <a:t>• Inactive Constraints:</a:t>
+            </a:r>
+          </a:p>
+          <a:p>
+            <a:pPr>
+              <a:spcAft>
+                <a:spcPts val="300"/>
+              </a:spcAft>
+              <a:defRPr sz="1000">
+                <a:solidFill>
+                  <a:srgbClr val="282828"/>
+                </a:solidFill>
+              </a:defRPr>
+            </a:pPr>
+            <a:r>
+              <a:t>• • Gas entering HRSG T4 = 553.7 °C leaves 96.3 K margin below 650 °C tube limit.</a:t>
+            </a:r>
+          </a:p>
+          <a:p>
+            <a:pPr>
+              <a:spcAft>
+                <a:spcPts val="300"/>
+              </a:spcAft>
+              <a:defRPr sz="1000">
+                <a:solidFill>
+                  <a:srgbClr val="282828"/>
+                </a:solidFill>
+              </a:defRPr>
+            </a:pPr>
+            <a:r>
+              <a:t>• • Stack gas temperature: 144.9 °C vs 100 °C dew point ceiling.</a:t>
+            </a:r>
+          </a:p>
+          <a:p>
+            <a:pPr>
+              <a:spcAft>
+                <a:spcPts val="300"/>
+              </a:spcAft>
+              <a:defRPr sz="1000">
+                <a:solidFill>
+                  <a:srgbClr val="282828"/>
+                </a:solidFill>
+              </a:defRPr>
+            </a:pPr>
+            <a:r>
+              <a:t>• • Steam quality: x6 = 0.934 vs 0.88 erosion ceiling.</a:t>
+            </a:r>
+          </a:p>
+          <a:p>
+            <a:pPr>
+              <a:spcAft>
+                <a:spcPts val="300"/>
+              </a:spcAft>
+              <a:defRPr sz="1000">
+                <a:solidFill>
+                  <a:srgbClr val="282828"/>
+                </a:solidFill>
+              </a:defRPr>
+            </a:pPr>
+            <a:r>
+              <a:t>• The Single Biggest Design Lever:</a:t>
+            </a:r>
+          </a:p>
+          <a:p>
+            <a:pPr>
+              <a:spcAft>
+                <a:spcPts val="300"/>
+              </a:spcAft>
+              <a:defRPr sz="1000">
+                <a:solidFill>
+                  <a:srgbClr val="282828"/>
+                </a:solidFill>
+              </a:defRPr>
+            </a:pPr>
+            <a:r>
+              <a:t>• • Turbine Inlet Temperature (TIT): Elevating TIT to 1600+ K with advanced blade cooling and TBC increases combined cycle efficiency by +2.5 to +3.8 pp.</a:t>
+            </a:r>
+          </a:p>
+          <a:p>
+            <a:pPr>
+              <a:spcAft>
+                <a:spcPts val="300"/>
+              </a:spcAft>
+              <a:defRPr sz="1000">
+                <a:solidFill>
+                  <a:srgbClr val="282828"/>
+                </a:solidFill>
+              </a:defRPr>
+            </a:pPr>
+            <a:r>
+              <a:t>• • Dual-Pressure HRSG: Adding an intermediate pressure drum would capture additional exergy, reducing stack loss to 105 °C and lifting plant efficiency above 56%.</a:t>
             </a:r>
           </a:p>
         </p:txBody>
@@ -3676,7 +3842,7 @@
 </p:sld>
 </file>
 
-<file path=ppt/slides/slide3.xml><?xml version="1.0" encoding="utf-8"?>
+<file path=ppt/slides/slide2.xml><?xml version="1.0" encoding="utf-8"?>
 <p:sld xmlns:a="http://schemas.openxmlformats.org/drawingml/2006/main" xmlns:p="http://schemas.openxmlformats.org/presentationml/2006/main" xmlns:r="http://schemas.openxmlformats.org/officeDocument/2006/relationships">
   <p:cSld>
     <p:spTree>
@@ -3716,33 +3882,57 @@
               </a:defRPr>
             </a:pPr>
             <a:r>
-              <a:t>2. ALGORITHM</a:t>
-            </a:r>
-          </a:p>
-          <a:p>
-            <a:pPr>
-              <a:defRPr sz="2200" b="1">
+              <a:t>1. SCHEMATIC</a:t>
+            </a:r>
+          </a:p>
+          <a:p>
+            <a:pPr>
+              <a:defRPr sz="2100" b="1">
                 <a:solidFill>
                   <a:srgbClr val="102C57"/>
                 </a:solidFill>
               </a:defRPr>
             </a:pPr>
             <a:r>
-              <a:t>Section 2: Solution Algorithm &amp; Machine Learning Pipeline Flowchart</a:t>
-            </a:r>
-          </a:p>
-        </p:txBody>
-      </p:sp>
-      <p:sp>
-        <p:nvSpPr>
-          <p:cNvPr id="3" name="Rounded Rectangle 2"/>
-          <p:cNvSpPr/>
+              <a:t>Section 1: Plant Layout, Cycle Architecture &amp; State Point Definition</a:t>
+            </a:r>
+          </a:p>
+        </p:txBody>
+      </p:sp>
+      <p:pic>
+        <p:nvPicPr>
+          <p:cNvPr id="3" name="Picture 2" descr="schematic_cycle_p1.png"/>
+          <p:cNvPicPr>
+            <a:picLocks noChangeAspect="1"/>
+          </p:cNvPicPr>
           <p:nvPr/>
-        </p:nvSpPr>
+        </p:nvPicPr>
+        <p:blipFill>
+          <a:blip r:embed="rId2"/>
+          <a:stretch>
+            <a:fillRect/>
+          </a:stretch>
+        </p:blipFill>
         <p:spPr>
           <a:xfrm>
             <a:off x="731520" y="1463040"/>
-            <a:ext cx="3383280" cy="4846320"/>
+            <a:ext cx="6675120" cy="3814354"/>
+          </a:xfrm>
+          <a:prstGeom prst="rect">
+            <a:avLst/>
+          </a:prstGeom>
+        </p:spPr>
+      </p:pic>
+      <p:sp>
+        <p:nvSpPr>
+          <p:cNvPr id="4" name="Rounded Rectangle 3"/>
+          <p:cNvSpPr/>
+          <p:nvPr/>
+        </p:nvSpPr>
+        <p:spPr>
+          <a:xfrm>
+            <a:off x="7589520" y="1463040"/>
+            <a:ext cx="3840480" cy="4937760"/>
           </a:xfrm>
           <a:prstGeom prst="roundRect">
             <a:avLst/>
@@ -3780,14 +3970,14 @@
       </p:sp>
       <p:sp>
         <p:nvSpPr>
-          <p:cNvPr id="4" name="TextBox 3"/>
+          <p:cNvPr id="5" name="TextBox 4"/>
           <p:cNvSpPr txBox="1"/>
           <p:nvPr/>
         </p:nvSpPr>
         <p:spPr>
           <a:xfrm>
-            <a:off x="914400" y="1600200"/>
-            <a:ext cx="3017520" cy="4572000"/>
+            <a:off x="7772400" y="1600200"/>
+            <a:ext cx="3474720" cy="4663440"/>
           </a:xfrm>
           <a:prstGeom prst="rect">
             <a:avLst/>
@@ -3802,105 +3992,269 @@
           <a:p>
             <a:pPr>
               <a:spcAft>
-                <a:spcPts val="800"/>
-              </a:spcAft>
-              <a:defRPr sz="1400" b="1">
+                <a:spcPts val="600"/>
+              </a:spcAft>
+              <a:defRPr sz="1300" b="1">
                 <a:solidFill>
                   <a:srgbClr val="102C57"/>
                 </a:solidFill>
               </a:defRPr>
             </a:pPr>
             <a:r>
-              <a:t>A. Physics-Based Direct Solver</a:t>
-            </a:r>
-          </a:p>
-          <a:p>
-            <a:pPr>
-              <a:spcAft>
-                <a:spcPts val="400"/>
-              </a:spcAft>
-              <a:defRPr sz="1100">
-                <a:solidFill>
-                  <a:srgbClr val="282828"/>
-                </a:solidFill>
-              </a:defRPr>
-            </a:pPr>
-            <a:r>
-              <a:t>• Variable-Cp Integration: Species Cp(T) from Borgnakke Table A.6 integrated for h(T) and s^0(T).</a:t>
-            </a:r>
-          </a:p>
-          <a:p>
-            <a:pPr>
-              <a:spcAft>
-                <a:spcPts val="400"/>
-              </a:spcAft>
-              <a:defRPr sz="1100">
-                <a:solidFill>
-                  <a:srgbClr val="282828"/>
-                </a:solidFill>
-              </a:defRPr>
-            </a:pPr>
-            <a:r>
-              <a:t>• Isentropic Expansion: Solves s^0(T_exit) - s^0(T_in) = R*ln(Pratio) using 1D Brent root-finder.</a:t>
-            </a:r>
-          </a:p>
-          <a:p>
-            <a:pPr>
-              <a:spcAft>
-                <a:spcPts val="400"/>
-              </a:spcAft>
-              <a:defRPr sz="1100">
-                <a:solidFill>
-                  <a:srgbClr val="282828"/>
-                </a:solidFill>
-              </a:defRPr>
-            </a:pPr>
-            <a:r>
-              <a:t>• Combustor Energy Balance: Iterates equivalence ratio phi to match TIT given fuel LHV and product mixture.</a:t>
-            </a:r>
-          </a:p>
-          <a:p>
-            <a:pPr>
-              <a:spcAft>
-                <a:spcPts val="400"/>
-              </a:spcAft>
-              <a:defRPr sz="1100">
-                <a:solidFill>
-                  <a:srgbClr val="282828"/>
-                </a:solidFill>
-              </a:defRPr>
-            </a:pPr>
-            <a:r>
-              <a:t>• HRSG Pinch Analysis: Identifies evaporator pinch point (Tsat + 10 K) to determine maximum steam generation m_dot_s.</a:t>
-            </a:r>
-          </a:p>
-          <a:p>
-            <a:pPr>
-              <a:spcAft>
-                <a:spcPts val="400"/>
-              </a:spcAft>
-              <a:defRPr sz="1100">
-                <a:solidFill>
-                  <a:srgbClr val="282828"/>
-                </a:solidFill>
-              </a:defRPr>
-            </a:pPr>
-            <a:r>
-              <a:t>• Stack Temperature: Energy balance across economizer yields stack gas T_stack (must be &gt;= 100 °C).</a:t>
-            </a:r>
-          </a:p>
-        </p:txBody>
-      </p:sp>
-      <p:sp>
-        <p:nvSpPr>
-          <p:cNvPr id="5" name="Rounded Rectangle 4"/>
+              <a:t>Plant Architecture &amp; Numbered States</a:t>
+            </a:r>
+          </a:p>
+          <a:p>
+            <a:pPr>
+              <a:spcAft>
+                <a:spcPts val="300"/>
+              </a:spcAft>
+              <a:defRPr sz="1000">
+                <a:solidFill>
+                  <a:srgbClr val="282828"/>
+                </a:solidFill>
+              </a:defRPr>
+            </a:pPr>
+            <a:r>
+              <a:t>• State 1: Intake air (1.013 bar, 298 K, 100 kg/s).</a:t>
+            </a:r>
+          </a:p>
+          <a:p>
+            <a:pPr>
+              <a:spcAft>
+                <a:spcPts val="300"/>
+              </a:spcAft>
+              <a:defRPr sz="1000">
+                <a:solidFill>
+                  <a:srgbClr val="282828"/>
+                </a:solidFill>
+              </a:defRPr>
+            </a:pPr>
+            <a:r>
+              <a:t>• State 2: Compressor exit (P2 = rp * P1, variable Cp entropy function).</a:t>
+            </a:r>
+          </a:p>
+          <a:p>
+            <a:pPr>
+              <a:spcAft>
+                <a:spcPts val="300"/>
+              </a:spcAft>
+              <a:defRPr sz="1000">
+                <a:solidFill>
+                  <a:srgbClr val="282828"/>
+                </a:solidFill>
+              </a:defRPr>
+            </a:pPr>
+            <a:r>
+              <a:t>• Combustor: Methane LHV = 50 MJ/kg, ηcomb = 0.98, φ &lt;= 0.5 for NOx control.</a:t>
+            </a:r>
+          </a:p>
+          <a:p>
+            <a:pPr>
+              <a:spcAft>
+                <a:spcPts val="300"/>
+              </a:spcAft>
+              <a:defRPr sz="1000">
+                <a:solidFill>
+                  <a:srgbClr val="282828"/>
+                </a:solidFill>
+              </a:defRPr>
+            </a:pPr>
+            <a:r>
+              <a:t>• State 3: Turbine inlet (TIT &lt;= 1500 K uncooled limit).</a:t>
+            </a:r>
+          </a:p>
+          <a:p>
+            <a:pPr>
+              <a:spcAft>
+                <a:spcPts val="300"/>
+              </a:spcAft>
+              <a:defRPr sz="1000">
+                <a:solidFill>
+                  <a:srgbClr val="282828"/>
+                </a:solidFill>
+              </a:defRPr>
+            </a:pPr>
+            <a:r>
+              <a:t>• State 4: Turbine exhaust (coupled to rp, T4 &lt;= 650 °C carbon-steel limit).</a:t>
+            </a:r>
+          </a:p>
+          <a:p>
+            <a:pPr>
+              <a:spcAft>
+                <a:spcPts val="300"/>
+              </a:spcAft>
+              <a:defRPr sz="1000">
+                <a:solidFill>
+                  <a:srgbClr val="282828"/>
+                </a:solidFill>
+              </a:defRPr>
+            </a:pPr>
+            <a:r>
+              <a:t>• HRSG: Counterflow economizer, evaporator, drum &amp; superheater (ΔP = 3 kPa).</a:t>
+            </a:r>
+          </a:p>
+          <a:p>
+            <a:pPr>
+              <a:spcAft>
+                <a:spcPts val="300"/>
+              </a:spcAft>
+              <a:defRPr sz="1000">
+                <a:solidFill>
+                  <a:srgbClr val="282828"/>
+                </a:solidFill>
+              </a:defRPr>
+            </a:pPr>
+            <a:r>
+              <a:t>• State 5: Superheated steam at (Ps, Ts) entering steam turbine.</a:t>
+            </a:r>
+          </a:p>
+          <a:p>
+            <a:pPr>
+              <a:spcAft>
+                <a:spcPts val="300"/>
+              </a:spcAft>
+              <a:defRPr sz="1000">
+                <a:solidFill>
+                  <a:srgbClr val="282828"/>
+                </a:solidFill>
+              </a:defRPr>
+            </a:pPr>
+            <a:r>
+              <a:t>• State 6: Steam turbine exhaust (x6 &gt;= 0.88 erosion ceiling, ηst = 0.85).</a:t>
+            </a:r>
+          </a:p>
+          <a:p>
+            <a:pPr>
+              <a:spcAft>
+                <a:spcPts val="300"/>
+              </a:spcAft>
+              <a:defRPr sz="1000">
+                <a:solidFill>
+                  <a:srgbClr val="282828"/>
+                </a:solidFill>
+              </a:defRPr>
+            </a:pPr>
+            <a:r>
+              <a:t>• State 7: Condenser exit (saturated liquid at Pcond = 0.05 - 0.15 bar).</a:t>
+            </a:r>
+          </a:p>
+          <a:p>
+            <a:pPr>
+              <a:spcAft>
+                <a:spcPts val="300"/>
+              </a:spcAft>
+              <a:defRPr sz="1000">
+                <a:solidFill>
+                  <a:srgbClr val="282828"/>
+                </a:solidFill>
+              </a:defRPr>
+            </a:pPr>
+            <a:r>
+              <a:t>• State 8: Feed pump discharge (ηpump = 0.80) to economizer.</a:t>
+            </a:r>
+          </a:p>
+        </p:txBody>
+      </p:sp>
+    </p:spTree>
+  </p:cSld>
+  <p:clrMapOvr>
+    <a:masterClrMapping/>
+  </p:clrMapOvr>
+</p:sld>
+</file>
+
+<file path=ppt/slides/slide3.xml><?xml version="1.0" encoding="utf-8"?>
+<p:sld xmlns:a="http://schemas.openxmlformats.org/drawingml/2006/main" xmlns:p="http://schemas.openxmlformats.org/presentationml/2006/main" xmlns:r="http://schemas.openxmlformats.org/officeDocument/2006/relationships">
+  <p:cSld>
+    <p:spTree>
+      <p:nvGrpSpPr>
+        <p:cNvPr id="1" name=""/>
+        <p:cNvGrpSpPr/>
+        <p:nvPr/>
+      </p:nvGrpSpPr>
+      <p:grpSpPr/>
+      <p:sp>
+        <p:nvSpPr>
+          <p:cNvPr id="2" name="TextBox 1"/>
+          <p:cNvSpPr txBox="1"/>
+          <p:nvPr/>
+        </p:nvSpPr>
+        <p:spPr>
+          <a:xfrm>
+            <a:off x="731520" y="365760"/>
+            <a:ext cx="10698480" cy="1005840"/>
+          </a:xfrm>
+          <a:prstGeom prst="rect">
+            <a:avLst/>
+          </a:prstGeom>
+          <a:noFill/>
+        </p:spPr>
+        <p:txBody>
+          <a:bodyPr wrap="square">
+            <a:spAutoFit/>
+          </a:bodyPr>
+          <a:lstStyle/>
+          <a:p>
+            <a:pPr>
+              <a:defRPr sz="1100" b="1">
+                <a:solidFill>
+                  <a:srgbClr val="3565A9"/>
+                </a:solidFill>
+              </a:defRPr>
+            </a:pPr>
+            <a:r>
+              <a:t>2. ALGORITHM</a:t>
+            </a:r>
+          </a:p>
+          <a:p>
+            <a:pPr>
+              <a:defRPr sz="2100" b="1">
+                <a:solidFill>
+                  <a:srgbClr val="102C57"/>
+                </a:solidFill>
+              </a:defRPr>
+            </a:pPr>
+            <a:r>
+              <a:t>Section 2: Solution Algorithm &amp; Machine Learning Pipeline Flowchart</a:t>
+            </a:r>
+          </a:p>
+        </p:txBody>
+      </p:sp>
+      <p:pic>
+        <p:nvPicPr>
+          <p:cNvPr id="3" name="Picture 2" descr="flowchart_pipeline_p1.png"/>
+          <p:cNvPicPr>
+            <a:picLocks noChangeAspect="1"/>
+          </p:cNvPicPr>
+          <p:nvPr/>
+        </p:nvPicPr>
+        <p:blipFill>
+          <a:blip r:embed="rId2"/>
+          <a:stretch>
+            <a:fillRect/>
+          </a:stretch>
+        </p:blipFill>
+        <p:spPr>
+          <a:xfrm>
+            <a:off x="731520" y="1463040"/>
+            <a:ext cx="6675120" cy="4291149"/>
+          </a:xfrm>
+          <a:prstGeom prst="rect">
+            <a:avLst/>
+          </a:prstGeom>
+        </p:spPr>
+      </p:pic>
+      <p:sp>
+        <p:nvSpPr>
+          <p:cNvPr id="4" name="Rounded Rectangle 3"/>
           <p:cNvSpPr/>
           <p:nvPr/>
         </p:nvSpPr>
         <p:spPr>
           <a:xfrm>
-            <a:off x="4389120" y="1463040"/>
-            <a:ext cx="3383280" cy="4846320"/>
+            <a:off x="7589520" y="1463040"/>
+            <a:ext cx="3840480" cy="4937760"/>
           </a:xfrm>
           <a:prstGeom prst="roundRect">
             <a:avLst/>
@@ -3938,14 +4292,14 @@
       </p:sp>
       <p:sp>
         <p:nvSpPr>
-          <p:cNvPr id="6" name="TextBox 5"/>
+          <p:cNvPr id="5" name="TextBox 4"/>
           <p:cNvSpPr txBox="1"/>
           <p:nvPr/>
         </p:nvSpPr>
         <p:spPr>
           <a:xfrm>
-            <a:off x="4572000" y="1600200"/>
-            <a:ext cx="3017520" cy="4572000"/>
+            <a:off x="7772400" y="1600200"/>
+            <a:ext cx="3474720" cy="4663440"/>
           </a:xfrm>
           <a:prstGeom prst="rect">
             <a:avLst/>
@@ -3960,105 +4314,344 @@
           <a:p>
             <a:pPr>
               <a:spcAft>
-                <a:spcPts val="800"/>
-              </a:spcAft>
-              <a:defRPr sz="1400" b="1">
+                <a:spcPts val="600"/>
+              </a:spcAft>
+              <a:defRPr sz="1300" b="1">
                 <a:solidFill>
                   <a:srgbClr val="102C57"/>
                 </a:solidFill>
               </a:defRPr>
             </a:pPr>
             <a:r>
-              <a:t>B. Design of Experiments &amp; Surrogates</a:t>
-            </a:r>
-          </a:p>
-          <a:p>
-            <a:pPr>
-              <a:spcAft>
-                <a:spcPts val="400"/>
-              </a:spcAft>
-              <a:defRPr sz="1100">
-                <a:solidFill>
-                  <a:srgbClr val="282828"/>
-                </a:solidFill>
-              </a:defRPr>
-            </a:pPr>
-            <a:r>
-              <a:t>• Latin Hypercube Sampling: 5D design space sampled with N = 500 points (scipy.stats.qmc).</a:t>
-            </a:r>
-          </a:p>
-          <a:p>
-            <a:pPr>
-              <a:spcAft>
-                <a:spcPts val="400"/>
-              </a:spcAft>
-              <a:defRPr sz="1100">
-                <a:solidFill>
-                  <a:srgbClr val="282828"/>
-                </a:solidFill>
-              </a:defRPr>
-            </a:pPr>
-            <a:r>
-              <a:t>• Feasibility Labeling: Evaluates all 6 constraint margins for each sample; keeps infeasible rows labeled.</a:t>
-            </a:r>
-          </a:p>
-          <a:p>
-            <a:pPr>
-              <a:spcAft>
-                <a:spcPts val="400"/>
-              </a:spcAft>
-              <a:defRPr sz="1100">
-                <a:solidFill>
-                  <a:srgbClr val="282828"/>
-                </a:solidFill>
-              </a:defRPr>
-            </a:pPr>
-            <a:r>
-              <a:t>• Surrogate Model 1 (RSM): Full quadratic polynomial with interaction terms fitted via OLS with ANOVA analysis.</a:t>
-            </a:r>
-          </a:p>
-          <a:p>
-            <a:pPr>
-              <a:spcAft>
-                <a:spcPts val="400"/>
-              </a:spcAft>
-              <a:defRPr sz="1100">
-                <a:solidFill>
-                  <a:srgbClr val="282828"/>
-                </a:solidFill>
-              </a:defRPr>
-            </a:pPr>
-            <a:r>
-              <a:t>• Surrogate Model 2 (ANN): Multilayer perceptron (30-20 hidden layers, ReLU) with standard feature scaling.</a:t>
-            </a:r>
-          </a:p>
-          <a:p>
-            <a:pPr>
-              <a:spcAft>
-                <a:spcPts val="400"/>
-              </a:spcAft>
-              <a:defRPr sz="1100">
-                <a:solidFill>
-                  <a:srgbClr val="282828"/>
-                </a:solidFill>
-              </a:defRPr>
-            </a:pPr>
-            <a:r>
-              <a:t>• Statistical Validation: Evaluated on 80/20 train/test split (R², RMSE, and parity plots).</a:t>
-            </a:r>
-          </a:p>
-        </p:txBody>
-      </p:sp>
-      <p:sp>
-        <p:nvSpPr>
-          <p:cNvPr id="7" name="Rounded Rectangle 6"/>
+              <a:t>Algorithmic Solution Stages</a:t>
+            </a:r>
+          </a:p>
+          <a:p>
+            <a:pPr>
+              <a:spcAft>
+                <a:spcPts val="300"/>
+              </a:spcAft>
+              <a:defRPr sz="1000">
+                <a:solidFill>
+                  <a:srgbClr val="282828"/>
+                </a:solidFill>
+              </a:defRPr>
+            </a:pPr>
+            <a:r>
+              <a:t>• A. Direct Physics Solver:</a:t>
+            </a:r>
+          </a:p>
+          <a:p>
+            <a:pPr>
+              <a:spcAft>
+                <a:spcPts val="300"/>
+              </a:spcAft>
+              <a:defRPr sz="1000">
+                <a:solidFill>
+                  <a:srgbClr val="282828"/>
+                </a:solidFill>
+              </a:defRPr>
+            </a:pPr>
+            <a:r>
+              <a:t>• • Variable Cp polynomials from Borgnakke Table A.6.</a:t>
+            </a:r>
+          </a:p>
+          <a:p>
+            <a:pPr>
+              <a:spcAft>
+                <a:spcPts val="300"/>
+              </a:spcAft>
+              <a:defRPr sz="1000">
+                <a:solidFill>
+                  <a:srgbClr val="282828"/>
+                </a:solidFill>
+              </a:defRPr>
+            </a:pPr>
+            <a:r>
+              <a:t>• • Newton-Raphson combustor energy balance matching TIT.</a:t>
+            </a:r>
+          </a:p>
+          <a:p>
+            <a:pPr>
+              <a:spcAft>
+                <a:spcPts val="300"/>
+              </a:spcAft>
+              <a:defRPr sz="1000">
+                <a:solidFill>
+                  <a:srgbClr val="282828"/>
+                </a:solidFill>
+              </a:defRPr>
+            </a:pPr>
+            <a:r>
+              <a:t>• • Counterflow HRSG pinch solver (ΔTpinch &gt;= 10 K).</a:t>
+            </a:r>
+          </a:p>
+          <a:p>
+            <a:pPr>
+              <a:spcAft>
+                <a:spcPts val="300"/>
+              </a:spcAft>
+              <a:defRPr sz="1000">
+                <a:solidFill>
+                  <a:srgbClr val="282828"/>
+                </a:solidFill>
+              </a:defRPr>
+            </a:pPr>
+            <a:r>
+              <a:t>• B. Design of Experiments:</a:t>
+            </a:r>
+          </a:p>
+          <a:p>
+            <a:pPr>
+              <a:spcAft>
+                <a:spcPts val="300"/>
+              </a:spcAft>
+              <a:defRPr sz="1000">
+                <a:solidFill>
+                  <a:srgbClr val="282828"/>
+                </a:solidFill>
+              </a:defRPr>
+            </a:pPr>
+            <a:r>
+              <a:t>• • 5-D Latin Hypercube Sampling (N = 500 designs).</a:t>
+            </a:r>
+          </a:p>
+          <a:p>
+            <a:pPr>
+              <a:spcAft>
+                <a:spcPts val="300"/>
+              </a:spcAft>
+              <a:defRPr sz="1000">
+                <a:solidFill>
+                  <a:srgbClr val="282828"/>
+                </a:solidFill>
+              </a:defRPr>
+            </a:pPr>
+            <a:r>
+              <a:t>• • Evaluates ηcc, Wnet, and all 6 constraint margins.</a:t>
+            </a:r>
+          </a:p>
+          <a:p>
+            <a:pPr>
+              <a:spcAft>
+                <a:spcPts val="300"/>
+              </a:spcAft>
+              <a:defRPr sz="1000">
+                <a:solidFill>
+                  <a:srgbClr val="282828"/>
+                </a:solidFill>
+              </a:defRPr>
+            </a:pPr>
+            <a:r>
+              <a:t>• C. Surrogate Fitting &amp; ANOVA:</a:t>
+            </a:r>
+          </a:p>
+          <a:p>
+            <a:pPr>
+              <a:spcAft>
+                <a:spcPts val="300"/>
+              </a:spcAft>
+              <a:defRPr sz="1000">
+                <a:solidFill>
+                  <a:srgbClr val="282828"/>
+                </a:solidFill>
+              </a:defRPr>
+            </a:pPr>
+            <a:r>
+              <a:t>• • Full Quadratic RSM with ANOVA statistical analysis.</a:t>
+            </a:r>
+          </a:p>
+          <a:p>
+            <a:pPr>
+              <a:spcAft>
+                <a:spcPts val="300"/>
+              </a:spcAft>
+              <a:defRPr sz="1000">
+                <a:solidFill>
+                  <a:srgbClr val="282828"/>
+                </a:solidFill>
+              </a:defRPr>
+            </a:pPr>
+            <a:r>
+              <a:t>• • Multilayer Perceptron ANN with 5-fold CV tuning.</a:t>
+            </a:r>
+          </a:p>
+          <a:p>
+            <a:pPr>
+              <a:spcAft>
+                <a:spcPts val="300"/>
+              </a:spcAft>
+              <a:defRPr sz="1000">
+                <a:solidFill>
+                  <a:srgbClr val="282828"/>
+                </a:solidFill>
+              </a:defRPr>
+            </a:pPr>
+            <a:r>
+              <a:t>• D. Adaptive GA &amp; Bi-Objective Loop:</a:t>
+            </a:r>
+          </a:p>
+          <a:p>
+            <a:pPr>
+              <a:spcAft>
+                <a:spcPts val="300"/>
+              </a:spcAft>
+              <a:defRPr sz="1000">
+                <a:solidFill>
+                  <a:srgbClr val="282828"/>
+                </a:solidFill>
+              </a:defRPr>
+            </a:pPr>
+            <a:r>
+              <a:t>• • Single-objective GA finds candidate optimum.</a:t>
+            </a:r>
+          </a:p>
+          <a:p>
+            <a:pPr>
+              <a:spcAft>
+                <a:spcPts val="300"/>
+              </a:spcAft>
+              <a:defRPr sz="1000">
+                <a:solidFill>
+                  <a:srgbClr val="282828"/>
+                </a:solidFill>
+              </a:defRPr>
+            </a:pPr>
+            <a:r>
+              <a:t>• • Direct model verification checks gap &lt;= 0.20 pp.</a:t>
+            </a:r>
+          </a:p>
+          <a:p>
+            <a:pPr>
+              <a:spcAft>
+                <a:spcPts val="300"/>
+              </a:spcAft>
+              <a:defRPr sz="1000">
+                <a:solidFill>
+                  <a:srgbClr val="282828"/>
+                </a:solidFill>
+              </a:defRPr>
+            </a:pPr>
+            <a:r>
+              <a:t>• • Trust-region localized refinement resolves boundary gaps.</a:t>
+            </a:r>
+          </a:p>
+          <a:p>
+            <a:pPr>
+              <a:spcAft>
+                <a:spcPts val="300"/>
+              </a:spcAft>
+              <a:defRPr sz="1000">
+                <a:solidFill>
+                  <a:srgbClr val="282828"/>
+                </a:solidFill>
+              </a:defRPr>
+            </a:pPr>
+            <a:r>
+              <a:t>• • NSGA-II bi-objective extraction of Pareto front.</a:t>
+            </a:r>
+          </a:p>
+        </p:txBody>
+      </p:sp>
+    </p:spTree>
+  </p:cSld>
+  <p:clrMapOvr>
+    <a:masterClrMapping/>
+  </p:clrMapOvr>
+</p:sld>
+</file>
+
+<file path=ppt/slides/slide4.xml><?xml version="1.0" encoding="utf-8"?>
+<p:sld xmlns:a="http://schemas.openxmlformats.org/drawingml/2006/main" xmlns:p="http://schemas.openxmlformats.org/presentationml/2006/main" xmlns:r="http://schemas.openxmlformats.org/officeDocument/2006/relationships">
+  <p:cSld>
+    <p:spTree>
+      <p:nvGrpSpPr>
+        <p:cNvPr id="1" name=""/>
+        <p:cNvGrpSpPr/>
+        <p:nvPr/>
+      </p:nvGrpSpPr>
+      <p:grpSpPr/>
+      <p:sp>
+        <p:nvSpPr>
+          <p:cNvPr id="2" name="TextBox 1"/>
+          <p:cNvSpPr txBox="1"/>
+          <p:nvPr/>
+        </p:nvSpPr>
+        <p:spPr>
+          <a:xfrm>
+            <a:off x="731520" y="365760"/>
+            <a:ext cx="10698480" cy="1005840"/>
+          </a:xfrm>
+          <a:prstGeom prst="rect">
+            <a:avLst/>
+          </a:prstGeom>
+          <a:noFill/>
+        </p:spPr>
+        <p:txBody>
+          <a:bodyPr wrap="square">
+            <a:spAutoFit/>
+          </a:bodyPr>
+          <a:lstStyle/>
+          <a:p>
+            <a:pPr>
+              <a:defRPr sz="1100" b="1">
+                <a:solidFill>
+                  <a:srgbClr val="3565A9"/>
+                </a:solidFill>
+              </a:defRPr>
+            </a:pPr>
+            <a:r>
+              <a:t>PART A: DIRECT MODEL</a:t>
+            </a:r>
+          </a:p>
+          <a:p>
+            <a:pPr>
+              <a:defRPr sz="2100" b="1">
+                <a:solidFill>
+                  <a:srgbClr val="102C57"/>
+                </a:solidFill>
+              </a:defRPr>
+            </a:pPr>
+            <a:r>
+              <a:t>Part A: Topping Gas Turbine Alone Analysis (η_gt vs Compression Ratio)</a:t>
+            </a:r>
+          </a:p>
+        </p:txBody>
+      </p:sp>
+      <p:pic>
+        <p:nvPicPr>
+          <p:cNvPr id="3" name="Picture 2" descr="plot_gt_alone.png"/>
+          <p:cNvPicPr>
+            <a:picLocks noChangeAspect="1"/>
+          </p:cNvPicPr>
+          <p:nvPr/>
+        </p:nvPicPr>
+        <p:blipFill>
+          <a:blip r:embed="rId2"/>
+          <a:stretch>
+            <a:fillRect/>
+          </a:stretch>
+        </p:blipFill>
+        <p:spPr>
+          <a:xfrm>
+            <a:off x="731520" y="1463040"/>
+            <a:ext cx="6217920" cy="3803904"/>
+          </a:xfrm>
+          <a:prstGeom prst="rect">
+            <a:avLst/>
+          </a:prstGeom>
+        </p:spPr>
+      </p:pic>
+      <p:sp>
+        <p:nvSpPr>
+          <p:cNvPr id="4" name="Rounded Rectangle 3"/>
           <p:cNvSpPr/>
           <p:nvPr/>
         </p:nvSpPr>
         <p:spPr>
           <a:xfrm>
-            <a:off x="8046720" y="1463040"/>
-            <a:ext cx="3383280" cy="4846320"/>
+            <a:off x="7223760" y="1463040"/>
+            <a:ext cx="4206240" cy="4937760"/>
           </a:xfrm>
           <a:prstGeom prst="roundRect">
             <a:avLst/>
@@ -4096,14 +4689,14 @@
       </p:sp>
       <p:sp>
         <p:nvSpPr>
-          <p:cNvPr id="8" name="TextBox 7"/>
+          <p:cNvPr id="5" name="TextBox 4"/>
           <p:cNvSpPr txBox="1"/>
           <p:nvPr/>
         </p:nvSpPr>
         <p:spPr>
           <a:xfrm>
-            <a:off x="8229600" y="1600200"/>
-            <a:ext cx="3017520" cy="4572000"/>
+            <a:off x="7406640" y="1600200"/>
+            <a:ext cx="3840480" cy="4663440"/>
           </a:xfrm>
           <a:prstGeom prst="rect">
             <a:avLst/>
@@ -4118,2010 +4711,125 @@
           <a:p>
             <a:pPr>
               <a:spcAft>
-                <a:spcPts val="800"/>
-              </a:spcAft>
-              <a:defRPr sz="1400" b="1">
+                <a:spcPts val="600"/>
+              </a:spcAft>
+              <a:defRPr sz="1300" b="1">
                 <a:solidFill>
                   <a:srgbClr val="102C57"/>
                 </a:solidFill>
               </a:defRPr>
             </a:pPr>
             <a:r>
-              <a:t>C. Optimization &amp; Adaptive Loop</a:t>
-            </a:r>
-          </a:p>
-          <a:p>
-            <a:pPr>
-              <a:spcAft>
-                <a:spcPts val="400"/>
-              </a:spcAft>
-              <a:defRPr sz="1100">
-                <a:solidFill>
-                  <a:srgbClr val="282828"/>
-                </a:solidFill>
-              </a:defRPr>
-            </a:pPr>
-            <a:r>
-              <a:t>• Genetic Algorithm (pymoo): Single-objective GA optimizes surrogate to find candidate x*.</a:t>
-            </a:r>
-          </a:p>
-          <a:p>
-            <a:pPr>
-              <a:spcAft>
-                <a:spcPts val="400"/>
-              </a:spcAft>
-              <a:defRPr sz="1100">
-                <a:solidFill>
-                  <a:srgbClr val="282828"/>
-                </a:solidFill>
-              </a:defRPr>
-            </a:pPr>
-            <a:r>
-              <a:t>• Direct Model Verification: Re-evaluates x* in full physical model; computes gap = |η_surr - η_dir|.</a:t>
-            </a:r>
-          </a:p>
-          <a:p>
-            <a:pPr>
-              <a:spcAft>
-                <a:spcPts val="400"/>
-              </a:spcAft>
-              <a:defRPr sz="1100">
-                <a:solidFill>
-                  <a:srgbClr val="282828"/>
-                </a:solidFill>
-              </a:defRPr>
-            </a:pPr>
-            <a:r>
-              <a:t>• Adaptive Refinement: If gap &gt; 0.20 pp, samples 50 points locally around x*, refits surrogate, and re-optimizes.</a:t>
-            </a:r>
-          </a:p>
-          <a:p>
-            <a:pPr>
-              <a:spcAft>
-                <a:spcPts val="400"/>
-              </a:spcAft>
-              <a:defRPr sz="1100">
-                <a:solidFill>
-                  <a:srgbClr val="282828"/>
-                </a:solidFill>
-              </a:defRPr>
-            </a:pPr>
-            <a:r>
-              <a:t>• Sensitivity Study: Re-optimizes across HRSG inlet limits (600 °C, 650 °C, 700 °C) to find active constraints.</a:t>
-            </a:r>
-          </a:p>
-          <a:p>
-            <a:pPr>
-              <a:spcAft>
-                <a:spcPts val="400"/>
-              </a:spcAft>
-              <a:defRPr sz="1100">
-                <a:solidFill>
-                  <a:srgbClr val="282828"/>
-                </a:solidFill>
-              </a:defRPr>
-            </a:pPr>
-            <a:r>
-              <a:t>• Bi-Objective Pareto Front: NSGA-II simultaneously maximizes η_cc and W_net.</a:t>
-            </a:r>
-          </a:p>
-        </p:txBody>
-      </p:sp>
-    </p:spTree>
-  </p:cSld>
-  <p:clrMapOvr>
-    <a:masterClrMapping/>
-  </p:clrMapOvr>
-</p:sld>
-</file>
-
-<file path=ppt/slides/slide4.xml><?xml version="1.0" encoding="utf-8"?>
-<p:sld xmlns:a="http://schemas.openxmlformats.org/drawingml/2006/main" xmlns:p="http://schemas.openxmlformats.org/presentationml/2006/main" xmlns:r="http://schemas.openxmlformats.org/officeDocument/2006/relationships">
-  <p:cSld>
-    <p:spTree>
-      <p:nvGrpSpPr>
-        <p:cNvPr id="1" name=""/>
-        <p:cNvGrpSpPr/>
-        <p:nvPr/>
-      </p:nvGrpSpPr>
-      <p:grpSpPr/>
-      <p:sp>
-        <p:nvSpPr>
-          <p:cNvPr id="2" name="TextBox 1"/>
-          <p:cNvSpPr txBox="1"/>
-          <p:nvPr/>
-        </p:nvSpPr>
-        <p:spPr>
-          <a:xfrm>
-            <a:off x="731520" y="365760"/>
-            <a:ext cx="10698480" cy="1005840"/>
-          </a:xfrm>
-          <a:prstGeom prst="rect">
-            <a:avLst/>
-          </a:prstGeom>
-          <a:noFill/>
-        </p:spPr>
-        <p:txBody>
-          <a:bodyPr wrap="square">
-            <a:spAutoFit/>
-          </a:bodyPr>
-          <a:lstStyle/>
-          <a:p>
-            <a:pPr>
-              <a:defRPr sz="1100" b="1">
-                <a:solidFill>
-                  <a:srgbClr val="3565A9"/>
-                </a:solidFill>
-              </a:defRPr>
-            </a:pPr>
-            <a:r>
-              <a:t>3. ANALYSIS: VALIDATION</a:t>
-            </a:r>
-          </a:p>
-          <a:p>
-            <a:pPr>
-              <a:defRPr sz="2200" b="1">
-                <a:solidFill>
-                  <a:srgbClr val="102C57"/>
-                </a:solidFill>
-              </a:defRPr>
-            </a:pPr>
-            <a:r>
-              <a:t>Section 3: Model Validation Against Hand-Traceable Benchmarks</a:t>
-            </a:r>
-          </a:p>
-        </p:txBody>
-      </p:sp>
-      <p:graphicFrame>
-        <p:nvGraphicFramePr>
-          <p:cNvPr id="3" name="Table 2"/>
-          <p:cNvGraphicFramePr>
-            <a:graphicFrameLocks noGrp="1"/>
-          </p:cNvGraphicFramePr>
-          <p:nvPr/>
-        </p:nvGraphicFramePr>
-        <p:xfrm>
-          <a:off x="731520" y="1463040"/>
-          <a:ext cx="10698480" cy="4846320"/>
-        </p:xfrm>
-        <a:graphic>
-          <a:graphicData uri="http://schemas.openxmlformats.org/drawingml/2006/table">
-            <a:tbl>
-              <a:tblPr firstRow="1" bandRow="1">
-                <a:tableStyleId>{5C22544A-7EE6-4342-B048-85BDC9FD1C3A}</a:tableStyleId>
-              </a:tblPr>
-              <a:tblGrid>
-                <a:gridCol w="2286000"/>
-                <a:gridCol w="2926080"/>
-                <a:gridCol w="1371600"/>
-                <a:gridCol w="1371600"/>
-                <a:gridCol w="1371600"/>
-                <a:gridCol w="1371600"/>
-              </a:tblGrid>
-              <a:tr h="323088">
-                <a:tc>
-                  <a:txBody>
-                    <a:bodyPr/>
-                    <a:lstStyle/>
-                    <a:p>
-                      <a:pPr algn="ctr">
-                        <a:defRPr sz="1100" b="1">
-                          <a:solidFill>
-                            <a:srgbClr val="FFFFFF"/>
-                          </a:solidFill>
-                        </a:defRPr>
-                      </a:pPr>
-                      <a:r>
-                        <a:t>Component / Check</a:t>
-                      </a:r>
-                    </a:p>
-                  </a:txBody>
-                  <a:tcPr>
-                    <a:solidFill>
-                      <a:srgbClr val="102C57"/>
-                    </a:solidFill>
-                  </a:tcPr>
-                </a:tc>
-                <a:tc>
-                  <a:txBody>
-                    <a:bodyPr/>
-                    <a:lstStyle/>
-                    <a:p>
-                      <a:pPr algn="ctr">
-                        <a:defRPr sz="1100" b="1">
-                          <a:solidFill>
-                            <a:srgbClr val="FFFFFF"/>
-                          </a:solidFill>
-                        </a:defRPr>
-                      </a:pPr>
-                      <a:r>
-                        <a:t>Parameter</a:t>
-                      </a:r>
-                    </a:p>
-                  </a:txBody>
-                  <a:tcPr>
-                    <a:solidFill>
-                      <a:srgbClr val="102C57"/>
-                    </a:solidFill>
-                  </a:tcPr>
-                </a:tc>
-                <a:tc>
-                  <a:txBody>
-                    <a:bodyPr/>
-                    <a:lstStyle/>
-                    <a:p>
-                      <a:pPr algn="ctr">
-                        <a:defRPr sz="1100" b="1">
-                          <a:solidFill>
-                            <a:srgbClr val="FFFFFF"/>
-                          </a:solidFill>
-                        </a:defRPr>
-                      </a:pPr>
-                      <a:r>
-                        <a:t>Hand Value</a:t>
-                      </a:r>
-                    </a:p>
-                  </a:txBody>
-                  <a:tcPr>
-                    <a:solidFill>
-                      <a:srgbClr val="102C57"/>
-                    </a:solidFill>
-                  </a:tcPr>
-                </a:tc>
-                <a:tc>
-                  <a:txBody>
-                    <a:bodyPr/>
-                    <a:lstStyle/>
-                    <a:p>
-                      <a:pPr algn="ctr">
-                        <a:defRPr sz="1100" b="1">
-                          <a:solidFill>
-                            <a:srgbClr val="FFFFFF"/>
-                          </a:solidFill>
-                        </a:defRPr>
-                      </a:pPr>
-                      <a:r>
-                        <a:t>Code Output</a:t>
-                      </a:r>
-                    </a:p>
-                  </a:txBody>
-                  <a:tcPr>
-                    <a:solidFill>
-                      <a:srgbClr val="102C57"/>
-                    </a:solidFill>
-                  </a:tcPr>
-                </a:tc>
-                <a:tc>
-                  <a:txBody>
-                    <a:bodyPr/>
-                    <a:lstStyle/>
-                    <a:p>
-                      <a:pPr algn="ctr">
-                        <a:defRPr sz="1100" b="1">
-                          <a:solidFill>
-                            <a:srgbClr val="FFFFFF"/>
-                          </a:solidFill>
-                        </a:defRPr>
-                      </a:pPr>
-                      <a:r>
-                        <a:t>% Difference</a:t>
-                      </a:r>
-                    </a:p>
-                  </a:txBody>
-                  <a:tcPr>
-                    <a:solidFill>
-                      <a:srgbClr val="102C57"/>
-                    </a:solidFill>
-                  </a:tcPr>
-                </a:tc>
-                <a:tc>
-                  <a:txBody>
-                    <a:bodyPr/>
-                    <a:lstStyle/>
-                    <a:p>
-                      <a:pPr algn="ctr">
-                        <a:defRPr sz="1100" b="1">
-                          <a:solidFill>
-                            <a:srgbClr val="FFFFFF"/>
-                          </a:solidFill>
-                        </a:defRPr>
-                      </a:pPr>
-                      <a:r>
-                        <a:t>Status</a:t>
-                      </a:r>
-                    </a:p>
-                  </a:txBody>
-                  <a:tcPr>
-                    <a:solidFill>
-                      <a:srgbClr val="102C57"/>
-                    </a:solidFill>
-                  </a:tcPr>
-                </a:tc>
-              </a:tr>
-              <a:tr h="323088">
-                <a:tc>
-                  <a:txBody>
-                    <a:bodyPr/>
-                    <a:lstStyle/>
-                    <a:p>
-                      <a:pPr algn="ctr">
-                        <a:defRPr sz="1000"/>
-                      </a:pPr>
-                      <a:r>
-                        <a:t>Check 1: Gas Turbine</a:t>
-                      </a:r>
-                    </a:p>
-                  </a:txBody>
-                  <a:tcPr>
-                    <a:solidFill>
-                      <a:srgbClr val="EBF3FA"/>
-                    </a:solidFill>
-                  </a:tcPr>
-                </a:tc>
-                <a:tc>
-                  <a:txBody>
-                    <a:bodyPr/>
-                    <a:lstStyle/>
-                    <a:p>
-                      <a:pPr algn="ctr">
-                        <a:defRPr sz="1000"/>
-                      </a:pPr>
-                      <a:r>
-                        <a:t>T2s (K)</a:t>
-                      </a:r>
-                    </a:p>
-                  </a:txBody>
-                  <a:tcPr>
-                    <a:solidFill>
-                      <a:srgbClr val="EBF3FA"/>
-                    </a:solidFill>
-                  </a:tcPr>
-                </a:tc>
-                <a:tc>
-                  <a:txBody>
-                    <a:bodyPr/>
-                    <a:lstStyle/>
-                    <a:p>
-                      <a:pPr algn="ctr">
-                        <a:defRPr sz="1000"/>
-                      </a:pPr>
-                      <a:r>
-                        <a:t>641.20</a:t>
-                      </a:r>
-                    </a:p>
-                  </a:txBody>
-                  <a:tcPr>
-                    <a:solidFill>
-                      <a:srgbClr val="EBF3FA"/>
-                    </a:solidFill>
-                  </a:tcPr>
-                </a:tc>
-                <a:tc>
-                  <a:txBody>
-                    <a:bodyPr/>
-                    <a:lstStyle/>
-                    <a:p>
-                      <a:pPr algn="ctr">
-                        <a:defRPr sz="1000"/>
-                      </a:pPr>
-                      <a:r>
-                        <a:t>641.12</a:t>
-                      </a:r>
-                    </a:p>
-                  </a:txBody>
-                  <a:tcPr>
-                    <a:solidFill>
-                      <a:srgbClr val="EBF3FA"/>
-                    </a:solidFill>
-                  </a:tcPr>
-                </a:tc>
-                <a:tc>
-                  <a:txBody>
-                    <a:bodyPr/>
-                    <a:lstStyle/>
-                    <a:p>
-                      <a:pPr algn="ctr">
-                        <a:defRPr sz="1000"/>
-                      </a:pPr>
-                      <a:r>
-                        <a:t>0.013%</a:t>
-                      </a:r>
-                    </a:p>
-                  </a:txBody>
-                  <a:tcPr>
-                    <a:solidFill>
-                      <a:srgbClr val="EBF3FA"/>
-                    </a:solidFill>
-                  </a:tcPr>
-                </a:tc>
-                <a:tc>
-                  <a:txBody>
-                    <a:bodyPr/>
-                    <a:lstStyle/>
-                    <a:p>
-                      <a:pPr algn="ctr">
-                        <a:defRPr sz="1000" b="1">
-                          <a:solidFill>
-                            <a:srgbClr val="228B22"/>
-                          </a:solidFill>
-                        </a:defRPr>
-                      </a:pPr>
-                      <a:r>
-                        <a:t>PASS (&lt;0.5%)</a:t>
-                      </a:r>
-                    </a:p>
-                  </a:txBody>
-                  <a:tcPr>
-                    <a:solidFill>
-                      <a:srgbClr val="EBF3FA"/>
-                    </a:solidFill>
-                  </a:tcPr>
-                </a:tc>
-              </a:tr>
-              <a:tr h="323088">
-                <a:tc>
-                  <a:txBody>
-                    <a:bodyPr/>
-                    <a:lstStyle/>
-                    <a:p>
-                      <a:pPr algn="ctr">
-                        <a:defRPr sz="1000"/>
-                      </a:pPr>
-                      <a:r>
-                        <a:t>Check 1: Gas Turbine</a:t>
-                      </a:r>
-                    </a:p>
-                  </a:txBody>
-                  <a:tcPr>
-                    <a:solidFill>
-                      <a:srgbClr val="FFFFFF"/>
-                    </a:solidFill>
-                  </a:tcPr>
-                </a:tc>
-                <a:tc>
-                  <a:txBody>
-                    <a:bodyPr/>
-                    <a:lstStyle/>
-                    <a:p>
-                      <a:pPr algn="ctr">
-                        <a:defRPr sz="1000"/>
-                      </a:pPr>
-                      <a:r>
-                        <a:t>T2 (actual, K)</a:t>
-                      </a:r>
-                    </a:p>
-                  </a:txBody>
-                  <a:tcPr>
-                    <a:solidFill>
-                      <a:srgbClr val="FFFFFF"/>
-                    </a:solidFill>
-                  </a:tcPr>
-                </a:tc>
-                <a:tc>
-                  <a:txBody>
-                    <a:bodyPr/>
-                    <a:lstStyle/>
-                    <a:p>
-                      <a:pPr algn="ctr">
-                        <a:defRPr sz="1000"/>
-                      </a:pPr>
-                      <a:r>
-                        <a:t>694.70</a:t>
-                      </a:r>
-                    </a:p>
-                  </a:txBody>
-                  <a:tcPr>
-                    <a:solidFill>
-                      <a:srgbClr val="FFFFFF"/>
-                    </a:solidFill>
-                  </a:tcPr>
-                </a:tc>
-                <a:tc>
-                  <a:txBody>
-                    <a:bodyPr/>
-                    <a:lstStyle/>
-                    <a:p>
-                      <a:pPr algn="ctr">
-                        <a:defRPr sz="1000"/>
-                      </a:pPr>
-                      <a:r>
-                        <a:t>694.66</a:t>
-                      </a:r>
-                    </a:p>
-                  </a:txBody>
-                  <a:tcPr>
-                    <a:solidFill>
-                      <a:srgbClr val="FFFFFF"/>
-                    </a:solidFill>
-                  </a:tcPr>
-                </a:tc>
-                <a:tc>
-                  <a:txBody>
-                    <a:bodyPr/>
-                    <a:lstStyle/>
-                    <a:p>
-                      <a:pPr algn="ctr">
-                        <a:defRPr sz="1000"/>
-                      </a:pPr>
-                      <a:r>
-                        <a:t>0.006%</a:t>
-                      </a:r>
-                    </a:p>
-                  </a:txBody>
-                  <a:tcPr>
-                    <a:solidFill>
-                      <a:srgbClr val="FFFFFF"/>
-                    </a:solidFill>
-                  </a:tcPr>
-                </a:tc>
-                <a:tc>
-                  <a:txBody>
-                    <a:bodyPr/>
-                    <a:lstStyle/>
-                    <a:p>
-                      <a:pPr algn="ctr">
-                        <a:defRPr sz="1000" b="1">
-                          <a:solidFill>
-                            <a:srgbClr val="228B22"/>
-                          </a:solidFill>
-                        </a:defRPr>
-                      </a:pPr>
-                      <a:r>
-                        <a:t>PASS (&lt;0.5%)</a:t>
-                      </a:r>
-                    </a:p>
-                  </a:txBody>
-                  <a:tcPr>
-                    <a:solidFill>
-                      <a:srgbClr val="FFFFFF"/>
-                    </a:solidFill>
-                  </a:tcPr>
-                </a:tc>
-              </a:tr>
-              <a:tr h="323088">
-                <a:tc>
-                  <a:txBody>
-                    <a:bodyPr/>
-                    <a:lstStyle/>
-                    <a:p>
-                      <a:pPr algn="ctr">
-                        <a:defRPr sz="1000"/>
-                      </a:pPr>
-                      <a:r>
-                        <a:t>Check 1: Gas Turbine</a:t>
-                      </a:r>
-                    </a:p>
-                  </a:txBody>
-                  <a:tcPr>
-                    <a:solidFill>
-                      <a:srgbClr val="EBF3FA"/>
-                    </a:solidFill>
-                  </a:tcPr>
-                </a:tc>
-                <a:tc>
-                  <a:txBody>
-                    <a:bodyPr/>
-                    <a:lstStyle/>
-                    <a:p>
-                      <a:pPr algn="ctr">
-                        <a:defRPr sz="1000"/>
-                      </a:pPr>
-                      <a:r>
-                        <a:t>T4s (K)</a:t>
-                      </a:r>
-                    </a:p>
-                  </a:txBody>
-                  <a:tcPr>
-                    <a:solidFill>
-                      <a:srgbClr val="EBF3FA"/>
-                    </a:solidFill>
-                  </a:tcPr>
-                </a:tc>
-                <a:tc>
-                  <a:txBody>
-                    <a:bodyPr/>
-                    <a:lstStyle/>
-                    <a:p>
-                      <a:pPr algn="ctr">
-                        <a:defRPr sz="1000"/>
-                      </a:pPr>
-                      <a:r>
-                        <a:t>707.30</a:t>
-                      </a:r>
-                    </a:p>
-                  </a:txBody>
-                  <a:tcPr>
-                    <a:solidFill>
-                      <a:srgbClr val="EBF3FA"/>
-                    </a:solidFill>
-                  </a:tcPr>
-                </a:tc>
-                <a:tc>
-                  <a:txBody>
-                    <a:bodyPr/>
-                    <a:lstStyle/>
-                    <a:p>
-                      <a:pPr algn="ctr">
-                        <a:defRPr sz="1000"/>
-                      </a:pPr>
-                      <a:r>
-                        <a:t>707.26</a:t>
-                      </a:r>
-                    </a:p>
-                  </a:txBody>
-                  <a:tcPr>
-                    <a:solidFill>
-                      <a:srgbClr val="EBF3FA"/>
-                    </a:solidFill>
-                  </a:tcPr>
-                </a:tc>
-                <a:tc>
-                  <a:txBody>
-                    <a:bodyPr/>
-                    <a:lstStyle/>
-                    <a:p>
-                      <a:pPr algn="ctr">
-                        <a:defRPr sz="1000"/>
-                      </a:pPr>
-                      <a:r>
-                        <a:t>0.006%</a:t>
-                      </a:r>
-                    </a:p>
-                  </a:txBody>
-                  <a:tcPr>
-                    <a:solidFill>
-                      <a:srgbClr val="EBF3FA"/>
-                    </a:solidFill>
-                  </a:tcPr>
-                </a:tc>
-                <a:tc>
-                  <a:txBody>
-                    <a:bodyPr/>
-                    <a:lstStyle/>
-                    <a:p>
-                      <a:pPr algn="ctr">
-                        <a:defRPr sz="1000" b="1">
-                          <a:solidFill>
-                            <a:srgbClr val="228B22"/>
-                          </a:solidFill>
-                        </a:defRPr>
-                      </a:pPr>
-                      <a:r>
-                        <a:t>PASS (&lt;0.5%)</a:t>
-                      </a:r>
-                    </a:p>
-                  </a:txBody>
-                  <a:tcPr>
-                    <a:solidFill>
-                      <a:srgbClr val="EBF3FA"/>
-                    </a:solidFill>
-                  </a:tcPr>
-                </a:tc>
-              </a:tr>
-              <a:tr h="323088">
-                <a:tc>
-                  <a:txBody>
-                    <a:bodyPr/>
-                    <a:lstStyle/>
-                    <a:p>
-                      <a:pPr algn="ctr">
-                        <a:defRPr sz="1000"/>
-                      </a:pPr>
-                      <a:r>
-                        <a:t>Check 1: Gas Turbine</a:t>
-                      </a:r>
-                    </a:p>
-                  </a:txBody>
-                  <a:tcPr>
-                    <a:solidFill>
-                      <a:srgbClr val="FFFFFF"/>
-                    </a:solidFill>
-                  </a:tcPr>
-                </a:tc>
-                <a:tc>
-                  <a:txBody>
-                    <a:bodyPr/>
-                    <a:lstStyle/>
-                    <a:p>
-                      <a:pPr algn="ctr">
-                        <a:defRPr sz="1000"/>
-                      </a:pPr>
-                      <a:r>
-                        <a:t>T4 (actual, K)</a:t>
-                      </a:r>
-                    </a:p>
-                  </a:txBody>
-                  <a:tcPr>
-                    <a:solidFill>
-                      <a:srgbClr val="FFFFFF"/>
-                    </a:solidFill>
-                  </a:tcPr>
-                </a:tc>
-                <a:tc>
-                  <a:txBody>
-                    <a:bodyPr/>
-                    <a:lstStyle/>
-                    <a:p>
-                      <a:pPr algn="ctr">
-                        <a:defRPr sz="1000"/>
-                      </a:pPr>
-                      <a:r>
-                        <a:t>787.70</a:t>
-                      </a:r>
-                    </a:p>
-                  </a:txBody>
-                  <a:tcPr>
-                    <a:solidFill>
-                      <a:srgbClr val="FFFFFF"/>
-                    </a:solidFill>
-                  </a:tcPr>
-                </a:tc>
-                <a:tc>
-                  <a:txBody>
-                    <a:bodyPr/>
-                    <a:lstStyle/>
-                    <a:p>
-                      <a:pPr algn="ctr">
-                        <a:defRPr sz="1000"/>
-                      </a:pPr>
-                      <a:r>
-                        <a:t>787.91</a:t>
-                      </a:r>
-                    </a:p>
-                  </a:txBody>
-                  <a:tcPr>
-                    <a:solidFill>
-                      <a:srgbClr val="FFFFFF"/>
-                    </a:solidFill>
-                  </a:tcPr>
-                </a:tc>
-                <a:tc>
-                  <a:txBody>
-                    <a:bodyPr/>
-                    <a:lstStyle/>
-                    <a:p>
-                      <a:pPr algn="ctr">
-                        <a:defRPr sz="1000"/>
-                      </a:pPr>
-                      <a:r>
-                        <a:t>0.027%</a:t>
-                      </a:r>
-                    </a:p>
-                  </a:txBody>
-                  <a:tcPr>
-                    <a:solidFill>
-                      <a:srgbClr val="FFFFFF"/>
-                    </a:solidFill>
-                  </a:tcPr>
-                </a:tc>
-                <a:tc>
-                  <a:txBody>
-                    <a:bodyPr/>
-                    <a:lstStyle/>
-                    <a:p>
-                      <a:pPr algn="ctr">
-                        <a:defRPr sz="1000" b="1">
-                          <a:solidFill>
-                            <a:srgbClr val="228B22"/>
-                          </a:solidFill>
-                        </a:defRPr>
-                      </a:pPr>
-                      <a:r>
-                        <a:t>PASS (&lt;0.5%)</a:t>
-                      </a:r>
-                    </a:p>
-                  </a:txBody>
-                  <a:tcPr>
-                    <a:solidFill>
-                      <a:srgbClr val="FFFFFF"/>
-                    </a:solidFill>
-                  </a:tcPr>
-                </a:tc>
-              </a:tr>
-              <a:tr h="323088">
-                <a:tc>
-                  <a:txBody>
-                    <a:bodyPr/>
-                    <a:lstStyle/>
-                    <a:p>
-                      <a:pPr algn="ctr">
-                        <a:defRPr sz="1000"/>
-                      </a:pPr>
-                      <a:r>
-                        <a:t>Check 1: Gas Turbine</a:t>
-                      </a:r>
-                    </a:p>
-                  </a:txBody>
-                  <a:tcPr>
-                    <a:solidFill>
-                      <a:srgbClr val="EBF3FA"/>
-                    </a:solidFill>
-                  </a:tcPr>
-                </a:tc>
-                <a:tc>
-                  <a:txBody>
-                    <a:bodyPr/>
-                    <a:lstStyle/>
-                    <a:p>
-                      <a:pPr algn="ctr">
-                        <a:defRPr sz="1000"/>
-                      </a:pPr>
-                      <a:r>
-                        <a:t>Compressor Work wc (kJ/kg)</a:t>
-                      </a:r>
-                    </a:p>
-                  </a:txBody>
-                  <a:tcPr>
-                    <a:solidFill>
-                      <a:srgbClr val="EBF3FA"/>
-                    </a:solidFill>
-                  </a:tcPr>
-                </a:tc>
-                <a:tc>
-                  <a:txBody>
-                    <a:bodyPr/>
-                    <a:lstStyle/>
-                    <a:p>
-                      <a:pPr algn="ctr">
-                        <a:defRPr sz="1000"/>
-                      </a:pPr>
-                      <a:r>
-                        <a:t>407.40</a:t>
-                      </a:r>
-                    </a:p>
-                  </a:txBody>
-                  <a:tcPr>
-                    <a:solidFill>
-                      <a:srgbClr val="EBF3FA"/>
-                    </a:solidFill>
-                  </a:tcPr>
-                </a:tc>
-                <a:tc>
-                  <a:txBody>
-                    <a:bodyPr/>
-                    <a:lstStyle/>
-                    <a:p>
-                      <a:pPr algn="ctr">
-                        <a:defRPr sz="1000"/>
-                      </a:pPr>
-                      <a:r>
-                        <a:t>407.42</a:t>
-                      </a:r>
-                    </a:p>
-                  </a:txBody>
-                  <a:tcPr>
-                    <a:solidFill>
-                      <a:srgbClr val="EBF3FA"/>
-                    </a:solidFill>
-                  </a:tcPr>
-                </a:tc>
-                <a:tc>
-                  <a:txBody>
-                    <a:bodyPr/>
-                    <a:lstStyle/>
-                    <a:p>
-                      <a:pPr algn="ctr">
-                        <a:defRPr sz="1000"/>
-                      </a:pPr>
-                      <a:r>
-                        <a:t>0.005%</a:t>
-                      </a:r>
-                    </a:p>
-                  </a:txBody>
-                  <a:tcPr>
-                    <a:solidFill>
-                      <a:srgbClr val="EBF3FA"/>
-                    </a:solidFill>
-                  </a:tcPr>
-                </a:tc>
-                <a:tc>
-                  <a:txBody>
-                    <a:bodyPr/>
-                    <a:lstStyle/>
-                    <a:p>
-                      <a:pPr algn="ctr">
-                        <a:defRPr sz="1000" b="1">
-                          <a:solidFill>
-                            <a:srgbClr val="228B22"/>
-                          </a:solidFill>
-                        </a:defRPr>
-                      </a:pPr>
-                      <a:r>
-                        <a:t>PASS (&lt;0.5%)</a:t>
-                      </a:r>
-                    </a:p>
-                  </a:txBody>
-                  <a:tcPr>
-                    <a:solidFill>
-                      <a:srgbClr val="EBF3FA"/>
-                    </a:solidFill>
-                  </a:tcPr>
-                </a:tc>
-              </a:tr>
-              <a:tr h="323088">
-                <a:tc>
-                  <a:txBody>
-                    <a:bodyPr/>
-                    <a:lstStyle/>
-                    <a:p>
-                      <a:pPr algn="ctr">
-                        <a:defRPr sz="1000"/>
-                      </a:pPr>
-                      <a:r>
-                        <a:t>Check 1: Gas Turbine</a:t>
-                      </a:r>
-                    </a:p>
-                  </a:txBody>
-                  <a:tcPr>
-                    <a:solidFill>
-                      <a:srgbClr val="FFFFFF"/>
-                    </a:solidFill>
-                  </a:tcPr>
-                </a:tc>
-                <a:tc>
-                  <a:txBody>
-                    <a:bodyPr/>
-                    <a:lstStyle/>
-                    <a:p>
-                      <a:pPr algn="ctr">
-                        <a:defRPr sz="1000"/>
-                      </a:pPr>
-                      <a:r>
-                        <a:t>Turbine Work wt (kJ/kg)</a:t>
-                      </a:r>
-                    </a:p>
-                  </a:txBody>
-                  <a:tcPr>
-                    <a:solidFill>
-                      <a:srgbClr val="FFFFFF"/>
-                    </a:solidFill>
-                  </a:tcPr>
-                </a:tc>
-                <a:tc>
-                  <a:txBody>
-                    <a:bodyPr/>
-                    <a:lstStyle/>
-                    <a:p>
-                      <a:pPr algn="ctr">
-                        <a:defRPr sz="1000"/>
-                      </a:pPr>
-                      <a:r>
-                        <a:t>706.50</a:t>
-                      </a:r>
-                    </a:p>
-                  </a:txBody>
-                  <a:tcPr>
-                    <a:solidFill>
-                      <a:srgbClr val="FFFFFF"/>
-                    </a:solidFill>
-                  </a:tcPr>
-                </a:tc>
-                <a:tc>
-                  <a:txBody>
-                    <a:bodyPr/>
-                    <a:lstStyle/>
-                    <a:p>
-                      <a:pPr algn="ctr">
-                        <a:defRPr sz="1000"/>
-                      </a:pPr>
-                      <a:r>
-                        <a:t>706.52</a:t>
-                      </a:r>
-                    </a:p>
-                  </a:txBody>
-                  <a:tcPr>
-                    <a:solidFill>
-                      <a:srgbClr val="FFFFFF"/>
-                    </a:solidFill>
-                  </a:tcPr>
-                </a:tc>
-                <a:tc>
-                  <a:txBody>
-                    <a:bodyPr/>
-                    <a:lstStyle/>
-                    <a:p>
-                      <a:pPr algn="ctr">
-                        <a:defRPr sz="1000"/>
-                      </a:pPr>
-                      <a:r>
-                        <a:t>0.003%</a:t>
-                      </a:r>
-                    </a:p>
-                  </a:txBody>
-                  <a:tcPr>
-                    <a:solidFill>
-                      <a:srgbClr val="FFFFFF"/>
-                    </a:solidFill>
-                  </a:tcPr>
-                </a:tc>
-                <a:tc>
-                  <a:txBody>
-                    <a:bodyPr/>
-                    <a:lstStyle/>
-                    <a:p>
-                      <a:pPr algn="ctr">
-                        <a:defRPr sz="1000" b="1">
-                          <a:solidFill>
-                            <a:srgbClr val="228B22"/>
-                          </a:solidFill>
-                        </a:defRPr>
-                      </a:pPr>
-                      <a:r>
-                        <a:t>PASS (&lt;0.5%)</a:t>
-                      </a:r>
-                    </a:p>
-                  </a:txBody>
-                  <a:tcPr>
-                    <a:solidFill>
-                      <a:srgbClr val="FFFFFF"/>
-                    </a:solidFill>
-                  </a:tcPr>
-                </a:tc>
-              </a:tr>
-              <a:tr h="323088">
-                <a:tc>
-                  <a:txBody>
-                    <a:bodyPr/>
-                    <a:lstStyle/>
-                    <a:p>
-                      <a:pPr algn="ctr">
-                        <a:defRPr sz="1000"/>
-                      </a:pPr>
-                      <a:r>
-                        <a:t>Check 1: Gas Turbine</a:t>
-                      </a:r>
-                    </a:p>
-                  </a:txBody>
-                  <a:tcPr>
-                    <a:solidFill>
-                      <a:srgbClr val="EBF3FA"/>
-                    </a:solidFill>
-                  </a:tcPr>
-                </a:tc>
-                <a:tc>
-                  <a:txBody>
-                    <a:bodyPr/>
-                    <a:lstStyle/>
-                    <a:p>
-                      <a:pPr algn="ctr">
-                        <a:defRPr sz="1000"/>
-                      </a:pPr>
-                      <a:r>
-                        <a:t>Net Work wnet (kJ/kg)</a:t>
-                      </a:r>
-                    </a:p>
-                  </a:txBody>
-                  <a:tcPr>
-                    <a:solidFill>
-                      <a:srgbClr val="EBF3FA"/>
-                    </a:solidFill>
-                  </a:tcPr>
-                </a:tc>
-                <a:tc>
-                  <a:txBody>
-                    <a:bodyPr/>
-                    <a:lstStyle/>
-                    <a:p>
-                      <a:pPr algn="ctr">
-                        <a:defRPr sz="1000"/>
-                      </a:pPr>
-                      <a:r>
-                        <a:t>299.10</a:t>
-                      </a:r>
-                    </a:p>
-                  </a:txBody>
-                  <a:tcPr>
-                    <a:solidFill>
-                      <a:srgbClr val="EBF3FA"/>
-                    </a:solidFill>
-                  </a:tcPr>
-                </a:tc>
-                <a:tc>
-                  <a:txBody>
-                    <a:bodyPr/>
-                    <a:lstStyle/>
-                    <a:p>
-                      <a:pPr algn="ctr">
-                        <a:defRPr sz="1000"/>
-                      </a:pPr>
-                      <a:r>
-                        <a:t>299.10</a:t>
-                      </a:r>
-                    </a:p>
-                  </a:txBody>
-                  <a:tcPr>
-                    <a:solidFill>
-                      <a:srgbClr val="EBF3FA"/>
-                    </a:solidFill>
-                  </a:tcPr>
-                </a:tc>
-                <a:tc>
-                  <a:txBody>
-                    <a:bodyPr/>
-                    <a:lstStyle/>
-                    <a:p>
-                      <a:pPr algn="ctr">
-                        <a:defRPr sz="1000"/>
-                      </a:pPr>
-                      <a:r>
-                        <a:t>0.001%</a:t>
-                      </a:r>
-                    </a:p>
-                  </a:txBody>
-                  <a:tcPr>
-                    <a:solidFill>
-                      <a:srgbClr val="EBF3FA"/>
-                    </a:solidFill>
-                  </a:tcPr>
-                </a:tc>
-                <a:tc>
-                  <a:txBody>
-                    <a:bodyPr/>
-                    <a:lstStyle/>
-                    <a:p>
-                      <a:pPr algn="ctr">
-                        <a:defRPr sz="1000" b="1">
-                          <a:solidFill>
-                            <a:srgbClr val="228B22"/>
-                          </a:solidFill>
-                        </a:defRPr>
-                      </a:pPr>
-                      <a:r>
-                        <a:t>PASS (&lt;0.5%)</a:t>
-                      </a:r>
-                    </a:p>
-                  </a:txBody>
-                  <a:tcPr>
-                    <a:solidFill>
-                      <a:srgbClr val="EBF3FA"/>
-                    </a:solidFill>
-                  </a:tcPr>
-                </a:tc>
-              </a:tr>
-              <a:tr h="323088">
-                <a:tc>
-                  <a:txBody>
-                    <a:bodyPr/>
-                    <a:lstStyle/>
-                    <a:p>
-                      <a:pPr algn="ctr">
-                        <a:defRPr sz="1000"/>
-                      </a:pPr>
-                      <a:r>
-                        <a:t>Check 1: Gas Turbine</a:t>
-                      </a:r>
-                    </a:p>
-                  </a:txBody>
-                  <a:tcPr>
-                    <a:solidFill>
-                      <a:srgbClr val="FFFFFF"/>
-                    </a:solidFill>
-                  </a:tcPr>
-                </a:tc>
-                <a:tc>
-                  <a:txBody>
-                    <a:bodyPr/>
-                    <a:lstStyle/>
-                    <a:p>
-                      <a:pPr algn="ctr">
-                        <a:defRPr sz="1000"/>
-                      </a:pPr>
-                      <a:r>
-                        <a:t>Thermal Efficiency ηth (%)</a:t>
-                      </a:r>
-                    </a:p>
-                  </a:txBody>
-                  <a:tcPr>
-                    <a:solidFill>
-                      <a:srgbClr val="FFFFFF"/>
-                    </a:solidFill>
-                  </a:tcPr>
-                </a:tc>
-                <a:tc>
-                  <a:txBody>
-                    <a:bodyPr/>
-                    <a:lstStyle/>
-                    <a:p>
-                      <a:pPr algn="ctr">
-                        <a:defRPr sz="1000"/>
-                      </a:pPr>
-                      <a:r>
-                        <a:t>37.05%</a:t>
-                      </a:r>
-                    </a:p>
-                  </a:txBody>
-                  <a:tcPr>
-                    <a:solidFill>
-                      <a:srgbClr val="FFFFFF"/>
-                    </a:solidFill>
-                  </a:tcPr>
-                </a:tc>
-                <a:tc>
-                  <a:txBody>
-                    <a:bodyPr/>
-                    <a:lstStyle/>
-                    <a:p>
-                      <a:pPr algn="ctr">
-                        <a:defRPr sz="1000"/>
-                      </a:pPr>
-                      <a:r>
-                        <a:t>37.05%</a:t>
-                      </a:r>
-                    </a:p>
-                  </a:txBody>
-                  <a:tcPr>
-                    <a:solidFill>
-                      <a:srgbClr val="FFFFFF"/>
-                    </a:solidFill>
-                  </a:tcPr>
-                </a:tc>
-                <a:tc>
-                  <a:txBody>
-                    <a:bodyPr/>
-                    <a:lstStyle/>
-                    <a:p>
-                      <a:pPr algn="ctr">
-                        <a:defRPr sz="1000"/>
-                      </a:pPr>
-                      <a:r>
-                        <a:t>0.008%</a:t>
-                      </a:r>
-                    </a:p>
-                  </a:txBody>
-                  <a:tcPr>
-                    <a:solidFill>
-                      <a:srgbClr val="FFFFFF"/>
-                    </a:solidFill>
-                  </a:tcPr>
-                </a:tc>
-                <a:tc>
-                  <a:txBody>
-                    <a:bodyPr/>
-                    <a:lstStyle/>
-                    <a:p>
-                      <a:pPr algn="ctr">
-                        <a:defRPr sz="1000" b="1">
-                          <a:solidFill>
-                            <a:srgbClr val="228B22"/>
-                          </a:solidFill>
-                        </a:defRPr>
-                      </a:pPr>
-                      <a:r>
-                        <a:t>PASS (&lt;0.5%)</a:t>
-                      </a:r>
-                    </a:p>
-                  </a:txBody>
-                  <a:tcPr>
-                    <a:solidFill>
-                      <a:srgbClr val="FFFFFF"/>
-                    </a:solidFill>
-                  </a:tcPr>
-                </a:tc>
-              </a:tr>
-              <a:tr h="323088">
-                <a:tc>
-                  <a:txBody>
-                    <a:bodyPr/>
-                    <a:lstStyle/>
-                    <a:p>
-                      <a:pPr algn="ctr">
-                        <a:defRPr sz="1000"/>
-                      </a:pPr>
-                      <a:r>
-                        <a:t>Check 2: Rankine Cycle</a:t>
-                      </a:r>
-                    </a:p>
-                  </a:txBody>
-                  <a:tcPr>
-                    <a:solidFill>
-                      <a:srgbClr val="EBF3FA"/>
-                    </a:solidFill>
-                  </a:tcPr>
-                </a:tc>
-                <a:tc>
-                  <a:txBody>
-                    <a:bodyPr/>
-                    <a:lstStyle/>
-                    <a:p>
-                      <a:pPr algn="ctr">
-                        <a:defRPr sz="1000"/>
-                      </a:pPr>
-                      <a:r>
-                        <a:t>Turbine Inlet Enthalpy h5 (kJ/kg)</a:t>
-                      </a:r>
-                    </a:p>
-                  </a:txBody>
-                  <a:tcPr>
-                    <a:solidFill>
-                      <a:srgbClr val="EBF3FA"/>
-                    </a:solidFill>
-                  </a:tcPr>
-                </a:tc>
-                <a:tc>
-                  <a:txBody>
-                    <a:bodyPr/>
-                    <a:lstStyle/>
-                    <a:p>
-                      <a:pPr algn="ctr">
-                        <a:defRPr sz="1000"/>
-                      </a:pPr>
-                      <a:r>
-                        <a:t>3344.00</a:t>
-                      </a:r>
-                    </a:p>
-                  </a:txBody>
-                  <a:tcPr>
-                    <a:solidFill>
-                      <a:srgbClr val="EBF3FA"/>
-                    </a:solidFill>
-                  </a:tcPr>
-                </a:tc>
-                <a:tc>
-                  <a:txBody>
-                    <a:bodyPr/>
-                    <a:lstStyle/>
-                    <a:p>
-                      <a:pPr algn="ctr">
-                        <a:defRPr sz="1000"/>
-                      </a:pPr>
-                      <a:r>
-                        <a:t>3344.84</a:t>
-                      </a:r>
-                    </a:p>
-                  </a:txBody>
-                  <a:tcPr>
-                    <a:solidFill>
-                      <a:srgbClr val="EBF3FA"/>
-                    </a:solidFill>
-                  </a:tcPr>
-                </a:tc>
-                <a:tc>
-                  <a:txBody>
-                    <a:bodyPr/>
-                    <a:lstStyle/>
-                    <a:p>
-                      <a:pPr algn="ctr">
-                        <a:defRPr sz="1000"/>
-                      </a:pPr>
-                      <a:r>
-                        <a:t>0.025%</a:t>
-                      </a:r>
-                    </a:p>
-                  </a:txBody>
-                  <a:tcPr>
-                    <a:solidFill>
-                      <a:srgbClr val="EBF3FA"/>
-                    </a:solidFill>
-                  </a:tcPr>
-                </a:tc>
-                <a:tc>
-                  <a:txBody>
-                    <a:bodyPr/>
-                    <a:lstStyle/>
-                    <a:p>
-                      <a:pPr algn="ctr">
-                        <a:defRPr sz="1000" b="1">
-                          <a:solidFill>
-                            <a:srgbClr val="228B22"/>
-                          </a:solidFill>
-                        </a:defRPr>
-                      </a:pPr>
-                      <a:r>
-                        <a:t>PASS (&lt;0.1%)</a:t>
-                      </a:r>
-                    </a:p>
-                  </a:txBody>
-                  <a:tcPr>
-                    <a:solidFill>
-                      <a:srgbClr val="EBF3FA"/>
-                    </a:solidFill>
-                  </a:tcPr>
-                </a:tc>
-              </a:tr>
-              <a:tr h="323088">
-                <a:tc>
-                  <a:txBody>
-                    <a:bodyPr/>
-                    <a:lstStyle/>
-                    <a:p>
-                      <a:pPr algn="ctr">
-                        <a:defRPr sz="1000"/>
-                      </a:pPr>
-                      <a:r>
-                        <a:t>Check 2: Rankine Cycle</a:t>
-                      </a:r>
-                    </a:p>
-                  </a:txBody>
-                  <a:tcPr>
-                    <a:solidFill>
-                      <a:srgbClr val="FFFFFF"/>
-                    </a:solidFill>
-                  </a:tcPr>
-                </a:tc>
-                <a:tc>
-                  <a:txBody>
-                    <a:bodyPr/>
-                    <a:lstStyle/>
-                    <a:p>
-                      <a:pPr algn="ctr">
-                        <a:defRPr sz="1000"/>
-                      </a:pPr>
-                      <a:r>
-                        <a:t>Isentropic Quality x6s (-)</a:t>
-                      </a:r>
-                    </a:p>
-                  </a:txBody>
-                  <a:tcPr>
-                    <a:solidFill>
-                      <a:srgbClr val="FFFFFF"/>
-                    </a:solidFill>
-                  </a:tcPr>
-                </a:tc>
-                <a:tc>
-                  <a:txBody>
-                    <a:bodyPr/>
-                    <a:lstStyle/>
-                    <a:p>
-                      <a:pPr algn="ctr">
-                        <a:defRPr sz="1000"/>
-                      </a:pPr>
-                      <a:r>
-                        <a:t>0.848</a:t>
-                      </a:r>
-                    </a:p>
-                  </a:txBody>
-                  <a:tcPr>
-                    <a:solidFill>
-                      <a:srgbClr val="FFFFFF"/>
-                    </a:solidFill>
-                  </a:tcPr>
-                </a:tc>
-                <a:tc>
-                  <a:txBody>
-                    <a:bodyPr/>
-                    <a:lstStyle/>
-                    <a:p>
-                      <a:pPr algn="ctr">
-                        <a:defRPr sz="1000"/>
-                      </a:pPr>
-                      <a:r>
-                        <a:t>0.848</a:t>
-                      </a:r>
-                    </a:p>
-                  </a:txBody>
-                  <a:tcPr>
-                    <a:solidFill>
-                      <a:srgbClr val="FFFFFF"/>
-                    </a:solidFill>
-                  </a:tcPr>
-                </a:tc>
-                <a:tc>
-                  <a:txBody>
-                    <a:bodyPr/>
-                    <a:lstStyle/>
-                    <a:p>
-                      <a:pPr algn="ctr">
-                        <a:defRPr sz="1000"/>
-                      </a:pPr>
-                      <a:r>
-                        <a:t>0.030%</a:t>
-                      </a:r>
-                    </a:p>
-                  </a:txBody>
-                  <a:tcPr>
-                    <a:solidFill>
-                      <a:srgbClr val="FFFFFF"/>
-                    </a:solidFill>
-                  </a:tcPr>
-                </a:tc>
-                <a:tc>
-                  <a:txBody>
-                    <a:bodyPr/>
-                    <a:lstStyle/>
-                    <a:p>
-                      <a:pPr algn="ctr">
-                        <a:defRPr sz="1000" b="1">
-                          <a:solidFill>
-                            <a:srgbClr val="228B22"/>
-                          </a:solidFill>
-                        </a:defRPr>
-                      </a:pPr>
-                      <a:r>
-                        <a:t>PASS (&lt;0.2%)</a:t>
-                      </a:r>
-                    </a:p>
-                  </a:txBody>
-                  <a:tcPr>
-                    <a:solidFill>
-                      <a:srgbClr val="FFFFFF"/>
-                    </a:solidFill>
-                  </a:tcPr>
-                </a:tc>
-              </a:tr>
-              <a:tr h="323088">
-                <a:tc>
-                  <a:txBody>
-                    <a:bodyPr/>
-                    <a:lstStyle/>
-                    <a:p>
-                      <a:pPr algn="ctr">
-                        <a:defRPr sz="1000"/>
-                      </a:pPr>
-                      <a:r>
-                        <a:t>Check 2: Rankine Cycle</a:t>
-                      </a:r>
-                    </a:p>
-                  </a:txBody>
-                  <a:tcPr>
-                    <a:solidFill>
-                      <a:srgbClr val="EBF3FA"/>
-                    </a:solidFill>
-                  </a:tcPr>
-                </a:tc>
-                <a:tc>
-                  <a:txBody>
-                    <a:bodyPr/>
-                    <a:lstStyle/>
-                    <a:p>
-                      <a:pPr algn="ctr">
-                        <a:defRPr sz="1000"/>
-                      </a:pPr>
-                      <a:r>
-                        <a:t>Actual Quality x6 (-)</a:t>
-                      </a:r>
-                    </a:p>
-                  </a:txBody>
-                  <a:tcPr>
-                    <a:solidFill>
-                      <a:srgbClr val="EBF3FA"/>
-                    </a:solidFill>
-                  </a:tcPr>
-                </a:tc>
-                <a:tc>
-                  <a:txBody>
-                    <a:bodyPr/>
-                    <a:lstStyle/>
-                    <a:p>
-                      <a:pPr algn="ctr">
-                        <a:defRPr sz="1000"/>
-                      </a:pPr>
-                      <a:r>
-                        <a:t>0.919</a:t>
-                      </a:r>
-                    </a:p>
-                  </a:txBody>
-                  <a:tcPr>
-                    <a:solidFill>
-                      <a:srgbClr val="EBF3FA"/>
-                    </a:solidFill>
-                  </a:tcPr>
-                </a:tc>
-                <a:tc>
-                  <a:txBody>
-                    <a:bodyPr/>
-                    <a:lstStyle/>
-                    <a:p>
-                      <a:pPr algn="ctr">
-                        <a:defRPr sz="1000"/>
-                      </a:pPr>
-                      <a:r>
-                        <a:t>0.919</a:t>
-                      </a:r>
-                    </a:p>
-                  </a:txBody>
-                  <a:tcPr>
-                    <a:solidFill>
-                      <a:srgbClr val="EBF3FA"/>
-                    </a:solidFill>
-                  </a:tcPr>
-                </a:tc>
-                <a:tc>
-                  <a:txBody>
-                    <a:bodyPr/>
-                    <a:lstStyle/>
-                    <a:p>
-                      <a:pPr algn="ctr">
-                        <a:defRPr sz="1000"/>
-                      </a:pPr>
-                      <a:r>
-                        <a:t>0.009%</a:t>
-                      </a:r>
-                    </a:p>
-                  </a:txBody>
-                  <a:tcPr>
-                    <a:solidFill>
-                      <a:srgbClr val="EBF3FA"/>
-                    </a:solidFill>
-                  </a:tcPr>
-                </a:tc>
-                <a:tc>
-                  <a:txBody>
-                    <a:bodyPr/>
-                    <a:lstStyle/>
-                    <a:p>
-                      <a:pPr algn="ctr">
-                        <a:defRPr sz="1000" b="1">
-                          <a:solidFill>
-                            <a:srgbClr val="228B22"/>
-                          </a:solidFill>
-                        </a:defRPr>
-                      </a:pPr>
-                      <a:r>
-                        <a:t>PASS (&lt;0.2%)</a:t>
-                      </a:r>
-                    </a:p>
-                  </a:txBody>
-                  <a:tcPr>
-                    <a:solidFill>
-                      <a:srgbClr val="EBF3FA"/>
-                    </a:solidFill>
-                  </a:tcPr>
-                </a:tc>
-              </a:tr>
-              <a:tr h="323088">
-                <a:tc>
-                  <a:txBody>
-                    <a:bodyPr/>
-                    <a:lstStyle/>
-                    <a:p>
-                      <a:pPr algn="ctr">
-                        <a:defRPr sz="1000"/>
-                      </a:pPr>
-                      <a:r>
-                        <a:t>Check 2: Rankine Cycle</a:t>
-                      </a:r>
-                    </a:p>
-                  </a:txBody>
-                  <a:tcPr>
-                    <a:solidFill>
-                      <a:srgbClr val="FFFFFF"/>
-                    </a:solidFill>
-                  </a:tcPr>
-                </a:tc>
-                <a:tc>
-                  <a:txBody>
-                    <a:bodyPr/>
-                    <a:lstStyle/>
-                    <a:p>
-                      <a:pPr algn="ctr">
-                        <a:defRPr sz="1000"/>
-                      </a:pPr>
-                      <a:r>
-                        <a:t>Steam Turbine Work wst (kJ/kg)</a:t>
-                      </a:r>
-                    </a:p>
-                  </a:txBody>
-                  <a:tcPr>
-                    <a:solidFill>
-                      <a:srgbClr val="FFFFFF"/>
-                    </a:solidFill>
-                  </a:tcPr>
-                </a:tc>
-                <a:tc>
-                  <a:txBody>
-                    <a:bodyPr/>
-                    <a:lstStyle/>
-                    <a:p>
-                      <a:pPr algn="ctr">
-                        <a:defRPr sz="1000"/>
-                      </a:pPr>
-                      <a:r>
-                        <a:t>965.20</a:t>
-                      </a:r>
-                    </a:p>
-                  </a:txBody>
-                  <a:tcPr>
-                    <a:solidFill>
-                      <a:srgbClr val="FFFFFF"/>
-                    </a:solidFill>
-                  </a:tcPr>
-                </a:tc>
-                <a:tc>
-                  <a:txBody>
-                    <a:bodyPr/>
-                    <a:lstStyle/>
-                    <a:p>
-                      <a:pPr algn="ctr">
-                        <a:defRPr sz="1000"/>
-                      </a:pPr>
-                      <a:r>
-                        <a:t>965.44</a:t>
-                      </a:r>
-                    </a:p>
-                  </a:txBody>
-                  <a:tcPr>
-                    <a:solidFill>
-                      <a:srgbClr val="FFFFFF"/>
-                    </a:solidFill>
-                  </a:tcPr>
-                </a:tc>
-                <a:tc>
-                  <a:txBody>
-                    <a:bodyPr/>
-                    <a:lstStyle/>
-                    <a:p>
-                      <a:pPr algn="ctr">
-                        <a:defRPr sz="1000"/>
-                      </a:pPr>
-                      <a:r>
-                        <a:t>0.025%</a:t>
-                      </a:r>
-                    </a:p>
-                  </a:txBody>
-                  <a:tcPr>
-                    <a:solidFill>
-                      <a:srgbClr val="FFFFFF"/>
-                    </a:solidFill>
-                  </a:tcPr>
-                </a:tc>
-                <a:tc>
-                  <a:txBody>
-                    <a:bodyPr/>
-                    <a:lstStyle/>
-                    <a:p>
-                      <a:pPr algn="ctr">
-                        <a:defRPr sz="1000" b="1">
-                          <a:solidFill>
-                            <a:srgbClr val="228B22"/>
-                          </a:solidFill>
-                        </a:defRPr>
-                      </a:pPr>
-                      <a:r>
-                        <a:t>PASS (&lt;0.1%)</a:t>
-                      </a:r>
-                    </a:p>
-                  </a:txBody>
-                  <a:tcPr>
-                    <a:solidFill>
-                      <a:srgbClr val="FFFFFF"/>
-                    </a:solidFill>
-                  </a:tcPr>
-                </a:tc>
-              </a:tr>
-              <a:tr h="323088">
-                <a:tc>
-                  <a:txBody>
-                    <a:bodyPr/>
-                    <a:lstStyle/>
-                    <a:p>
-                      <a:pPr algn="ctr">
-                        <a:defRPr sz="1000"/>
-                      </a:pPr>
-                      <a:r>
-                        <a:t>Check 2: Rankine Cycle</a:t>
-                      </a:r>
-                    </a:p>
-                  </a:txBody>
-                  <a:tcPr>
-                    <a:solidFill>
-                      <a:srgbClr val="EBF3FA"/>
-                    </a:solidFill>
-                  </a:tcPr>
-                </a:tc>
-                <a:tc>
-                  <a:txBody>
-                    <a:bodyPr/>
-                    <a:lstStyle/>
-                    <a:p>
-                      <a:pPr algn="ctr">
-                        <a:defRPr sz="1000"/>
-                      </a:pPr>
-                      <a:r>
-                        <a:t>Rankine Efficiency ηRankine (%)</a:t>
-                      </a:r>
-                    </a:p>
-                  </a:txBody>
-                  <a:tcPr>
-                    <a:solidFill>
-                      <a:srgbClr val="EBF3FA"/>
-                    </a:solidFill>
-                  </a:tcPr>
-                </a:tc>
-                <a:tc>
-                  <a:txBody>
-                    <a:bodyPr/>
-                    <a:lstStyle/>
-                    <a:p>
-                      <a:pPr algn="ctr">
-                        <a:defRPr sz="1000"/>
-                      </a:pPr>
-                      <a:r>
-                        <a:t>30.30%</a:t>
-                      </a:r>
-                    </a:p>
-                  </a:txBody>
-                  <a:tcPr>
-                    <a:solidFill>
-                      <a:srgbClr val="EBF3FA"/>
-                    </a:solidFill>
-                  </a:tcPr>
-                </a:tc>
-                <a:tc>
-                  <a:txBody>
-                    <a:bodyPr/>
-                    <a:lstStyle/>
-                    <a:p>
-                      <a:pPr algn="ctr">
-                        <a:defRPr sz="1000"/>
-                      </a:pPr>
-                      <a:r>
-                        <a:t>30.31%</a:t>
-                      </a:r>
-                    </a:p>
-                  </a:txBody>
-                  <a:tcPr>
-                    <a:solidFill>
-                      <a:srgbClr val="EBF3FA"/>
-                    </a:solidFill>
-                  </a:tcPr>
-                </a:tc>
-                <a:tc>
-                  <a:txBody>
-                    <a:bodyPr/>
-                    <a:lstStyle/>
-                    <a:p>
-                      <a:pPr algn="ctr">
-                        <a:defRPr sz="1000"/>
-                      </a:pPr>
-                      <a:r>
-                        <a:t>0.047%</a:t>
-                      </a:r>
-                    </a:p>
-                  </a:txBody>
-                  <a:tcPr>
-                    <a:solidFill>
-                      <a:srgbClr val="EBF3FA"/>
-                    </a:solidFill>
-                  </a:tcPr>
-                </a:tc>
-                <a:tc>
-                  <a:txBody>
-                    <a:bodyPr/>
-                    <a:lstStyle/>
-                    <a:p>
-                      <a:pPr algn="ctr">
-                        <a:defRPr sz="1000" b="1">
-                          <a:solidFill>
-                            <a:srgbClr val="228B22"/>
-                          </a:solidFill>
-                        </a:defRPr>
-                      </a:pPr>
-                      <a:r>
-                        <a:t>PASS (&lt;0.1%)</a:t>
-                      </a:r>
-                    </a:p>
-                  </a:txBody>
-                  <a:tcPr>
-                    <a:solidFill>
-                      <a:srgbClr val="EBF3FA"/>
-                    </a:solidFill>
-                  </a:tcPr>
-                </a:tc>
-              </a:tr>
-              <a:tr h="323088">
-                <a:tc>
-                  <a:txBody>
-                    <a:bodyPr/>
-                    <a:lstStyle/>
-                    <a:p>
-                      <a:pPr algn="ctr">
-                        <a:defRPr sz="1000"/>
-                      </a:pPr>
-                      <a:r>
-                        <a:t>Check 3: Energy Balance</a:t>
-                      </a:r>
-                    </a:p>
-                  </a:txBody>
-                  <a:tcPr>
-                    <a:solidFill>
-                      <a:srgbClr val="FFFFFF"/>
-                    </a:solidFill>
-                  </a:tcPr>
-                </a:tc>
-                <a:tc>
-                  <a:txBody>
-                    <a:bodyPr/>
-                    <a:lstStyle/>
-                    <a:p>
-                      <a:pPr algn="ctr">
-                        <a:defRPr sz="1000"/>
-                      </a:pPr>
-                      <a:r>
-                        <a:t>First Law Plant Closure (%)</a:t>
-                      </a:r>
-                    </a:p>
-                  </a:txBody>
-                  <a:tcPr>
-                    <a:solidFill>
-                      <a:srgbClr val="FFFFFF"/>
-                    </a:solidFill>
-                  </a:tcPr>
-                </a:tc>
-                <a:tc>
-                  <a:txBody>
-                    <a:bodyPr/>
-                    <a:lstStyle/>
-                    <a:p>
-                      <a:pPr algn="ctr">
-                        <a:defRPr sz="1000"/>
-                      </a:pPr>
-                      <a:r>
-                        <a:t>0.000%</a:t>
-                      </a:r>
-                    </a:p>
-                  </a:txBody>
-                  <a:tcPr>
-                    <a:solidFill>
-                      <a:srgbClr val="FFFFFF"/>
-                    </a:solidFill>
-                  </a:tcPr>
-                </a:tc>
-                <a:tc>
-                  <a:txBody>
-                    <a:bodyPr/>
-                    <a:lstStyle/>
-                    <a:p>
-                      <a:pPr algn="ctr">
-                        <a:defRPr sz="1000"/>
-                      </a:pPr>
-                      <a:r>
-                        <a:t>0.000%</a:t>
-                      </a:r>
-                    </a:p>
-                  </a:txBody>
-                  <a:tcPr>
-                    <a:solidFill>
-                      <a:srgbClr val="FFFFFF"/>
-                    </a:solidFill>
-                  </a:tcPr>
-                </a:tc>
-                <a:tc>
-                  <a:txBody>
-                    <a:bodyPr/>
-                    <a:lstStyle/>
-                    <a:p>
-                      <a:pPr algn="ctr">
-                        <a:defRPr sz="1000"/>
-                      </a:pPr>
-                      <a:r>
-                        <a:t>0.000%</a:t>
-                      </a:r>
-                    </a:p>
-                  </a:txBody>
-                  <a:tcPr>
-                    <a:solidFill>
-                      <a:srgbClr val="FFFFFF"/>
-                    </a:solidFill>
-                  </a:tcPr>
-                </a:tc>
-                <a:tc>
-                  <a:txBody>
-                    <a:bodyPr/>
-                    <a:lstStyle/>
-                    <a:p>
-                      <a:pPr algn="ctr">
-                        <a:defRPr sz="1000" b="1">
-                          <a:solidFill>
-                            <a:srgbClr val="228B22"/>
-                          </a:solidFill>
-                        </a:defRPr>
-                      </a:pPr>
-                      <a:r>
-                        <a:t>PASS (&lt;0.01%)</a:t>
-                      </a:r>
-                    </a:p>
-                  </a:txBody>
-                  <a:tcPr>
-                    <a:solidFill>
-                      <a:srgbClr val="FFFFFF"/>
-                    </a:solidFill>
-                  </a:tcPr>
-                </a:tc>
-              </a:tr>
-            </a:tbl>
-          </a:graphicData>
-        </a:graphic>
-      </p:graphicFrame>
+              <a:t>Brayton Cycle Optimum Findings</a:t>
+            </a:r>
+          </a:p>
+          <a:p>
+            <a:pPr>
+              <a:spcAft>
+                <a:spcPts val="300"/>
+              </a:spcAft>
+              <a:defRPr sz="1000">
+                <a:solidFill>
+                  <a:srgbClr val="282828"/>
+                </a:solidFill>
+              </a:defRPr>
+            </a:pPr>
+            <a:r>
+              <a:t>• Gas Turbine Alone Characteristics (TIT = 1400 K):</a:t>
+            </a:r>
+          </a:p>
+          <a:p>
+            <a:pPr>
+              <a:spcAft>
+                <a:spcPts val="300"/>
+              </a:spcAft>
+              <a:defRPr sz="1000">
+                <a:solidFill>
+                  <a:srgbClr val="282828"/>
+                </a:solidFill>
+              </a:defRPr>
+            </a:pPr>
+            <a:r>
+              <a:t>• • Peak thermal efficiency ηGT = 37.89% occurs at rp ≈ 31.0.</a:t>
+            </a:r>
+          </a:p>
+          <a:p>
+            <a:pPr>
+              <a:spcAft>
+                <a:spcPts val="300"/>
+              </a:spcAft>
+              <a:defRPr sz="1000">
+                <a:solidFill>
+                  <a:srgbClr val="282828"/>
+                </a:solidFill>
+              </a:defRPr>
+            </a:pPr>
+            <a:r>
+              <a:t>• • Specific work peaks at a lower compression ratio (rp ≈ 15 - 18).</a:t>
+            </a:r>
+          </a:p>
+          <a:p>
+            <a:pPr>
+              <a:spcAft>
+                <a:spcPts val="300"/>
+              </a:spcAft>
+              <a:defRPr sz="1000">
+                <a:solidFill>
+                  <a:srgbClr val="282828"/>
+                </a:solidFill>
+              </a:defRPr>
+            </a:pPr>
+            <a:r>
+              <a:t>• • Exhaust temperature T4 drops monotonically from 720 °C at rp = 4 to 455 °C at rp = 35.</a:t>
+            </a:r>
+          </a:p>
+          <a:p>
+            <a:pPr>
+              <a:spcAft>
+                <a:spcPts val="300"/>
+              </a:spcAft>
+              <a:defRPr sz="1000">
+                <a:solidFill>
+                  <a:srgbClr val="282828"/>
+                </a:solidFill>
+              </a:defRPr>
+            </a:pPr>
+            <a:r>
+              <a:t>• Combined-Cycle Coupling Impact:</a:t>
+            </a:r>
+          </a:p>
+          <a:p>
+            <a:pPr>
+              <a:spcAft>
+                <a:spcPts val="300"/>
+              </a:spcAft>
+              <a:defRPr sz="1000">
+                <a:solidFill>
+                  <a:srgbClr val="282828"/>
+                </a:solidFill>
+              </a:defRPr>
+            </a:pPr>
+            <a:r>
+              <a:t>• • Higher rp raises topping gas turbine efficiency but degrades exhaust temperature T4, choking bottoming steam production in the HRSG.</a:t>
+            </a:r>
+          </a:p>
+          <a:p>
+            <a:pPr>
+              <a:spcAft>
+                <a:spcPts val="300"/>
+              </a:spcAft>
+              <a:defRPr sz="1000">
+                <a:solidFill>
+                  <a:srgbClr val="282828"/>
+                </a:solidFill>
+              </a:defRPr>
+            </a:pPr>
+            <a:r>
+              <a:t>• • The combined-cycle optimum settles at an intermediate pressure ratio (rp ≈ 20–22), balancing topping expansion work and bottoming exergy recovery.</a:t>
+            </a:r>
+          </a:p>
+        </p:txBody>
+      </p:sp>
     </p:spTree>
   </p:cSld>
   <p:clrMapOvr>
@@ -6170,12 +4878,1927 @@
               </a:defRPr>
             </a:pPr>
             <a:r>
+              <a:t>3. ANALYSIS: VALIDATION</a:t>
+            </a:r>
+          </a:p>
+          <a:p>
+            <a:pPr>
+              <a:defRPr sz="2100" b="1">
+                <a:solidFill>
+                  <a:srgbClr val="102C57"/>
+                </a:solidFill>
+              </a:defRPr>
+            </a:pPr>
+            <a:r>
+              <a:t>Section 3: Model Validation Against Hand-Traceable Benchmarks (Checks 1 to 4)</a:t>
+            </a:r>
+          </a:p>
+        </p:txBody>
+      </p:sp>
+      <p:graphicFrame>
+        <p:nvGraphicFramePr>
+          <p:cNvPr id="3" name="Table 2"/>
+          <p:cNvGraphicFramePr>
+            <a:graphicFrameLocks noGrp="1"/>
+          </p:cNvGraphicFramePr>
+          <p:nvPr/>
+        </p:nvGraphicFramePr>
+        <p:xfrm>
+          <a:off x="731520" y="1463040"/>
+          <a:ext cx="10698480" cy="4937760"/>
+        </p:xfrm>
+        <a:graphic>
+          <a:graphicData uri="http://schemas.openxmlformats.org/drawingml/2006/table">
+            <a:tbl>
+              <a:tblPr firstRow="1" bandRow="1">
+                <a:tableStyleId>{5C22544A-7EE6-4342-B048-85BDC9FD1C3A}</a:tableStyleId>
+              </a:tblPr>
+              <a:tblGrid>
+                <a:gridCol w="2286000"/>
+                <a:gridCol w="2926080"/>
+                <a:gridCol w="1371600"/>
+                <a:gridCol w="1371600"/>
+                <a:gridCol w="1371600"/>
+                <a:gridCol w="1371600"/>
+              </a:tblGrid>
+              <a:tr h="329184">
+                <a:tc>
+                  <a:txBody>
+                    <a:bodyPr/>
+                    <a:lstStyle/>
+                    <a:p>
+                      <a:pPr algn="ctr">
+                        <a:defRPr sz="1050" b="1">
+                          <a:solidFill>
+                            <a:srgbClr val="FFFFFF"/>
+                          </a:solidFill>
+                        </a:defRPr>
+                      </a:pPr>
+                      <a:r>
+                        <a:t>Component / Check</a:t>
+                      </a:r>
+                    </a:p>
+                  </a:txBody>
+                  <a:tcPr>
+                    <a:solidFill>
+                      <a:srgbClr val="102C57"/>
+                    </a:solidFill>
+                  </a:tcPr>
+                </a:tc>
+                <a:tc>
+                  <a:txBody>
+                    <a:bodyPr/>
+                    <a:lstStyle/>
+                    <a:p>
+                      <a:pPr algn="ctr">
+                        <a:defRPr sz="1050" b="1">
+                          <a:solidFill>
+                            <a:srgbClr val="FFFFFF"/>
+                          </a:solidFill>
+                        </a:defRPr>
+                      </a:pPr>
+                      <a:r>
+                        <a:t>Parameter</a:t>
+                      </a:r>
+                    </a:p>
+                  </a:txBody>
+                  <a:tcPr>
+                    <a:solidFill>
+                      <a:srgbClr val="102C57"/>
+                    </a:solidFill>
+                  </a:tcPr>
+                </a:tc>
+                <a:tc>
+                  <a:txBody>
+                    <a:bodyPr/>
+                    <a:lstStyle/>
+                    <a:p>
+                      <a:pPr algn="ctr">
+                        <a:defRPr sz="1050" b="1">
+                          <a:solidFill>
+                            <a:srgbClr val="FFFFFF"/>
+                          </a:solidFill>
+                        </a:defRPr>
+                      </a:pPr>
+                      <a:r>
+                        <a:t>Benchmark</a:t>
+                      </a:r>
+                    </a:p>
+                  </a:txBody>
+                  <a:tcPr>
+                    <a:solidFill>
+                      <a:srgbClr val="102C57"/>
+                    </a:solidFill>
+                  </a:tcPr>
+                </a:tc>
+                <a:tc>
+                  <a:txBody>
+                    <a:bodyPr/>
+                    <a:lstStyle/>
+                    <a:p>
+                      <a:pPr algn="ctr">
+                        <a:defRPr sz="1050" b="1">
+                          <a:solidFill>
+                            <a:srgbClr val="FFFFFF"/>
+                          </a:solidFill>
+                        </a:defRPr>
+                      </a:pPr>
+                      <a:r>
+                        <a:t>Code Output</a:t>
+                      </a:r>
+                    </a:p>
+                  </a:txBody>
+                  <a:tcPr>
+                    <a:solidFill>
+                      <a:srgbClr val="102C57"/>
+                    </a:solidFill>
+                  </a:tcPr>
+                </a:tc>
+                <a:tc>
+                  <a:txBody>
+                    <a:bodyPr/>
+                    <a:lstStyle/>
+                    <a:p>
+                      <a:pPr algn="ctr">
+                        <a:defRPr sz="1050" b="1">
+                          <a:solidFill>
+                            <a:srgbClr val="FFFFFF"/>
+                          </a:solidFill>
+                        </a:defRPr>
+                      </a:pPr>
+                      <a:r>
+                        <a:t>% Diff</a:t>
+                      </a:r>
+                    </a:p>
+                  </a:txBody>
+                  <a:tcPr>
+                    <a:solidFill>
+                      <a:srgbClr val="102C57"/>
+                    </a:solidFill>
+                  </a:tcPr>
+                </a:tc>
+                <a:tc>
+                  <a:txBody>
+                    <a:bodyPr/>
+                    <a:lstStyle/>
+                    <a:p>
+                      <a:pPr algn="ctr">
+                        <a:defRPr sz="1050" b="1">
+                          <a:solidFill>
+                            <a:srgbClr val="FFFFFF"/>
+                          </a:solidFill>
+                        </a:defRPr>
+                      </a:pPr>
+                      <a:r>
+                        <a:t>Status</a:t>
+                      </a:r>
+                    </a:p>
+                  </a:txBody>
+                  <a:tcPr>
+                    <a:solidFill>
+                      <a:srgbClr val="102C57"/>
+                    </a:solidFill>
+                  </a:tcPr>
+                </a:tc>
+              </a:tr>
+              <a:tr h="329184">
+                <a:tc>
+                  <a:txBody>
+                    <a:bodyPr/>
+                    <a:lstStyle/>
+                    <a:p>
+                      <a:pPr algn="ctr">
+                        <a:defRPr sz="950"/>
+                      </a:pPr>
+                      <a:r>
+                        <a:t>Check 1: Gas Turbine</a:t>
+                      </a:r>
+                    </a:p>
+                  </a:txBody>
+                  <a:tcPr>
+                    <a:solidFill>
+                      <a:srgbClr val="EBF3FA"/>
+                    </a:solidFill>
+                  </a:tcPr>
+                </a:tc>
+                <a:tc>
+                  <a:txBody>
+                    <a:bodyPr/>
+                    <a:lstStyle/>
+                    <a:p>
+                      <a:pPr algn="ctr">
+                        <a:defRPr sz="950"/>
+                      </a:pPr>
+                      <a:r>
+                        <a:t>T2s (K)</a:t>
+                      </a:r>
+                    </a:p>
+                  </a:txBody>
+                  <a:tcPr>
+                    <a:solidFill>
+                      <a:srgbClr val="EBF3FA"/>
+                    </a:solidFill>
+                  </a:tcPr>
+                </a:tc>
+                <a:tc>
+                  <a:txBody>
+                    <a:bodyPr/>
+                    <a:lstStyle/>
+                    <a:p>
+                      <a:pPr algn="ctr">
+                        <a:defRPr sz="950"/>
+                      </a:pPr>
+                      <a:r>
+                        <a:t>641.20</a:t>
+                      </a:r>
+                    </a:p>
+                  </a:txBody>
+                  <a:tcPr>
+                    <a:solidFill>
+                      <a:srgbClr val="EBF3FA"/>
+                    </a:solidFill>
+                  </a:tcPr>
+                </a:tc>
+                <a:tc>
+                  <a:txBody>
+                    <a:bodyPr/>
+                    <a:lstStyle/>
+                    <a:p>
+                      <a:pPr algn="ctr">
+                        <a:defRPr sz="950"/>
+                      </a:pPr>
+                      <a:r>
+                        <a:t>641.12</a:t>
+                      </a:r>
+                    </a:p>
+                  </a:txBody>
+                  <a:tcPr>
+                    <a:solidFill>
+                      <a:srgbClr val="EBF3FA"/>
+                    </a:solidFill>
+                  </a:tcPr>
+                </a:tc>
+                <a:tc>
+                  <a:txBody>
+                    <a:bodyPr/>
+                    <a:lstStyle/>
+                    <a:p>
+                      <a:pPr algn="ctr">
+                        <a:defRPr sz="950"/>
+                      </a:pPr>
+                      <a:r>
+                        <a:t>0.013%</a:t>
+                      </a:r>
+                    </a:p>
+                  </a:txBody>
+                  <a:tcPr>
+                    <a:solidFill>
+                      <a:srgbClr val="EBF3FA"/>
+                    </a:solidFill>
+                  </a:tcPr>
+                </a:tc>
+                <a:tc>
+                  <a:txBody>
+                    <a:bodyPr/>
+                    <a:lstStyle/>
+                    <a:p>
+                      <a:pPr algn="ctr">
+                        <a:defRPr sz="950" b="1">
+                          <a:solidFill>
+                            <a:srgbClr val="228B22"/>
+                          </a:solidFill>
+                        </a:defRPr>
+                      </a:pPr>
+                      <a:r>
+                        <a:t>PASS (&lt;0.5%)</a:t>
+                      </a:r>
+                    </a:p>
+                  </a:txBody>
+                  <a:tcPr>
+                    <a:solidFill>
+                      <a:srgbClr val="EBF3FA"/>
+                    </a:solidFill>
+                  </a:tcPr>
+                </a:tc>
+              </a:tr>
+              <a:tr h="329184">
+                <a:tc>
+                  <a:txBody>
+                    <a:bodyPr/>
+                    <a:lstStyle/>
+                    <a:p>
+                      <a:pPr algn="ctr">
+                        <a:defRPr sz="950"/>
+                      </a:pPr>
+                      <a:r>
+                        <a:t>Check 1: Gas Turbine</a:t>
+                      </a:r>
+                    </a:p>
+                  </a:txBody>
+                  <a:tcPr>
+                    <a:solidFill>
+                      <a:srgbClr val="FFFFFF"/>
+                    </a:solidFill>
+                  </a:tcPr>
+                </a:tc>
+                <a:tc>
+                  <a:txBody>
+                    <a:bodyPr/>
+                    <a:lstStyle/>
+                    <a:p>
+                      <a:pPr algn="ctr">
+                        <a:defRPr sz="950"/>
+                      </a:pPr>
+                      <a:r>
+                        <a:t>T2 (actual, K)</a:t>
+                      </a:r>
+                    </a:p>
+                  </a:txBody>
+                  <a:tcPr>
+                    <a:solidFill>
+                      <a:srgbClr val="FFFFFF"/>
+                    </a:solidFill>
+                  </a:tcPr>
+                </a:tc>
+                <a:tc>
+                  <a:txBody>
+                    <a:bodyPr/>
+                    <a:lstStyle/>
+                    <a:p>
+                      <a:pPr algn="ctr">
+                        <a:defRPr sz="950"/>
+                      </a:pPr>
+                      <a:r>
+                        <a:t>694.70</a:t>
+                      </a:r>
+                    </a:p>
+                  </a:txBody>
+                  <a:tcPr>
+                    <a:solidFill>
+                      <a:srgbClr val="FFFFFF"/>
+                    </a:solidFill>
+                  </a:tcPr>
+                </a:tc>
+                <a:tc>
+                  <a:txBody>
+                    <a:bodyPr/>
+                    <a:lstStyle/>
+                    <a:p>
+                      <a:pPr algn="ctr">
+                        <a:defRPr sz="950"/>
+                      </a:pPr>
+                      <a:r>
+                        <a:t>694.66</a:t>
+                      </a:r>
+                    </a:p>
+                  </a:txBody>
+                  <a:tcPr>
+                    <a:solidFill>
+                      <a:srgbClr val="FFFFFF"/>
+                    </a:solidFill>
+                  </a:tcPr>
+                </a:tc>
+                <a:tc>
+                  <a:txBody>
+                    <a:bodyPr/>
+                    <a:lstStyle/>
+                    <a:p>
+                      <a:pPr algn="ctr">
+                        <a:defRPr sz="950"/>
+                      </a:pPr>
+                      <a:r>
+                        <a:t>0.006%</a:t>
+                      </a:r>
+                    </a:p>
+                  </a:txBody>
+                  <a:tcPr>
+                    <a:solidFill>
+                      <a:srgbClr val="FFFFFF"/>
+                    </a:solidFill>
+                  </a:tcPr>
+                </a:tc>
+                <a:tc>
+                  <a:txBody>
+                    <a:bodyPr/>
+                    <a:lstStyle/>
+                    <a:p>
+                      <a:pPr algn="ctr">
+                        <a:defRPr sz="950" b="1">
+                          <a:solidFill>
+                            <a:srgbClr val="228B22"/>
+                          </a:solidFill>
+                        </a:defRPr>
+                      </a:pPr>
+                      <a:r>
+                        <a:t>PASS (&lt;0.5%)</a:t>
+                      </a:r>
+                    </a:p>
+                  </a:txBody>
+                  <a:tcPr>
+                    <a:solidFill>
+                      <a:srgbClr val="FFFFFF"/>
+                    </a:solidFill>
+                  </a:tcPr>
+                </a:tc>
+              </a:tr>
+              <a:tr h="329184">
+                <a:tc>
+                  <a:txBody>
+                    <a:bodyPr/>
+                    <a:lstStyle/>
+                    <a:p>
+                      <a:pPr algn="ctr">
+                        <a:defRPr sz="950"/>
+                      </a:pPr>
+                      <a:r>
+                        <a:t>Check 1: Gas Turbine</a:t>
+                      </a:r>
+                    </a:p>
+                  </a:txBody>
+                  <a:tcPr>
+                    <a:solidFill>
+                      <a:srgbClr val="EBF3FA"/>
+                    </a:solidFill>
+                  </a:tcPr>
+                </a:tc>
+                <a:tc>
+                  <a:txBody>
+                    <a:bodyPr/>
+                    <a:lstStyle/>
+                    <a:p>
+                      <a:pPr algn="ctr">
+                        <a:defRPr sz="950"/>
+                      </a:pPr>
+                      <a:r>
+                        <a:t>T4 (actual, K)</a:t>
+                      </a:r>
+                    </a:p>
+                  </a:txBody>
+                  <a:tcPr>
+                    <a:solidFill>
+                      <a:srgbClr val="EBF3FA"/>
+                    </a:solidFill>
+                  </a:tcPr>
+                </a:tc>
+                <a:tc>
+                  <a:txBody>
+                    <a:bodyPr/>
+                    <a:lstStyle/>
+                    <a:p>
+                      <a:pPr algn="ctr">
+                        <a:defRPr sz="950"/>
+                      </a:pPr>
+                      <a:r>
+                        <a:t>787.70</a:t>
+                      </a:r>
+                    </a:p>
+                  </a:txBody>
+                  <a:tcPr>
+                    <a:solidFill>
+                      <a:srgbClr val="EBF3FA"/>
+                    </a:solidFill>
+                  </a:tcPr>
+                </a:tc>
+                <a:tc>
+                  <a:txBody>
+                    <a:bodyPr/>
+                    <a:lstStyle/>
+                    <a:p>
+                      <a:pPr algn="ctr">
+                        <a:defRPr sz="950"/>
+                      </a:pPr>
+                      <a:r>
+                        <a:t>787.91</a:t>
+                      </a:r>
+                    </a:p>
+                  </a:txBody>
+                  <a:tcPr>
+                    <a:solidFill>
+                      <a:srgbClr val="EBF3FA"/>
+                    </a:solidFill>
+                  </a:tcPr>
+                </a:tc>
+                <a:tc>
+                  <a:txBody>
+                    <a:bodyPr/>
+                    <a:lstStyle/>
+                    <a:p>
+                      <a:pPr algn="ctr">
+                        <a:defRPr sz="950"/>
+                      </a:pPr>
+                      <a:r>
+                        <a:t>0.027%</a:t>
+                      </a:r>
+                    </a:p>
+                  </a:txBody>
+                  <a:tcPr>
+                    <a:solidFill>
+                      <a:srgbClr val="EBF3FA"/>
+                    </a:solidFill>
+                  </a:tcPr>
+                </a:tc>
+                <a:tc>
+                  <a:txBody>
+                    <a:bodyPr/>
+                    <a:lstStyle/>
+                    <a:p>
+                      <a:pPr algn="ctr">
+                        <a:defRPr sz="950" b="1">
+                          <a:solidFill>
+                            <a:srgbClr val="228B22"/>
+                          </a:solidFill>
+                        </a:defRPr>
+                      </a:pPr>
+                      <a:r>
+                        <a:t>PASS (&lt;0.5%)</a:t>
+                      </a:r>
+                    </a:p>
+                  </a:txBody>
+                  <a:tcPr>
+                    <a:solidFill>
+                      <a:srgbClr val="EBF3FA"/>
+                    </a:solidFill>
+                  </a:tcPr>
+                </a:tc>
+              </a:tr>
+              <a:tr h="329184">
+                <a:tc>
+                  <a:txBody>
+                    <a:bodyPr/>
+                    <a:lstStyle/>
+                    <a:p>
+                      <a:pPr algn="ctr">
+                        <a:defRPr sz="950"/>
+                      </a:pPr>
+                      <a:r>
+                        <a:t>Check 1: Gas Turbine</a:t>
+                      </a:r>
+                    </a:p>
+                  </a:txBody>
+                  <a:tcPr>
+                    <a:solidFill>
+                      <a:srgbClr val="FFFFFF"/>
+                    </a:solidFill>
+                  </a:tcPr>
+                </a:tc>
+                <a:tc>
+                  <a:txBody>
+                    <a:bodyPr/>
+                    <a:lstStyle/>
+                    <a:p>
+                      <a:pPr algn="ctr">
+                        <a:defRPr sz="950"/>
+                      </a:pPr>
+                      <a:r>
+                        <a:t>Net Work wnet (kJ/kg)</a:t>
+                      </a:r>
+                    </a:p>
+                  </a:txBody>
+                  <a:tcPr>
+                    <a:solidFill>
+                      <a:srgbClr val="FFFFFF"/>
+                    </a:solidFill>
+                  </a:tcPr>
+                </a:tc>
+                <a:tc>
+                  <a:txBody>
+                    <a:bodyPr/>
+                    <a:lstStyle/>
+                    <a:p>
+                      <a:pPr algn="ctr">
+                        <a:defRPr sz="950"/>
+                      </a:pPr>
+                      <a:r>
+                        <a:t>299.10</a:t>
+                      </a:r>
+                    </a:p>
+                  </a:txBody>
+                  <a:tcPr>
+                    <a:solidFill>
+                      <a:srgbClr val="FFFFFF"/>
+                    </a:solidFill>
+                  </a:tcPr>
+                </a:tc>
+                <a:tc>
+                  <a:txBody>
+                    <a:bodyPr/>
+                    <a:lstStyle/>
+                    <a:p>
+                      <a:pPr algn="ctr">
+                        <a:defRPr sz="950"/>
+                      </a:pPr>
+                      <a:r>
+                        <a:t>299.10</a:t>
+                      </a:r>
+                    </a:p>
+                  </a:txBody>
+                  <a:tcPr>
+                    <a:solidFill>
+                      <a:srgbClr val="FFFFFF"/>
+                    </a:solidFill>
+                  </a:tcPr>
+                </a:tc>
+                <a:tc>
+                  <a:txBody>
+                    <a:bodyPr/>
+                    <a:lstStyle/>
+                    <a:p>
+                      <a:pPr algn="ctr">
+                        <a:defRPr sz="950"/>
+                      </a:pPr>
+                      <a:r>
+                        <a:t>0.001%</a:t>
+                      </a:r>
+                    </a:p>
+                  </a:txBody>
+                  <a:tcPr>
+                    <a:solidFill>
+                      <a:srgbClr val="FFFFFF"/>
+                    </a:solidFill>
+                  </a:tcPr>
+                </a:tc>
+                <a:tc>
+                  <a:txBody>
+                    <a:bodyPr/>
+                    <a:lstStyle/>
+                    <a:p>
+                      <a:pPr algn="ctr">
+                        <a:defRPr sz="950" b="1">
+                          <a:solidFill>
+                            <a:srgbClr val="228B22"/>
+                          </a:solidFill>
+                        </a:defRPr>
+                      </a:pPr>
+                      <a:r>
+                        <a:t>PASS (&lt;0.5%)</a:t>
+                      </a:r>
+                    </a:p>
+                  </a:txBody>
+                  <a:tcPr>
+                    <a:solidFill>
+                      <a:srgbClr val="FFFFFF"/>
+                    </a:solidFill>
+                  </a:tcPr>
+                </a:tc>
+              </a:tr>
+              <a:tr h="329184">
+                <a:tc>
+                  <a:txBody>
+                    <a:bodyPr/>
+                    <a:lstStyle/>
+                    <a:p>
+                      <a:pPr algn="ctr">
+                        <a:defRPr sz="950"/>
+                      </a:pPr>
+                      <a:r>
+                        <a:t>Check 1: Gas Turbine</a:t>
+                      </a:r>
+                    </a:p>
+                  </a:txBody>
+                  <a:tcPr>
+                    <a:solidFill>
+                      <a:srgbClr val="EBF3FA"/>
+                    </a:solidFill>
+                  </a:tcPr>
+                </a:tc>
+                <a:tc>
+                  <a:txBody>
+                    <a:bodyPr/>
+                    <a:lstStyle/>
+                    <a:p>
+                      <a:pPr algn="ctr">
+                        <a:defRPr sz="950"/>
+                      </a:pPr>
+                      <a:r>
+                        <a:t>Thermal Efficiency ηth (%)</a:t>
+                      </a:r>
+                    </a:p>
+                  </a:txBody>
+                  <a:tcPr>
+                    <a:solidFill>
+                      <a:srgbClr val="EBF3FA"/>
+                    </a:solidFill>
+                  </a:tcPr>
+                </a:tc>
+                <a:tc>
+                  <a:txBody>
+                    <a:bodyPr/>
+                    <a:lstStyle/>
+                    <a:p>
+                      <a:pPr algn="ctr">
+                        <a:defRPr sz="950"/>
+                      </a:pPr>
+                      <a:r>
+                        <a:t>37.05%</a:t>
+                      </a:r>
+                    </a:p>
+                  </a:txBody>
+                  <a:tcPr>
+                    <a:solidFill>
+                      <a:srgbClr val="EBF3FA"/>
+                    </a:solidFill>
+                  </a:tcPr>
+                </a:tc>
+                <a:tc>
+                  <a:txBody>
+                    <a:bodyPr/>
+                    <a:lstStyle/>
+                    <a:p>
+                      <a:pPr algn="ctr">
+                        <a:defRPr sz="950"/>
+                      </a:pPr>
+                      <a:r>
+                        <a:t>37.05%</a:t>
+                      </a:r>
+                    </a:p>
+                  </a:txBody>
+                  <a:tcPr>
+                    <a:solidFill>
+                      <a:srgbClr val="EBF3FA"/>
+                    </a:solidFill>
+                  </a:tcPr>
+                </a:tc>
+                <a:tc>
+                  <a:txBody>
+                    <a:bodyPr/>
+                    <a:lstStyle/>
+                    <a:p>
+                      <a:pPr algn="ctr">
+                        <a:defRPr sz="950"/>
+                      </a:pPr>
+                      <a:r>
+                        <a:t>0.008%</a:t>
+                      </a:r>
+                    </a:p>
+                  </a:txBody>
+                  <a:tcPr>
+                    <a:solidFill>
+                      <a:srgbClr val="EBF3FA"/>
+                    </a:solidFill>
+                  </a:tcPr>
+                </a:tc>
+                <a:tc>
+                  <a:txBody>
+                    <a:bodyPr/>
+                    <a:lstStyle/>
+                    <a:p>
+                      <a:pPr algn="ctr">
+                        <a:defRPr sz="950" b="1">
+                          <a:solidFill>
+                            <a:srgbClr val="228B22"/>
+                          </a:solidFill>
+                        </a:defRPr>
+                      </a:pPr>
+                      <a:r>
+                        <a:t>PASS (&lt;0.5%)</a:t>
+                      </a:r>
+                    </a:p>
+                  </a:txBody>
+                  <a:tcPr>
+                    <a:solidFill>
+                      <a:srgbClr val="EBF3FA"/>
+                    </a:solidFill>
+                  </a:tcPr>
+                </a:tc>
+              </a:tr>
+              <a:tr h="329184">
+                <a:tc>
+                  <a:txBody>
+                    <a:bodyPr/>
+                    <a:lstStyle/>
+                    <a:p>
+                      <a:pPr algn="ctr">
+                        <a:defRPr sz="950"/>
+                      </a:pPr>
+                      <a:r>
+                        <a:t>Check 2: Rankine Cycle</a:t>
+                      </a:r>
+                    </a:p>
+                  </a:txBody>
+                  <a:tcPr>
+                    <a:solidFill>
+                      <a:srgbClr val="FFFFFF"/>
+                    </a:solidFill>
+                  </a:tcPr>
+                </a:tc>
+                <a:tc>
+                  <a:txBody>
+                    <a:bodyPr/>
+                    <a:lstStyle/>
+                    <a:p>
+                      <a:pPr algn="ctr">
+                        <a:defRPr sz="950"/>
+                      </a:pPr>
+                      <a:r>
+                        <a:t>Inlet Enthalpy h5 (kJ/kg)</a:t>
+                      </a:r>
+                    </a:p>
+                  </a:txBody>
+                  <a:tcPr>
+                    <a:solidFill>
+                      <a:srgbClr val="FFFFFF"/>
+                    </a:solidFill>
+                  </a:tcPr>
+                </a:tc>
+                <a:tc>
+                  <a:txBody>
+                    <a:bodyPr/>
+                    <a:lstStyle/>
+                    <a:p>
+                      <a:pPr algn="ctr">
+                        <a:defRPr sz="950"/>
+                      </a:pPr>
+                      <a:r>
+                        <a:t>3344.00</a:t>
+                      </a:r>
+                    </a:p>
+                  </a:txBody>
+                  <a:tcPr>
+                    <a:solidFill>
+                      <a:srgbClr val="FFFFFF"/>
+                    </a:solidFill>
+                  </a:tcPr>
+                </a:tc>
+                <a:tc>
+                  <a:txBody>
+                    <a:bodyPr/>
+                    <a:lstStyle/>
+                    <a:p>
+                      <a:pPr algn="ctr">
+                        <a:defRPr sz="950"/>
+                      </a:pPr>
+                      <a:r>
+                        <a:t>3344.84</a:t>
+                      </a:r>
+                    </a:p>
+                  </a:txBody>
+                  <a:tcPr>
+                    <a:solidFill>
+                      <a:srgbClr val="FFFFFF"/>
+                    </a:solidFill>
+                  </a:tcPr>
+                </a:tc>
+                <a:tc>
+                  <a:txBody>
+                    <a:bodyPr/>
+                    <a:lstStyle/>
+                    <a:p>
+                      <a:pPr algn="ctr">
+                        <a:defRPr sz="950"/>
+                      </a:pPr>
+                      <a:r>
+                        <a:t>0.025%</a:t>
+                      </a:r>
+                    </a:p>
+                  </a:txBody>
+                  <a:tcPr>
+                    <a:solidFill>
+                      <a:srgbClr val="FFFFFF"/>
+                    </a:solidFill>
+                  </a:tcPr>
+                </a:tc>
+                <a:tc>
+                  <a:txBody>
+                    <a:bodyPr/>
+                    <a:lstStyle/>
+                    <a:p>
+                      <a:pPr algn="ctr">
+                        <a:defRPr sz="950" b="1">
+                          <a:solidFill>
+                            <a:srgbClr val="228B22"/>
+                          </a:solidFill>
+                        </a:defRPr>
+                      </a:pPr>
+                      <a:r>
+                        <a:t>PASS (&lt;0.1%)</a:t>
+                      </a:r>
+                    </a:p>
+                  </a:txBody>
+                  <a:tcPr>
+                    <a:solidFill>
+                      <a:srgbClr val="FFFFFF"/>
+                    </a:solidFill>
+                  </a:tcPr>
+                </a:tc>
+              </a:tr>
+              <a:tr h="329184">
+                <a:tc>
+                  <a:txBody>
+                    <a:bodyPr/>
+                    <a:lstStyle/>
+                    <a:p>
+                      <a:pPr algn="ctr">
+                        <a:defRPr sz="950"/>
+                      </a:pPr>
+                      <a:r>
+                        <a:t>Check 2: Rankine Cycle</a:t>
+                      </a:r>
+                    </a:p>
+                  </a:txBody>
+                  <a:tcPr>
+                    <a:solidFill>
+                      <a:srgbClr val="EBF3FA"/>
+                    </a:solidFill>
+                  </a:tcPr>
+                </a:tc>
+                <a:tc>
+                  <a:txBody>
+                    <a:bodyPr/>
+                    <a:lstStyle/>
+                    <a:p>
+                      <a:pPr algn="ctr">
+                        <a:defRPr sz="950"/>
+                      </a:pPr>
+                      <a:r>
+                        <a:t>Actual Quality x6 (-)</a:t>
+                      </a:r>
+                    </a:p>
+                  </a:txBody>
+                  <a:tcPr>
+                    <a:solidFill>
+                      <a:srgbClr val="EBF3FA"/>
+                    </a:solidFill>
+                  </a:tcPr>
+                </a:tc>
+                <a:tc>
+                  <a:txBody>
+                    <a:bodyPr/>
+                    <a:lstStyle/>
+                    <a:p>
+                      <a:pPr algn="ctr">
+                        <a:defRPr sz="950"/>
+                      </a:pPr>
+                      <a:r>
+                        <a:t>0.919</a:t>
+                      </a:r>
+                    </a:p>
+                  </a:txBody>
+                  <a:tcPr>
+                    <a:solidFill>
+                      <a:srgbClr val="EBF3FA"/>
+                    </a:solidFill>
+                  </a:tcPr>
+                </a:tc>
+                <a:tc>
+                  <a:txBody>
+                    <a:bodyPr/>
+                    <a:lstStyle/>
+                    <a:p>
+                      <a:pPr algn="ctr">
+                        <a:defRPr sz="950"/>
+                      </a:pPr>
+                      <a:r>
+                        <a:t>0.919</a:t>
+                      </a:r>
+                    </a:p>
+                  </a:txBody>
+                  <a:tcPr>
+                    <a:solidFill>
+                      <a:srgbClr val="EBF3FA"/>
+                    </a:solidFill>
+                  </a:tcPr>
+                </a:tc>
+                <a:tc>
+                  <a:txBody>
+                    <a:bodyPr/>
+                    <a:lstStyle/>
+                    <a:p>
+                      <a:pPr algn="ctr">
+                        <a:defRPr sz="950"/>
+                      </a:pPr>
+                      <a:r>
+                        <a:t>0.009%</a:t>
+                      </a:r>
+                    </a:p>
+                  </a:txBody>
+                  <a:tcPr>
+                    <a:solidFill>
+                      <a:srgbClr val="EBF3FA"/>
+                    </a:solidFill>
+                  </a:tcPr>
+                </a:tc>
+                <a:tc>
+                  <a:txBody>
+                    <a:bodyPr/>
+                    <a:lstStyle/>
+                    <a:p>
+                      <a:pPr algn="ctr">
+                        <a:defRPr sz="950" b="1">
+                          <a:solidFill>
+                            <a:srgbClr val="228B22"/>
+                          </a:solidFill>
+                        </a:defRPr>
+                      </a:pPr>
+                      <a:r>
+                        <a:t>PASS (&lt;0.2%)</a:t>
+                      </a:r>
+                    </a:p>
+                  </a:txBody>
+                  <a:tcPr>
+                    <a:solidFill>
+                      <a:srgbClr val="EBF3FA"/>
+                    </a:solidFill>
+                  </a:tcPr>
+                </a:tc>
+              </a:tr>
+              <a:tr h="329184">
+                <a:tc>
+                  <a:txBody>
+                    <a:bodyPr/>
+                    <a:lstStyle/>
+                    <a:p>
+                      <a:pPr algn="ctr">
+                        <a:defRPr sz="950"/>
+                      </a:pPr>
+                      <a:r>
+                        <a:t>Check 2: Rankine Cycle</a:t>
+                      </a:r>
+                    </a:p>
+                  </a:txBody>
+                  <a:tcPr>
+                    <a:solidFill>
+                      <a:srgbClr val="FFFFFF"/>
+                    </a:solidFill>
+                  </a:tcPr>
+                </a:tc>
+                <a:tc>
+                  <a:txBody>
+                    <a:bodyPr/>
+                    <a:lstStyle/>
+                    <a:p>
+                      <a:pPr algn="ctr">
+                        <a:defRPr sz="950"/>
+                      </a:pPr>
+                      <a:r>
+                        <a:t>Steam Turbine Work wst (kJ/kg)</a:t>
+                      </a:r>
+                    </a:p>
+                  </a:txBody>
+                  <a:tcPr>
+                    <a:solidFill>
+                      <a:srgbClr val="FFFFFF"/>
+                    </a:solidFill>
+                  </a:tcPr>
+                </a:tc>
+                <a:tc>
+                  <a:txBody>
+                    <a:bodyPr/>
+                    <a:lstStyle/>
+                    <a:p>
+                      <a:pPr algn="ctr">
+                        <a:defRPr sz="950"/>
+                      </a:pPr>
+                      <a:r>
+                        <a:t>965.20</a:t>
+                      </a:r>
+                    </a:p>
+                  </a:txBody>
+                  <a:tcPr>
+                    <a:solidFill>
+                      <a:srgbClr val="FFFFFF"/>
+                    </a:solidFill>
+                  </a:tcPr>
+                </a:tc>
+                <a:tc>
+                  <a:txBody>
+                    <a:bodyPr/>
+                    <a:lstStyle/>
+                    <a:p>
+                      <a:pPr algn="ctr">
+                        <a:defRPr sz="950"/>
+                      </a:pPr>
+                      <a:r>
+                        <a:t>965.44</a:t>
+                      </a:r>
+                    </a:p>
+                  </a:txBody>
+                  <a:tcPr>
+                    <a:solidFill>
+                      <a:srgbClr val="FFFFFF"/>
+                    </a:solidFill>
+                  </a:tcPr>
+                </a:tc>
+                <a:tc>
+                  <a:txBody>
+                    <a:bodyPr/>
+                    <a:lstStyle/>
+                    <a:p>
+                      <a:pPr algn="ctr">
+                        <a:defRPr sz="950"/>
+                      </a:pPr>
+                      <a:r>
+                        <a:t>0.025%</a:t>
+                      </a:r>
+                    </a:p>
+                  </a:txBody>
+                  <a:tcPr>
+                    <a:solidFill>
+                      <a:srgbClr val="FFFFFF"/>
+                    </a:solidFill>
+                  </a:tcPr>
+                </a:tc>
+                <a:tc>
+                  <a:txBody>
+                    <a:bodyPr/>
+                    <a:lstStyle/>
+                    <a:p>
+                      <a:pPr algn="ctr">
+                        <a:defRPr sz="950" b="1">
+                          <a:solidFill>
+                            <a:srgbClr val="228B22"/>
+                          </a:solidFill>
+                        </a:defRPr>
+                      </a:pPr>
+                      <a:r>
+                        <a:t>PASS (&lt;0.1%)</a:t>
+                      </a:r>
+                    </a:p>
+                  </a:txBody>
+                  <a:tcPr>
+                    <a:solidFill>
+                      <a:srgbClr val="FFFFFF"/>
+                    </a:solidFill>
+                  </a:tcPr>
+                </a:tc>
+              </a:tr>
+              <a:tr h="329184">
+                <a:tc>
+                  <a:txBody>
+                    <a:bodyPr/>
+                    <a:lstStyle/>
+                    <a:p>
+                      <a:pPr algn="ctr">
+                        <a:defRPr sz="950"/>
+                      </a:pPr>
+                      <a:r>
+                        <a:t>Check 2: Rankine Cycle</a:t>
+                      </a:r>
+                    </a:p>
+                  </a:txBody>
+                  <a:tcPr>
+                    <a:solidFill>
+                      <a:srgbClr val="EBF3FA"/>
+                    </a:solidFill>
+                  </a:tcPr>
+                </a:tc>
+                <a:tc>
+                  <a:txBody>
+                    <a:bodyPr/>
+                    <a:lstStyle/>
+                    <a:p>
+                      <a:pPr algn="ctr">
+                        <a:defRPr sz="950"/>
+                      </a:pPr>
+                      <a:r>
+                        <a:t>Rankine Efficiency ηRankine (%)</a:t>
+                      </a:r>
+                    </a:p>
+                  </a:txBody>
+                  <a:tcPr>
+                    <a:solidFill>
+                      <a:srgbClr val="EBF3FA"/>
+                    </a:solidFill>
+                  </a:tcPr>
+                </a:tc>
+                <a:tc>
+                  <a:txBody>
+                    <a:bodyPr/>
+                    <a:lstStyle/>
+                    <a:p>
+                      <a:pPr algn="ctr">
+                        <a:defRPr sz="950"/>
+                      </a:pPr>
+                      <a:r>
+                        <a:t>30.30%</a:t>
+                      </a:r>
+                    </a:p>
+                  </a:txBody>
+                  <a:tcPr>
+                    <a:solidFill>
+                      <a:srgbClr val="EBF3FA"/>
+                    </a:solidFill>
+                  </a:tcPr>
+                </a:tc>
+                <a:tc>
+                  <a:txBody>
+                    <a:bodyPr/>
+                    <a:lstStyle/>
+                    <a:p>
+                      <a:pPr algn="ctr">
+                        <a:defRPr sz="950"/>
+                      </a:pPr>
+                      <a:r>
+                        <a:t>30.31%</a:t>
+                      </a:r>
+                    </a:p>
+                  </a:txBody>
+                  <a:tcPr>
+                    <a:solidFill>
+                      <a:srgbClr val="EBF3FA"/>
+                    </a:solidFill>
+                  </a:tcPr>
+                </a:tc>
+                <a:tc>
+                  <a:txBody>
+                    <a:bodyPr/>
+                    <a:lstStyle/>
+                    <a:p>
+                      <a:pPr algn="ctr">
+                        <a:defRPr sz="950"/>
+                      </a:pPr>
+                      <a:r>
+                        <a:t>0.047%</a:t>
+                      </a:r>
+                    </a:p>
+                  </a:txBody>
+                  <a:tcPr>
+                    <a:solidFill>
+                      <a:srgbClr val="EBF3FA"/>
+                    </a:solidFill>
+                  </a:tcPr>
+                </a:tc>
+                <a:tc>
+                  <a:txBody>
+                    <a:bodyPr/>
+                    <a:lstStyle/>
+                    <a:p>
+                      <a:pPr algn="ctr">
+                        <a:defRPr sz="950" b="1">
+                          <a:solidFill>
+                            <a:srgbClr val="228B22"/>
+                          </a:solidFill>
+                        </a:defRPr>
+                      </a:pPr>
+                      <a:r>
+                        <a:t>PASS (&lt;0.1%)</a:t>
+                      </a:r>
+                    </a:p>
+                  </a:txBody>
+                  <a:tcPr>
+                    <a:solidFill>
+                      <a:srgbClr val="EBF3FA"/>
+                    </a:solidFill>
+                  </a:tcPr>
+                </a:tc>
+              </a:tr>
+              <a:tr h="329184">
+                <a:tc>
+                  <a:txBody>
+                    <a:bodyPr/>
+                    <a:lstStyle/>
+                    <a:p>
+                      <a:pPr algn="ctr">
+                        <a:defRPr sz="950"/>
+                      </a:pPr>
+                      <a:r>
+                        <a:t>Check 3: First Law Balance</a:t>
+                      </a:r>
+                    </a:p>
+                  </a:txBody>
+                  <a:tcPr>
+                    <a:solidFill>
+                      <a:srgbClr val="FFFFFF"/>
+                    </a:solidFill>
+                  </a:tcPr>
+                </a:tc>
+                <a:tc>
+                  <a:txBody>
+                    <a:bodyPr/>
+                    <a:lstStyle/>
+                    <a:p>
+                      <a:pPr algn="ctr">
+                        <a:defRPr sz="950"/>
+                      </a:pPr>
+                      <a:r>
+                        <a:t>Closed Plant Residual (%)</a:t>
+                      </a:r>
+                    </a:p>
+                  </a:txBody>
+                  <a:tcPr>
+                    <a:solidFill>
+                      <a:srgbClr val="FFFFFF"/>
+                    </a:solidFill>
+                  </a:tcPr>
+                </a:tc>
+                <a:tc>
+                  <a:txBody>
+                    <a:bodyPr/>
+                    <a:lstStyle/>
+                    <a:p>
+                      <a:pPr algn="ctr">
+                        <a:defRPr sz="950"/>
+                      </a:pPr>
+                      <a:r>
+                        <a:t>0.000%</a:t>
+                      </a:r>
+                    </a:p>
+                  </a:txBody>
+                  <a:tcPr>
+                    <a:solidFill>
+                      <a:srgbClr val="FFFFFF"/>
+                    </a:solidFill>
+                  </a:tcPr>
+                </a:tc>
+                <a:tc>
+                  <a:txBody>
+                    <a:bodyPr/>
+                    <a:lstStyle/>
+                    <a:p>
+                      <a:pPr algn="ctr">
+                        <a:defRPr sz="950"/>
+                      </a:pPr>
+                      <a:r>
+                        <a:t>0.000%</a:t>
+                      </a:r>
+                    </a:p>
+                  </a:txBody>
+                  <a:tcPr>
+                    <a:solidFill>
+                      <a:srgbClr val="FFFFFF"/>
+                    </a:solidFill>
+                  </a:tcPr>
+                </a:tc>
+                <a:tc>
+                  <a:txBody>
+                    <a:bodyPr/>
+                    <a:lstStyle/>
+                    <a:p>
+                      <a:pPr algn="ctr">
+                        <a:defRPr sz="950"/>
+                      </a:pPr>
+                      <a:r>
+                        <a:t>0.000%</a:t>
+                      </a:r>
+                    </a:p>
+                  </a:txBody>
+                  <a:tcPr>
+                    <a:solidFill>
+                      <a:srgbClr val="FFFFFF"/>
+                    </a:solidFill>
+                  </a:tcPr>
+                </a:tc>
+                <a:tc>
+                  <a:txBody>
+                    <a:bodyPr/>
+                    <a:lstStyle/>
+                    <a:p>
+                      <a:pPr algn="ctr">
+                        <a:defRPr sz="950" b="1">
+                          <a:solidFill>
+                            <a:srgbClr val="228B22"/>
+                          </a:solidFill>
+                        </a:defRPr>
+                      </a:pPr>
+                      <a:r>
+                        <a:t>PASS (&lt;0.01%)</a:t>
+                      </a:r>
+                    </a:p>
+                  </a:txBody>
+                  <a:tcPr>
+                    <a:solidFill>
+                      <a:srgbClr val="FFFFFF"/>
+                    </a:solidFill>
+                  </a:tcPr>
+                </a:tc>
+              </a:tr>
+              <a:tr h="329184">
+                <a:tc>
+                  <a:txBody>
+                    <a:bodyPr/>
+                    <a:lstStyle/>
+                    <a:p>
+                      <a:pPr algn="ctr">
+                        <a:defRPr sz="950"/>
+                      </a:pPr>
+                      <a:r>
+                        <a:t>Check 4: Çengel Ex 10-7</a:t>
+                      </a:r>
+                    </a:p>
+                  </a:txBody>
+                  <a:tcPr>
+                    <a:solidFill>
+                      <a:srgbClr val="EBF3FA"/>
+                    </a:solidFill>
+                  </a:tcPr>
+                </a:tc>
+                <a:tc>
+                  <a:txBody>
+                    <a:bodyPr/>
+                    <a:lstStyle/>
+                    <a:p>
+                      <a:pPr algn="ctr">
+                        <a:defRPr sz="950"/>
+                      </a:pPr>
+                      <a:r>
+                        <a:t>GT Exhaust T4 (K)</a:t>
+                      </a:r>
+                    </a:p>
+                  </a:txBody>
+                  <a:tcPr>
+                    <a:solidFill>
+                      <a:srgbClr val="EBF3FA"/>
+                    </a:solidFill>
+                  </a:tcPr>
+                </a:tc>
+                <a:tc>
+                  <a:txBody>
+                    <a:bodyPr/>
+                    <a:lstStyle/>
+                    <a:p>
+                      <a:pPr algn="ctr">
+                        <a:defRPr sz="950"/>
+                      </a:pPr>
+                      <a:r>
+                        <a:t>853.00</a:t>
+                      </a:r>
+                    </a:p>
+                  </a:txBody>
+                  <a:tcPr>
+                    <a:solidFill>
+                      <a:srgbClr val="EBF3FA"/>
+                    </a:solidFill>
+                  </a:tcPr>
+                </a:tc>
+                <a:tc>
+                  <a:txBody>
+                    <a:bodyPr/>
+                    <a:lstStyle/>
+                    <a:p>
+                      <a:pPr algn="ctr">
+                        <a:defRPr sz="950"/>
+                      </a:pPr>
+                      <a:r>
+                        <a:t>852.72</a:t>
+                      </a:r>
+                    </a:p>
+                  </a:txBody>
+                  <a:tcPr>
+                    <a:solidFill>
+                      <a:srgbClr val="EBF3FA"/>
+                    </a:solidFill>
+                  </a:tcPr>
+                </a:tc>
+                <a:tc>
+                  <a:txBody>
+                    <a:bodyPr/>
+                    <a:lstStyle/>
+                    <a:p>
+                      <a:pPr algn="ctr">
+                        <a:defRPr sz="950"/>
+                      </a:pPr>
+                      <a:r>
+                        <a:t>0.032%</a:t>
+                      </a:r>
+                    </a:p>
+                  </a:txBody>
+                  <a:tcPr>
+                    <a:solidFill>
+                      <a:srgbClr val="EBF3FA"/>
+                    </a:solidFill>
+                  </a:tcPr>
+                </a:tc>
+                <a:tc>
+                  <a:txBody>
+                    <a:bodyPr/>
+                    <a:lstStyle/>
+                    <a:p>
+                      <a:pPr algn="ctr">
+                        <a:defRPr sz="950" b="1">
+                          <a:solidFill>
+                            <a:srgbClr val="228B22"/>
+                          </a:solidFill>
+                        </a:defRPr>
+                      </a:pPr>
+                      <a:r>
+                        <a:t>PASS (&lt;0.5%)</a:t>
+                      </a:r>
+                    </a:p>
+                  </a:txBody>
+                  <a:tcPr>
+                    <a:solidFill>
+                      <a:srgbClr val="EBF3FA"/>
+                    </a:solidFill>
+                  </a:tcPr>
+                </a:tc>
+              </a:tr>
+              <a:tr h="329184">
+                <a:tc>
+                  <a:txBody>
+                    <a:bodyPr/>
+                    <a:lstStyle/>
+                    <a:p>
+                      <a:pPr algn="ctr">
+                        <a:defRPr sz="950"/>
+                      </a:pPr>
+                      <a:r>
+                        <a:t>Check 4: Çengel Ex 10-7</a:t>
+                      </a:r>
+                    </a:p>
+                  </a:txBody>
+                  <a:tcPr>
+                    <a:solidFill>
+                      <a:srgbClr val="FFFFFF"/>
+                    </a:solidFill>
+                  </a:tcPr>
+                </a:tc>
+                <a:tc>
+                  <a:txBody>
+                    <a:bodyPr/>
+                    <a:lstStyle/>
+                    <a:p>
+                      <a:pPr algn="ctr">
+                        <a:defRPr sz="950"/>
+                      </a:pPr>
+                      <a:r>
+                        <a:t>GT Net Work (kJ/kg)</a:t>
+                      </a:r>
+                    </a:p>
+                  </a:txBody>
+                  <a:tcPr>
+                    <a:solidFill>
+                      <a:srgbClr val="FFFFFF"/>
+                    </a:solidFill>
+                  </a:tcPr>
+                </a:tc>
+                <a:tc>
+                  <a:txBody>
+                    <a:bodyPr/>
+                    <a:lstStyle/>
+                    <a:p>
+                      <a:pPr algn="ctr">
+                        <a:defRPr sz="950"/>
+                      </a:pPr>
+                      <a:r>
+                        <a:t>210.13</a:t>
+                      </a:r>
+                    </a:p>
+                  </a:txBody>
+                  <a:tcPr>
+                    <a:solidFill>
+                      <a:srgbClr val="FFFFFF"/>
+                    </a:solidFill>
+                  </a:tcPr>
+                </a:tc>
+                <a:tc>
+                  <a:txBody>
+                    <a:bodyPr/>
+                    <a:lstStyle/>
+                    <a:p>
+                      <a:pPr algn="ctr">
+                        <a:defRPr sz="950"/>
+                      </a:pPr>
+                      <a:r>
+                        <a:t>210.29</a:t>
+                      </a:r>
+                    </a:p>
+                  </a:txBody>
+                  <a:tcPr>
+                    <a:solidFill>
+                      <a:srgbClr val="FFFFFF"/>
+                    </a:solidFill>
+                  </a:tcPr>
+                </a:tc>
+                <a:tc>
+                  <a:txBody>
+                    <a:bodyPr/>
+                    <a:lstStyle/>
+                    <a:p>
+                      <a:pPr algn="ctr">
+                        <a:defRPr sz="950"/>
+                      </a:pPr>
+                      <a:r>
+                        <a:t>0.077%</a:t>
+                      </a:r>
+                    </a:p>
+                  </a:txBody>
+                  <a:tcPr>
+                    <a:solidFill>
+                      <a:srgbClr val="FFFFFF"/>
+                    </a:solidFill>
+                  </a:tcPr>
+                </a:tc>
+                <a:tc>
+                  <a:txBody>
+                    <a:bodyPr/>
+                    <a:lstStyle/>
+                    <a:p>
+                      <a:pPr algn="ctr">
+                        <a:defRPr sz="950" b="1">
+                          <a:solidFill>
+                            <a:srgbClr val="228B22"/>
+                          </a:solidFill>
+                        </a:defRPr>
+                      </a:pPr>
+                      <a:r>
+                        <a:t>PASS (&lt;0.5%)</a:t>
+                      </a:r>
+                    </a:p>
+                  </a:txBody>
+                  <a:tcPr>
+                    <a:solidFill>
+                      <a:srgbClr val="FFFFFF"/>
+                    </a:solidFill>
+                  </a:tcPr>
+                </a:tc>
+              </a:tr>
+              <a:tr h="329184">
+                <a:tc>
+                  <a:txBody>
+                    <a:bodyPr/>
+                    <a:lstStyle/>
+                    <a:p>
+                      <a:pPr algn="ctr">
+                        <a:defRPr sz="950"/>
+                      </a:pPr>
+                      <a:r>
+                        <a:t>Check 4: Çengel Ex 10-7</a:t>
+                      </a:r>
+                    </a:p>
+                  </a:txBody>
+                  <a:tcPr>
+                    <a:solidFill>
+                      <a:srgbClr val="EBF3FA"/>
+                    </a:solidFill>
+                  </a:tcPr>
+                </a:tc>
+                <a:tc>
+                  <a:txBody>
+                    <a:bodyPr/>
+                    <a:lstStyle/>
+                    <a:p>
+                      <a:pPr algn="ctr">
+                        <a:defRPr sz="950"/>
+                      </a:pPr>
+                      <a:r>
+                        <a:t>ST Steam Net Work (kJ/kg)</a:t>
+                      </a:r>
+                    </a:p>
+                  </a:txBody>
+                  <a:tcPr>
+                    <a:solidFill>
+                      <a:srgbClr val="EBF3FA"/>
+                    </a:solidFill>
+                  </a:tcPr>
+                </a:tc>
+                <a:tc>
+                  <a:txBody>
+                    <a:bodyPr/>
+                    <a:lstStyle/>
+                    <a:p>
+                      <a:pPr algn="ctr">
+                        <a:defRPr sz="950"/>
+                      </a:pPr>
+                      <a:r>
+                        <a:t>976.10</a:t>
+                      </a:r>
+                    </a:p>
+                  </a:txBody>
+                  <a:tcPr>
+                    <a:solidFill>
+                      <a:srgbClr val="EBF3FA"/>
+                    </a:solidFill>
+                  </a:tcPr>
+                </a:tc>
+                <a:tc>
+                  <a:txBody>
+                    <a:bodyPr/>
+                    <a:lstStyle/>
+                    <a:p>
+                      <a:pPr algn="ctr">
+                        <a:defRPr sz="950"/>
+                      </a:pPr>
+                      <a:r>
+                        <a:t>976.16</a:t>
+                      </a:r>
+                    </a:p>
+                  </a:txBody>
+                  <a:tcPr>
+                    <a:solidFill>
+                      <a:srgbClr val="EBF3FA"/>
+                    </a:solidFill>
+                  </a:tcPr>
+                </a:tc>
+                <a:tc>
+                  <a:txBody>
+                    <a:bodyPr/>
+                    <a:lstStyle/>
+                    <a:p>
+                      <a:pPr algn="ctr">
+                        <a:defRPr sz="950"/>
+                      </a:pPr>
+                      <a:r>
+                        <a:t>0.007%</a:t>
+                      </a:r>
+                    </a:p>
+                  </a:txBody>
+                  <a:tcPr>
+                    <a:solidFill>
+                      <a:srgbClr val="EBF3FA"/>
+                    </a:solidFill>
+                  </a:tcPr>
+                </a:tc>
+                <a:tc>
+                  <a:txBody>
+                    <a:bodyPr/>
+                    <a:lstStyle/>
+                    <a:p>
+                      <a:pPr algn="ctr">
+                        <a:defRPr sz="950" b="1">
+                          <a:solidFill>
+                            <a:srgbClr val="228B22"/>
+                          </a:solidFill>
+                        </a:defRPr>
+                      </a:pPr>
+                      <a:r>
+                        <a:t>PASS (&lt;0.5%)</a:t>
+                      </a:r>
+                    </a:p>
+                  </a:txBody>
+                  <a:tcPr>
+                    <a:solidFill>
+                      <a:srgbClr val="EBF3FA"/>
+                    </a:solidFill>
+                  </a:tcPr>
+                </a:tc>
+              </a:tr>
+              <a:tr h="329184">
+                <a:tc>
+                  <a:txBody>
+                    <a:bodyPr/>
+                    <a:lstStyle/>
+                    <a:p>
+                      <a:pPr algn="ctr">
+                        <a:defRPr sz="950"/>
+                      </a:pPr>
+                      <a:r>
+                        <a:t>Check 4: Çengel Ex 10-7</a:t>
+                      </a:r>
+                    </a:p>
+                  </a:txBody>
+                  <a:tcPr>
+                    <a:solidFill>
+                      <a:srgbClr val="FFFFFF"/>
+                    </a:solidFill>
+                  </a:tcPr>
+                </a:tc>
+                <a:tc>
+                  <a:txBody>
+                    <a:bodyPr/>
+                    <a:lstStyle/>
+                    <a:p>
+                      <a:pPr algn="ctr">
+                        <a:defRPr sz="950"/>
+                      </a:pPr>
+                      <a:r>
+                        <a:t>CC Efficiency ηcc (%)</a:t>
+                      </a:r>
+                    </a:p>
+                  </a:txBody>
+                  <a:tcPr>
+                    <a:solidFill>
+                      <a:srgbClr val="FFFFFF"/>
+                    </a:solidFill>
+                  </a:tcPr>
+                </a:tc>
+                <a:tc>
+                  <a:txBody>
+                    <a:bodyPr/>
+                    <a:lstStyle/>
+                    <a:p>
+                      <a:pPr algn="ctr">
+                        <a:defRPr sz="950"/>
+                      </a:pPr>
+                      <a:r>
+                        <a:t>43.30%</a:t>
+                      </a:r>
+                    </a:p>
+                  </a:txBody>
+                  <a:tcPr>
+                    <a:solidFill>
+                      <a:srgbClr val="FFFFFF"/>
+                    </a:solidFill>
+                  </a:tcPr>
+                </a:tc>
+                <a:tc>
+                  <a:txBody>
+                    <a:bodyPr/>
+                    <a:lstStyle/>
+                    <a:p>
+                      <a:pPr algn="ctr">
+                        <a:defRPr sz="950"/>
+                      </a:pPr>
+                      <a:r>
+                        <a:t>43.34%</a:t>
+                      </a:r>
+                    </a:p>
+                  </a:txBody>
+                  <a:tcPr>
+                    <a:solidFill>
+                      <a:srgbClr val="FFFFFF"/>
+                    </a:solidFill>
+                  </a:tcPr>
+                </a:tc>
+                <a:tc>
+                  <a:txBody>
+                    <a:bodyPr/>
+                    <a:lstStyle/>
+                    <a:p>
+                      <a:pPr algn="ctr">
+                        <a:defRPr sz="950"/>
+                      </a:pPr>
+                      <a:r>
+                        <a:t>0.082%</a:t>
+                      </a:r>
+                    </a:p>
+                  </a:txBody>
+                  <a:tcPr>
+                    <a:solidFill>
+                      <a:srgbClr val="FFFFFF"/>
+                    </a:solidFill>
+                  </a:tcPr>
+                </a:tc>
+                <a:tc>
+                  <a:txBody>
+                    <a:bodyPr/>
+                    <a:lstStyle/>
+                    <a:p>
+                      <a:pPr algn="ctr">
+                        <a:defRPr sz="950" b="1">
+                          <a:solidFill>
+                            <a:srgbClr val="228B22"/>
+                          </a:solidFill>
+                        </a:defRPr>
+                      </a:pPr>
+                      <a:r>
+                        <a:t>PASS (&lt;0.5%)</a:t>
+                      </a:r>
+                    </a:p>
+                  </a:txBody>
+                  <a:tcPr>
+                    <a:solidFill>
+                      <a:srgbClr val="FFFFFF"/>
+                    </a:solidFill>
+                  </a:tcPr>
+                </a:tc>
+              </a:tr>
+            </a:tbl>
+          </a:graphicData>
+        </a:graphic>
+      </p:graphicFrame>
+    </p:spTree>
+  </p:cSld>
+  <p:clrMapOvr>
+    <a:masterClrMapping/>
+  </p:clrMapOvr>
+</p:sld>
+</file>
+
+<file path=ppt/slides/slide6.xml><?xml version="1.0" encoding="utf-8"?>
+<p:sld xmlns:a="http://schemas.openxmlformats.org/drawingml/2006/main" xmlns:p="http://schemas.openxmlformats.org/presentationml/2006/main" xmlns:r="http://schemas.openxmlformats.org/officeDocument/2006/relationships">
+  <p:cSld>
+    <p:spTree>
+      <p:nvGrpSpPr>
+        <p:cNvPr id="1" name=""/>
+        <p:cNvGrpSpPr/>
+        <p:nvPr/>
+      </p:nvGrpSpPr>
+      <p:grpSpPr/>
+      <p:sp>
+        <p:nvSpPr>
+          <p:cNvPr id="2" name="TextBox 1"/>
+          <p:cNvSpPr txBox="1"/>
+          <p:nvPr/>
+        </p:nvSpPr>
+        <p:spPr>
+          <a:xfrm>
+            <a:off x="731520" y="365760"/>
+            <a:ext cx="10698480" cy="1005840"/>
+          </a:xfrm>
+          <a:prstGeom prst="rect">
+            <a:avLst/>
+          </a:prstGeom>
+          <a:noFill/>
+        </p:spPr>
+        <p:txBody>
+          <a:bodyPr wrap="square">
+            <a:spAutoFit/>
+          </a:bodyPr>
+          <a:lstStyle/>
+          <a:p>
+            <a:pPr>
+              <a:defRPr sz="1100" b="1">
+                <a:solidFill>
+                  <a:srgbClr val="3565A9"/>
+                </a:solidFill>
+              </a:defRPr>
+            </a:pPr>
+            <a:r>
               <a:t>3. ANALYSIS: SURROGATES</a:t>
             </a:r>
           </a:p>
           <a:p>
             <a:pPr>
-              <a:defRPr sz="2200" b="1">
+              <a:defRPr sz="2100" b="1">
                 <a:solidFill>
                   <a:srgbClr val="102C57"/>
                 </a:solidFill>
@@ -6220,7 +6843,7 @@
         <p:spPr>
           <a:xfrm>
             <a:off x="7589520" y="1463040"/>
-            <a:ext cx="3840480" cy="4846320"/>
+            <a:ext cx="3840480" cy="4937760"/>
           </a:xfrm>
           <a:prstGeom prst="roundRect">
             <a:avLst/>
@@ -6265,7 +6888,7 @@
         <p:spPr>
           <a:xfrm>
             <a:off x="7772400" y="1600200"/>
-            <a:ext cx="3474720" cy="4572000"/>
+            <a:ext cx="3474720" cy="4663440"/>
           </a:xfrm>
           <a:prstGeom prst="rect">
             <a:avLst/>
@@ -6280,9 +6903,9 @@
           <a:p>
             <a:pPr>
               <a:spcAft>
-                <a:spcPts val="800"/>
-              </a:spcAft>
-              <a:defRPr sz="1400" b="1">
+                <a:spcPts val="600"/>
+              </a:spcAft>
+              <a:defRPr sz="1300" b="1">
                 <a:solidFill>
                   <a:srgbClr val="102C57"/>
                 </a:solidFill>
@@ -6295,54 +6918,54 @@
           <a:p>
             <a:pPr>
               <a:spcAft>
-                <a:spcPts val="400"/>
-              </a:spcAft>
-              <a:defRPr sz="1100">
-                <a:solidFill>
-                  <a:srgbClr val="282828"/>
-                </a:solidFill>
-              </a:defRPr>
-            </a:pPr>
-            <a:r>
-              <a:t>• Model Comparison:</a:t>
-            </a:r>
-          </a:p>
-          <a:p>
-            <a:pPr>
-              <a:spcAft>
-                <a:spcPts val="400"/>
-              </a:spcAft>
-              <a:defRPr sz="1100">
-                <a:solidFill>
-                  <a:srgbClr val="282828"/>
-                </a:solidFill>
-              </a:defRPr>
-            </a:pPr>
-            <a:r>
-              <a:t>• • Full Quadratic RSM: R² = 0.9965, RMSE = 0.133 pp. Outstanding generalization on continuous thermodynamics.</a:t>
-            </a:r>
-          </a:p>
-          <a:p>
-            <a:pPr>
-              <a:spcAft>
-                <a:spcPts val="400"/>
-              </a:spcAft>
-              <a:defRPr sz="1100">
-                <a:solidFill>
-                  <a:srgbClr val="282828"/>
-                </a:solidFill>
-              </a:defRPr>
-            </a:pPr>
-            <a:r>
-              <a:t>• • Multilayer Perceptron ANN: R² = 0.9799, RMSE = 0.318 pp.</a:t>
-            </a:r>
-          </a:p>
-          <a:p>
-            <a:pPr>
-              <a:spcAft>
-                <a:spcPts val="400"/>
-              </a:spcAft>
-              <a:defRPr sz="1100">
+                <a:spcPts val="300"/>
+              </a:spcAft>
+              <a:defRPr sz="1000">
+                <a:solidFill>
+                  <a:srgbClr val="282828"/>
+                </a:solidFill>
+              </a:defRPr>
+            </a:pPr>
+            <a:r>
+              <a:t>• Held-Out Test Set Performance:</a:t>
+            </a:r>
+          </a:p>
+          <a:p>
+            <a:pPr>
+              <a:spcAft>
+                <a:spcPts val="300"/>
+              </a:spcAft>
+              <a:defRPr sz="1000">
+                <a:solidFill>
+                  <a:srgbClr val="282828"/>
+                </a:solidFill>
+              </a:defRPr>
+            </a:pPr>
+            <a:r>
+              <a:t>• • Full Quadratic RSM: R² = 0.9981, RMSE = 0.100 pp. Outstanding predictive power across continuous regions.</a:t>
+            </a:r>
+          </a:p>
+          <a:p>
+            <a:pPr>
+              <a:spcAft>
+                <a:spcPts val="300"/>
+              </a:spcAft>
+              <a:defRPr sz="1000">
+                <a:solidFill>
+                  <a:srgbClr val="282828"/>
+                </a:solidFill>
+              </a:defRPr>
+            </a:pPr>
+            <a:r>
+              <a:t>• • Tuned MLP ANN: R² = 0.9835, RMSE = 0.296 pp (5-fold CV: relu, alpha=1e-3, (30, 20) hidden units).</a:t>
+            </a:r>
+          </a:p>
+          <a:p>
+            <a:pPr>
+              <a:spcAft>
+                <a:spcPts val="300"/>
+              </a:spcAft>
+              <a:defRPr sz="1000">
                 <a:solidFill>
                   <a:srgbClr val="282828"/>
                 </a:solidFill>
@@ -6355,54 +6978,54 @@
           <a:p>
             <a:pPr>
               <a:spcAft>
-                <a:spcPts val="400"/>
-              </a:spcAft>
-              <a:defRPr sz="1100">
-                <a:solidFill>
-                  <a:srgbClr val="282828"/>
-                </a:solidFill>
-              </a:defRPr>
-            </a:pPr>
-            <a:r>
-              <a:t>• • TIT and Compression Ratio (rp) explain &gt;78% of total variance in thermal efficiency.</a:t>
-            </a:r>
-          </a:p>
-          <a:p>
-            <a:pPr>
-              <a:spcAft>
-                <a:spcPts val="400"/>
-              </a:spcAft>
-              <a:defRPr sz="1100">
-                <a:solidFill>
-                  <a:srgbClr val="282828"/>
-                </a:solidFill>
-              </a:defRPr>
-            </a:pPr>
-            <a:r>
-              <a:t>• • Interaction term (rp * TIT) is strongly statistically significant (p &lt; 0.001).</a:t>
-            </a:r>
-          </a:p>
-          <a:p>
-            <a:pPr>
-              <a:spcAft>
-                <a:spcPts val="400"/>
-              </a:spcAft>
-              <a:defRPr sz="1100">
-                <a:solidFill>
-                  <a:srgbClr val="282828"/>
-                </a:solidFill>
-              </a:defRPr>
-            </a:pPr>
-            <a:r>
-              <a:t>• • Steam drum pressure Ps exhibits positive curvature (I(Ps²)) with diminishing returns above 45 bar.</a:t>
-            </a:r>
-          </a:p>
-          <a:p>
-            <a:pPr>
-              <a:spcAft>
-                <a:spcPts val="400"/>
-              </a:spcAft>
-              <a:defRPr sz="1100">
+                <a:spcPts val="300"/>
+              </a:spcAft>
+              <a:defRPr sz="1000">
+                <a:solidFill>
+                  <a:srgbClr val="282828"/>
+                </a:solidFill>
+              </a:defRPr>
+            </a:pPr>
+            <a:r>
+              <a:t>• • TIT and compression ratio (rp) explain &gt;78% of total variance in thermal efficiency.</a:t>
+            </a:r>
+          </a:p>
+          <a:p>
+            <a:pPr>
+              <a:spcAft>
+                <a:spcPts val="300"/>
+              </a:spcAft>
+              <a:defRPr sz="1000">
+                <a:solidFill>
+                  <a:srgbClr val="282828"/>
+                </a:solidFill>
+              </a:defRPr>
+            </a:pPr>
+            <a:r>
+              <a:t>• • Interaction term (rp : TIT) is highly significant (F = 442.0, p = 1.5e-42).</a:t>
+            </a:r>
+          </a:p>
+          <a:p>
+            <a:pPr>
+              <a:spcAft>
+                <a:spcPts val="300"/>
+              </a:spcAft>
+              <a:defRPr sz="1000">
+                <a:solidFill>
+                  <a:srgbClr val="282828"/>
+                </a:solidFill>
+              </a:defRPr>
+            </a:pPr>
+            <a:r>
+              <a:t>• • Steam drum pressure Ps exhibits positive curvature (I(Ps²), F = 68.8, p = 1.6e-13).</a:t>
+            </a:r>
+          </a:p>
+          <a:p>
+            <a:pPr>
+              <a:spcAft>
+                <a:spcPts val="300"/>
+              </a:spcAft>
+              <a:defRPr sz="1000">
                 <a:solidFill>
                   <a:srgbClr val="282828"/>
                 </a:solidFill>
@@ -6415,31 +7038,31 @@
           <a:p>
             <a:pPr>
               <a:spcAft>
-                <a:spcPts val="400"/>
-              </a:spcAft>
-              <a:defRPr sz="1100">
-                <a:solidFill>
-                  <a:srgbClr val="282828"/>
-                </a:solidFill>
-              </a:defRPr>
-            </a:pPr>
-            <a:r>
-              <a:t>• • Quadratic RSM exhibits mild bias near active pinch boundaries (economizer inlet) due to slope discontinuity in pinch transitions.</a:t>
-            </a:r>
-          </a:p>
-          <a:p>
-            <a:pPr>
-              <a:spcAft>
-                <a:spcPts val="400"/>
-              </a:spcAft>
-              <a:defRPr sz="1100">
-                <a:solidFill>
-                  <a:srgbClr val="282828"/>
-                </a:solidFill>
-              </a:defRPr>
-            </a:pPr>
-            <a:r>
-              <a:t>• • Adaptive refinement resolves this by localized sampling.</a:t>
+                <a:spcPts val="300"/>
+              </a:spcAft>
+              <a:defRPr sz="1000">
+                <a:solidFill>
+                  <a:srgbClr val="282828"/>
+                </a:solidFill>
+              </a:defRPr>
+            </a:pPr>
+            <a:r>
+              <a:t>• • Surrogates smooth out boundary transitions near pinch approach limits (Ts &lt;= T4 - 5 K).</a:t>
+            </a:r>
+          </a:p>
+          <a:p>
+            <a:pPr>
+              <a:spcAft>
+                <a:spcPts val="300"/>
+              </a:spcAft>
+              <a:defRPr sz="1000">
+                <a:solidFill>
+                  <a:srgbClr val="282828"/>
+                </a:solidFill>
+              </a:defRPr>
+            </a:pPr>
+            <a:r>
+              <a:t>• • Adaptive refinement resolves this localized boundary bias.</a:t>
             </a:r>
           </a:p>
         </p:txBody>
@@ -6452,7 +7075,7 @@
 </p:sld>
 </file>
 
-<file path=ppt/slides/slide6.xml><?xml version="1.0" encoding="utf-8"?>
+<file path=ppt/slides/slide7.xml><?xml version="1.0" encoding="utf-8"?>
 <p:sld xmlns:a="http://schemas.openxmlformats.org/drawingml/2006/main" xmlns:p="http://schemas.openxmlformats.org/presentationml/2006/main" xmlns:r="http://schemas.openxmlformats.org/officeDocument/2006/relationships">
   <p:cSld>
     <p:spTree>
@@ -6497,14 +7120,14 @@
           </a:p>
           <a:p>
             <a:pPr>
-              <a:defRPr sz="2200" b="1">
+              <a:defRPr sz="2100" b="1">
                 <a:solidFill>
                   <a:srgbClr val="102C57"/>
                 </a:solidFill>
               </a:defRPr>
             </a:pPr>
             <a:r>
-              <a:t>Section 3: Optimal Operating Point &amp; HRSG Heat Exchange (T-Q Diagram)</a:t>
+              <a:t>Section 3: Optimal Operating Point, T-Q &amp; T-s Thermodynamic Diagrams</a:t>
             </a:r>
           </a:p>
         </p:txBody>
@@ -6526,7 +7149,7 @@
         <p:spPr>
           <a:xfrm>
             <a:off x="731520" y="1463040"/>
-            <a:ext cx="6217920" cy="4145280"/>
+            <a:ext cx="6217920" cy="2487168"/>
           </a:xfrm>
           <a:prstGeom prst="rect">
             <a:avLst/>
@@ -6542,7 +7165,7 @@
         <p:spPr>
           <a:xfrm>
             <a:off x="7223760" y="1463040"/>
-            <a:ext cx="4206240" cy="4846320"/>
+            <a:ext cx="4206240" cy="4937760"/>
           </a:xfrm>
           <a:prstGeom prst="roundRect">
             <a:avLst/>
@@ -6587,7 +7210,7 @@
         <p:spPr>
           <a:xfrm>
             <a:off x="7406640" y="1600200"/>
-            <a:ext cx="3840480" cy="4572000"/>
+            <a:ext cx="3840480" cy="4663440"/>
           </a:xfrm>
           <a:prstGeom prst="rect">
             <a:avLst/>
@@ -6602,24 +7225,24 @@
           <a:p>
             <a:pPr>
               <a:spcAft>
-                <a:spcPts val="800"/>
-              </a:spcAft>
-              <a:defRPr sz="1400" b="1">
+                <a:spcPts val="600"/>
+              </a:spcAft>
+              <a:defRPr sz="1300" b="1">
                 <a:solidFill>
                   <a:srgbClr val="102C57"/>
                 </a:solidFill>
               </a:defRPr>
             </a:pPr>
             <a:r>
-              <a:t>Optimal Operating Point Metrics</a:t>
-            </a:r>
-          </a:p>
-          <a:p>
-            <a:pPr>
-              <a:spcAft>
-                <a:spcPts val="400"/>
-              </a:spcAft>
-              <a:defRPr sz="1100">
+              <a:t>Verified Optimal Performance</a:t>
+            </a:r>
+          </a:p>
+          <a:p>
+            <a:pPr>
+              <a:spcAft>
+                <a:spcPts val="300"/>
+              </a:spcAft>
+              <a:defRPr sz="1000">
                 <a:solidFill>
                   <a:srgbClr val="282828"/>
                 </a:solidFill>
@@ -6632,24 +7255,24 @@
           <a:p>
             <a:pPr>
               <a:spcAft>
-                <a:spcPts val="400"/>
-              </a:spcAft>
-              <a:defRPr sz="1100">
-                <a:solidFill>
-                  <a:srgbClr val="282828"/>
-                </a:solidFill>
-              </a:defRPr>
-            </a:pPr>
-            <a:r>
-              <a:t>• • Compression ratio rp = 21.68</a:t>
-            </a:r>
-          </a:p>
-          <a:p>
-            <a:pPr>
-              <a:spcAft>
-                <a:spcPts val="400"/>
-              </a:spcAft>
-              <a:defRPr sz="1100">
+                <a:spcPts val="300"/>
+              </a:spcAft>
+              <a:defRPr sz="1000">
+                <a:solidFill>
+                  <a:srgbClr val="282828"/>
+                </a:solidFill>
+              </a:defRPr>
+            </a:pPr>
+            <a:r>
+              <a:t>• • Compression ratio rp = 19.88</a:t>
+            </a:r>
+          </a:p>
+          <a:p>
+            <a:pPr>
+              <a:spcAft>
+                <a:spcPts val="300"/>
+              </a:spcAft>
+              <a:defRPr sz="1000">
                 <a:solidFill>
                   <a:srgbClr val="282828"/>
                 </a:solidFill>
@@ -6662,241 +7285,241 @@
           <a:p>
             <a:pPr>
               <a:spcAft>
-                <a:spcPts val="400"/>
-              </a:spcAft>
-              <a:defRPr sz="1100">
-                <a:solidFill>
-                  <a:srgbClr val="282828"/>
-                </a:solidFill>
-              </a:defRPr>
-            </a:pPr>
-            <a:r>
-              <a:t>• • Steam drum pressure Ps = 46.48 bar</a:t>
-            </a:r>
-          </a:p>
-          <a:p>
-            <a:pPr>
-              <a:spcAft>
-                <a:spcPts val="400"/>
-              </a:spcAft>
-              <a:defRPr sz="1100">
-                <a:solidFill>
-                  <a:srgbClr val="282828"/>
-                </a:solidFill>
-              </a:defRPr>
-            </a:pPr>
-            <a:r>
-              <a:t>• • Superheat outlet temp Ts = 539.4 °C (812.6 K)</a:t>
-            </a:r>
-          </a:p>
-          <a:p>
-            <a:pPr>
-              <a:spcAft>
-                <a:spcPts val="400"/>
-              </a:spcAft>
-              <a:defRPr sz="1100">
-                <a:solidFill>
-                  <a:srgbClr val="282828"/>
-                </a:solidFill>
-              </a:defRPr>
-            </a:pPr>
-            <a:r>
-              <a:t>• • Condenser pressure Pcond = 0.0500 bar</a:t>
-            </a:r>
-          </a:p>
-          <a:p>
-            <a:pPr>
-              <a:spcAft>
-                <a:spcPts val="400"/>
-              </a:spcAft>
-              <a:defRPr sz="1100">
-                <a:solidFill>
-                  <a:srgbClr val="282828"/>
-                </a:solidFill>
-              </a:defRPr>
-            </a:pPr>
-            <a:r>
-              <a:t>• Performance Metrics:</a:t>
-            </a:r>
-          </a:p>
-          <a:p>
-            <a:pPr>
-              <a:spcAft>
-                <a:spcPts val="400"/>
-              </a:spcAft>
-              <a:defRPr sz="1100">
-                <a:solidFill>
-                  <a:srgbClr val="282828"/>
-                </a:solidFill>
-              </a:defRPr>
-            </a:pPr>
-            <a:r>
-              <a:t>• • Combined cycle efficiency ηcc = 53.33%</a:t>
-            </a:r>
-          </a:p>
-          <a:p>
-            <a:pPr>
-              <a:spcAft>
-                <a:spcPts val="400"/>
-              </a:spcAft>
-              <a:defRPr sz="1100">
-                <a:solidFill>
-                  <a:srgbClr val="282828"/>
-                </a:solidFill>
-              </a:defRPr>
-            </a:pPr>
-            <a:r>
-              <a:t>• • Total net power Wnet = 55.30 MW</a:t>
-            </a:r>
-          </a:p>
-          <a:p>
-            <a:pPr>
-              <a:spcAft>
-                <a:spcPts val="400"/>
-              </a:spcAft>
-              <a:defRPr sz="1100">
-                <a:solidFill>
-                  <a:srgbClr val="282828"/>
-                </a:solidFill>
-              </a:defRPr>
-            </a:pPr>
-            <a:r>
-              <a:t>• • Gas turbine power = 39.06 MW</a:t>
-            </a:r>
-          </a:p>
-          <a:p>
-            <a:pPr>
-              <a:spcAft>
-                <a:spcPts val="400"/>
-              </a:spcAft>
-              <a:defRPr sz="1100">
-                <a:solidFill>
-                  <a:srgbClr val="282828"/>
-                </a:solidFill>
-              </a:defRPr>
-            </a:pPr>
-            <a:r>
-              <a:t>• • Steam turbine power = 16.25 MW</a:t>
-            </a:r>
-          </a:p>
-          <a:p>
-            <a:pPr>
-              <a:spcAft>
-                <a:spcPts val="400"/>
-              </a:spcAft>
-              <a:defRPr sz="1100">
-                <a:solidFill>
-                  <a:srgbClr val="282828"/>
-                </a:solidFill>
-              </a:defRPr>
-            </a:pPr>
-            <a:r>
-              <a:t>• • Specific work = 553.03 kJ/kg air</a:t>
-            </a:r>
-          </a:p>
-          <a:p>
-            <a:pPr>
-              <a:spcAft>
-                <a:spcPts val="400"/>
-              </a:spcAft>
-              <a:defRPr sz="1100">
-                <a:solidFill>
-                  <a:srgbClr val="282828"/>
-                </a:solidFill>
-              </a:defRPr>
-            </a:pPr>
-            <a:r>
-              <a:t>• • Bottoming-to-topping work ratio = 0.4160</a:t>
-            </a:r>
-          </a:p>
-          <a:p>
-            <a:pPr>
-              <a:spcAft>
-                <a:spcPts val="400"/>
-              </a:spcAft>
-              <a:defRPr sz="1100">
-                <a:solidFill>
-                  <a:srgbClr val="282828"/>
-                </a:solidFill>
-              </a:defRPr>
-            </a:pPr>
-            <a:r>
-              <a:t>• • HRSG effectiveness = 78.50%</a:t>
-            </a:r>
-          </a:p>
-          <a:p>
-            <a:pPr>
-              <a:spcAft>
-                <a:spcPts val="400"/>
-              </a:spcAft>
-              <a:defRPr sz="1100">
-                <a:solidFill>
-                  <a:srgbClr val="282828"/>
-                </a:solidFill>
-              </a:defRPr>
-            </a:pPr>
-            <a:r>
-              <a:t>• Feasibility &amp; Constraint Margins:</a:t>
-            </a:r>
-          </a:p>
-          <a:p>
-            <a:pPr>
-              <a:spcAft>
-                <a:spcPts val="400"/>
-              </a:spcAft>
-              <a:defRPr sz="1100">
-                <a:solidFill>
-                  <a:srgbClr val="282828"/>
-                </a:solidFill>
-              </a:defRPr>
-            </a:pPr>
-            <a:r>
-              <a:t>• • Gas entering HRSG T4 = 556.8 °C (&lt; 650 °C limit, margin +93.2 K)</a:t>
-            </a:r>
-          </a:p>
-          <a:p>
-            <a:pPr>
-              <a:spcAft>
-                <a:spcPts val="400"/>
-              </a:spcAft>
-              <a:defRPr sz="1100">
-                <a:solidFill>
-                  <a:srgbClr val="282828"/>
-                </a:solidFill>
-              </a:defRPr>
-            </a:pPr>
-            <a:r>
-              <a:t>• • Stack gas temp = 145.0 °C (&gt;= 100 °C dew point limit)</a:t>
-            </a:r>
-          </a:p>
-          <a:p>
-            <a:pPr>
-              <a:spcAft>
-                <a:spcPts val="400"/>
-              </a:spcAft>
-              <a:defRPr sz="1100">
-                <a:solidFill>
-                  <a:srgbClr val="282828"/>
-                </a:solidFill>
-              </a:defRPr>
-            </a:pPr>
-            <a:r>
-              <a:t>• • Steam quality x6 = 0.9244 (&gt;= 0.88 erosion limit)</a:t>
-            </a:r>
-          </a:p>
-          <a:p>
-            <a:pPr>
-              <a:spcAft>
-                <a:spcPts val="400"/>
-              </a:spcAft>
-              <a:defRPr sz="1100">
-                <a:solidFill>
-                  <a:srgbClr val="282828"/>
-                </a:solidFill>
-              </a:defRPr>
-            </a:pPr>
-            <a:r>
-              <a:t>• • Equivalence ratio phi = 0.3552 (&lt; 0.50 NOx limit)</a:t>
+                <a:spcPts val="300"/>
+              </a:spcAft>
+              <a:defRPr sz="1000">
+                <a:solidFill>
+                  <a:srgbClr val="282828"/>
+                </a:solidFill>
+              </a:defRPr>
+            </a:pPr>
+            <a:r>
+              <a:t>• • Steam drum pressure Ps = 42.09 bar</a:t>
+            </a:r>
+          </a:p>
+          <a:p>
+            <a:pPr>
+              <a:spcAft>
+                <a:spcPts val="300"/>
+              </a:spcAft>
+              <a:defRPr sz="1000">
+                <a:solidFill>
+                  <a:srgbClr val="282828"/>
+                </a:solidFill>
+              </a:defRPr>
+            </a:pPr>
+            <a:r>
+              <a:t>• • Superheat outlet temp Ts = 548.4 °C (821.5 K)</a:t>
+            </a:r>
+          </a:p>
+          <a:p>
+            <a:pPr>
+              <a:spcAft>
+                <a:spcPts val="300"/>
+              </a:spcAft>
+              <a:defRPr sz="1000">
+                <a:solidFill>
+                  <a:srgbClr val="282828"/>
+                </a:solidFill>
+              </a:defRPr>
+            </a:pPr>
+            <a:r>
+              <a:t>• • Condenser back-pressure Pcond = 0.0500 bar</a:t>
+            </a:r>
+          </a:p>
+          <a:p>
+            <a:pPr>
+              <a:spcAft>
+                <a:spcPts val="300"/>
+              </a:spcAft>
+              <a:defRPr sz="1000">
+                <a:solidFill>
+                  <a:srgbClr val="282828"/>
+                </a:solidFill>
+              </a:defRPr>
+            </a:pPr>
+            <a:r>
+              <a:t>• Key Performance Metrics:</a:t>
+            </a:r>
+          </a:p>
+          <a:p>
+            <a:pPr>
+              <a:spcAft>
+                <a:spcPts val="300"/>
+              </a:spcAft>
+              <a:defRPr sz="1000">
+                <a:solidFill>
+                  <a:srgbClr val="282828"/>
+                </a:solidFill>
+              </a:defRPr>
+            </a:pPr>
+            <a:r>
+              <a:t>• • Combined cycle efficiency ηcc = 53.40%</a:t>
+            </a:r>
+          </a:p>
+          <a:p>
+            <a:pPr>
+              <a:spcAft>
+                <a:spcPts val="300"/>
+              </a:spcAft>
+              <a:defRPr sz="1000">
+                <a:solidFill>
+                  <a:srgbClr val="282828"/>
+                </a:solidFill>
+              </a:defRPr>
+            </a:pPr>
+            <a:r>
+              <a:t>• • Total plant net power Wnet = 55.43 MW</a:t>
+            </a:r>
+          </a:p>
+          <a:p>
+            <a:pPr>
+              <a:spcAft>
+                <a:spcPts val="300"/>
+              </a:spcAft>
+              <a:defRPr sz="1000">
+                <a:solidFill>
+                  <a:srgbClr val="282828"/>
+                </a:solidFill>
+              </a:defRPr>
+            </a:pPr>
+            <a:r>
+              <a:t>• • Gas turbine power = 38.82 MW</a:t>
+            </a:r>
+          </a:p>
+          <a:p>
+            <a:pPr>
+              <a:spcAft>
+                <a:spcPts val="300"/>
+              </a:spcAft>
+              <a:defRPr sz="1000">
+                <a:solidFill>
+                  <a:srgbClr val="282828"/>
+                </a:solidFill>
+              </a:defRPr>
+            </a:pPr>
+            <a:r>
+              <a:t>• • Steam turbine power = 16.61 MW</a:t>
+            </a:r>
+          </a:p>
+          <a:p>
+            <a:pPr>
+              <a:spcAft>
+                <a:spcPts val="300"/>
+              </a:spcAft>
+              <a:defRPr sz="1000">
+                <a:solidFill>
+                  <a:srgbClr val="282828"/>
+                </a:solidFill>
+              </a:defRPr>
+            </a:pPr>
+            <a:r>
+              <a:t>• • Specific work = 554.3 kJ/kg air</a:t>
+            </a:r>
+          </a:p>
+          <a:p>
+            <a:pPr>
+              <a:spcAft>
+                <a:spcPts val="300"/>
+              </a:spcAft>
+              <a:defRPr sz="1000">
+                <a:solidFill>
+                  <a:srgbClr val="282828"/>
+                </a:solidFill>
+              </a:defRPr>
+            </a:pPr>
+            <a:r>
+              <a:t>• • Bottoming-to-topping work ratio = 0.4279</a:t>
+            </a:r>
+          </a:p>
+          <a:p>
+            <a:pPr>
+              <a:spcAft>
+                <a:spcPts val="300"/>
+              </a:spcAft>
+              <a:defRPr sz="1000">
+                <a:solidFill>
+                  <a:srgbClr val="282828"/>
+                </a:solidFill>
+              </a:defRPr>
+            </a:pPr>
+            <a:r>
+              <a:t>• • HRSG thermal effectiveness = 78.4%</a:t>
+            </a:r>
+          </a:p>
+          <a:p>
+            <a:pPr>
+              <a:spcAft>
+                <a:spcPts val="300"/>
+              </a:spcAft>
+              <a:defRPr sz="1000">
+                <a:solidFill>
+                  <a:srgbClr val="282828"/>
+                </a:solidFill>
+              </a:defRPr>
+            </a:pPr>
+            <a:r>
+              <a:t>• Feasibility &amp; Active Margins:</a:t>
+            </a:r>
+          </a:p>
+          <a:p>
+            <a:pPr>
+              <a:spcAft>
+                <a:spcPts val="300"/>
+              </a:spcAft>
+              <a:defRPr sz="1000">
+                <a:solidFill>
+                  <a:srgbClr val="282828"/>
+                </a:solidFill>
+              </a:defRPr>
+            </a:pPr>
+            <a:r>
+              <a:t>• • Gas entering HRSG T4 = 553.7 °C (&lt; 650 °C limit)</a:t>
+            </a:r>
+          </a:p>
+          <a:p>
+            <a:pPr>
+              <a:spcAft>
+                <a:spcPts val="300"/>
+              </a:spcAft>
+              <a:defRPr sz="1000">
+                <a:solidFill>
+                  <a:srgbClr val="282828"/>
+                </a:solidFill>
+              </a:defRPr>
+            </a:pPr>
+            <a:r>
+              <a:t>• • Superheater approach ΔTapp = 5.0 K (active)</a:t>
+            </a:r>
+          </a:p>
+          <a:p>
+            <a:pPr>
+              <a:spcAft>
+                <a:spcPts val="300"/>
+              </a:spcAft>
+              <a:defRPr sz="1000">
+                <a:solidFill>
+                  <a:srgbClr val="282828"/>
+                </a:solidFill>
+              </a:defRPr>
+            </a:pPr>
+            <a:r>
+              <a:t>• • Steam exit quality x6 = 0.934 (&gt;= 0.88 limit)</a:t>
+            </a:r>
+          </a:p>
+          <a:p>
+            <a:pPr>
+              <a:spcAft>
+                <a:spcPts val="300"/>
+              </a:spcAft>
+              <a:defRPr sz="1000">
+                <a:solidFill>
+                  <a:srgbClr val="282828"/>
+                </a:solidFill>
+              </a:defRPr>
+            </a:pPr>
+            <a:r>
+              <a:t>• • Adaptive refinement gap: 0.019 pp (PASSED).</a:t>
             </a:r>
           </a:p>
         </p:txBody>
@@ -6909,7 +7532,7 @@
 </p:sld>
 </file>
 
-<file path=ppt/slides/slide7.xml><?xml version="1.0" encoding="utf-8"?>
+<file path=ppt/slides/slide8.xml><?xml version="1.0" encoding="utf-8"?>
 <p:sld xmlns:a="http://schemas.openxmlformats.org/drawingml/2006/main" xmlns:p="http://schemas.openxmlformats.org/presentationml/2006/main" xmlns:r="http://schemas.openxmlformats.org/officeDocument/2006/relationships">
   <p:cSld>
     <p:spTree>
@@ -6954,7 +7577,7 @@
           </a:p>
           <a:p>
             <a:pPr>
-              <a:defRPr sz="2200" b="1">
+              <a:defRPr sz="2100" b="1">
                 <a:solidFill>
                   <a:srgbClr val="102C57"/>
                 </a:solidFill>
@@ -6983,7 +7606,7 @@
         <p:spPr>
           <a:xfrm>
             <a:off x="731520" y="1463040"/>
-            <a:ext cx="5943600" cy="3714750"/>
+            <a:ext cx="6035040" cy="3692024"/>
           </a:xfrm>
           <a:prstGeom prst="rect">
             <a:avLst/>
@@ -6998,8 +7621,8 @@
         </p:nvSpPr>
         <p:spPr>
           <a:xfrm>
-            <a:off x="6949440" y="1463040"/>
-            <a:ext cx="4480560" cy="4846320"/>
+            <a:off x="7040880" y="1463040"/>
+            <a:ext cx="4389120" cy="4937760"/>
           </a:xfrm>
           <a:prstGeom prst="roundRect">
             <a:avLst/>
@@ -7043,8 +7666,8 @@
         </p:nvSpPr>
         <p:spPr>
           <a:xfrm>
-            <a:off x="7132320" y="1600200"/>
-            <a:ext cx="4114800" cy="4572000"/>
+            <a:off x="7223760" y="1600200"/>
+            <a:ext cx="4023360" cy="4663440"/>
           </a:xfrm>
           <a:prstGeom prst="rect">
             <a:avLst/>
@@ -7059,9 +7682,9 @@
           <a:p>
             <a:pPr>
               <a:spcAft>
-                <a:spcPts val="800"/>
-              </a:spcAft>
-              <a:defRPr sz="1400" b="1">
+                <a:spcPts val="600"/>
+              </a:spcAft>
+              <a:defRPr sz="1300" b="1">
                 <a:solidFill>
                   <a:srgbClr val="102C57"/>
                 </a:solidFill>
@@ -7074,9 +7697,9 @@
           <a:p>
             <a:pPr>
               <a:spcAft>
-                <a:spcPts val="400"/>
-              </a:spcAft>
-              <a:defRPr sz="1100">
+                <a:spcPts val="300"/>
+              </a:spcAft>
+              <a:defRPr sz="1000">
                 <a:solidFill>
                   <a:srgbClr val="282828"/>
                 </a:solidFill>
@@ -7089,54 +7712,54 @@
           <a:p>
             <a:pPr>
               <a:spcAft>
-                <a:spcPts val="400"/>
-              </a:spcAft>
-              <a:defRPr sz="1100">
-                <a:solidFill>
-                  <a:srgbClr val="282828"/>
-                </a:solidFill>
-              </a:defRPr>
-            </a:pPr>
-            <a:r>
-              <a:t>• • 600 °C Limit: ηcc = 53.33%, Wnet = 55.30 MW (T4 = 556.8 °C).</a:t>
-            </a:r>
-          </a:p>
-          <a:p>
-            <a:pPr>
-              <a:spcAft>
-                <a:spcPts val="400"/>
-              </a:spcAft>
-              <a:defRPr sz="1100">
-                <a:solidFill>
-                  <a:srgbClr val="282828"/>
-                </a:solidFill>
-              </a:defRPr>
-            </a:pPr>
-            <a:r>
-              <a:t>• • 650 °C Limit: ηcc = 53.33%, Wnet = 55.30 MW (T4 = 556.8 °C).</a:t>
-            </a:r>
-          </a:p>
-          <a:p>
-            <a:pPr>
-              <a:spcAft>
-                <a:spcPts val="400"/>
-              </a:spcAft>
-              <a:defRPr sz="1100">
-                <a:solidFill>
-                  <a:srgbClr val="282828"/>
-                </a:solidFill>
-              </a:defRPr>
-            </a:pPr>
-            <a:r>
-              <a:t>• • 700 °C Limit: ηcc = 53.33%, Wnet = 55.30 MW (T4 = 556.8 °C).</a:t>
-            </a:r>
-          </a:p>
-          <a:p>
-            <a:pPr>
-              <a:spcAft>
-                <a:spcPts val="400"/>
-              </a:spcAft>
-              <a:defRPr sz="1100">
+                <a:spcPts val="300"/>
+              </a:spcAft>
+              <a:defRPr sz="1000">
+                <a:solidFill>
+                  <a:srgbClr val="282828"/>
+                </a:solidFill>
+              </a:defRPr>
+            </a:pPr>
+            <a:r>
+              <a:t>• • 600 °C Limit: ηcc = 53.40%, Wnet = 55.43 MW (T4 = 553.7 °C).</a:t>
+            </a:r>
+          </a:p>
+          <a:p>
+            <a:pPr>
+              <a:spcAft>
+                <a:spcPts val="300"/>
+              </a:spcAft>
+              <a:defRPr sz="1000">
+                <a:solidFill>
+                  <a:srgbClr val="282828"/>
+                </a:solidFill>
+              </a:defRPr>
+            </a:pPr>
+            <a:r>
+              <a:t>• • 650 °C Limit: ηcc = 53.40%, Wnet = 55.43 MW (T4 = 553.7 °C).</a:t>
+            </a:r>
+          </a:p>
+          <a:p>
+            <a:pPr>
+              <a:spcAft>
+                <a:spcPts val="300"/>
+              </a:spcAft>
+              <a:defRPr sz="1000">
+                <a:solidFill>
+                  <a:srgbClr val="282828"/>
+                </a:solidFill>
+              </a:defRPr>
+            </a:pPr>
+            <a:r>
+              <a:t>• • 700 °C Limit: ηcc = 53.40%, Wnet = 55.43 MW (T4 = 553.7 °C).</a:t>
+            </a:r>
+          </a:p>
+          <a:p>
+            <a:pPr>
+              <a:spcAft>
+                <a:spcPts val="300"/>
+              </a:spcAft>
+              <a:defRPr sz="1000">
                 <a:solidFill>
                   <a:srgbClr val="282828"/>
                 </a:solidFill>
@@ -7149,54 +7772,54 @@
           <a:p>
             <a:pPr>
               <a:spcAft>
-                <a:spcPts val="400"/>
-              </a:spcAft>
-              <a:defRPr sz="1100">
-                <a:solidFill>
-                  <a:srgbClr val="282828"/>
-                </a:solidFill>
-              </a:defRPr>
-            </a:pPr>
-            <a:r>
-              <a:t>• • The optimum compression ratio (rp ≈ 21.7) at TIT = 1500 K naturally yields an exhaust temperature of T4 = 556.8 °C.</a:t>
-            </a:r>
-          </a:p>
-          <a:p>
-            <a:pPr>
-              <a:spcAft>
-                <a:spcPts val="400"/>
-              </a:spcAft>
-              <a:defRPr sz="1100">
-                <a:solidFill>
-                  <a:srgbClr val="282828"/>
-                </a:solidFill>
-              </a:defRPr>
-            </a:pPr>
-            <a:r>
-              <a:t>• • Because T4 = 556.8 °C is strictly below 600 °C, the carbon-steel tube limit constraint (Constraint ii) is inactive at the optimum!</a:t>
-            </a:r>
-          </a:p>
-          <a:p>
-            <a:pPr>
-              <a:spcAft>
-                <a:spcPts val="400"/>
-              </a:spcAft>
-              <a:defRPr sz="1100">
-                <a:solidFill>
-                  <a:srgbClr val="282828"/>
-                </a:solidFill>
-              </a:defRPr>
-            </a:pPr>
-            <a:r>
-              <a:t>• • Relaxing the HRSG tube limit from 650 °C to 700 °C provides ZERO efficiency gain because the topping Brayton cycle already operates at optimal expansion.</a:t>
-            </a:r>
-          </a:p>
-          <a:p>
-            <a:pPr>
-              <a:spcAft>
-                <a:spcPts val="400"/>
-              </a:spcAft>
-              <a:defRPr sz="1100">
+                <a:spcPts val="300"/>
+              </a:spcAft>
+              <a:defRPr sz="1000">
+                <a:solidFill>
+                  <a:srgbClr val="282828"/>
+                </a:solidFill>
+              </a:defRPr>
+            </a:pPr>
+            <a:r>
+              <a:t>• • The optimum compression ratio (rp ≈ 20) at TIT = 1500 K naturally yields an exhaust temperature of T4 = 553.7 °C.</a:t>
+            </a:r>
+          </a:p>
+          <a:p>
+            <a:pPr>
+              <a:spcAft>
+                <a:spcPts val="300"/>
+              </a:spcAft>
+              <a:defRPr sz="1000">
+                <a:solidFill>
+                  <a:srgbClr val="282828"/>
+                </a:solidFill>
+              </a:defRPr>
+            </a:pPr>
+            <a:r>
+              <a:t>• • Because T4 is strictly below 600 °C, the carbon-steel tube limit constraint is INACTIVE across all levels!</a:t>
+            </a:r>
+          </a:p>
+          <a:p>
+            <a:pPr>
+              <a:spcAft>
+                <a:spcPts val="300"/>
+              </a:spcAft>
+              <a:defRPr sz="1000">
+                <a:solidFill>
+                  <a:srgbClr val="282828"/>
+                </a:solidFill>
+              </a:defRPr>
+            </a:pPr>
+            <a:r>
+              <a:t>• • Relaxing the ceiling to 700 °C provides ZERO efficiency gain because Brayton expansion is already optimized.</a:t>
+            </a:r>
+          </a:p>
+          <a:p>
+            <a:pPr>
+              <a:spcAft>
+                <a:spcPts val="300"/>
+              </a:spcAft>
+              <a:defRPr sz="1000">
                 <a:solidFill>
                   <a:srgbClr val="282828"/>
                 </a:solidFill>
@@ -7209,31 +7832,31 @@
           <a:p>
             <a:pPr>
               <a:spcAft>
-                <a:spcPts val="400"/>
-              </a:spcAft>
-              <a:defRPr sz="1100">
-                <a:solidFill>
-                  <a:srgbClr val="282828"/>
-                </a:solidFill>
-              </a:defRPr>
-            </a:pPr>
-            <a:r>
-              <a:t>• • Materials money should NOT be spent upgrading HRSG tubes from carbon steel to high-alloy stainless steel.</a:t>
-            </a:r>
-          </a:p>
-          <a:p>
-            <a:pPr>
-              <a:spcAft>
-                <a:spcPts val="400"/>
-              </a:spcAft>
-              <a:defRPr sz="1100">
-                <a:solidFill>
-                  <a:srgbClr val="282828"/>
-                </a:solidFill>
-              </a:defRPr>
-            </a:pPr>
-            <a:r>
-              <a:t>• • Instead, R&amp;D capital should be directed to turbine blade coatings to allow higher TIT (e.g. TIT &gt; 1500 K with ceramic thermal barrier coatings), where efficiency gains are dramatic.</a:t>
+                <a:spcPts val="300"/>
+              </a:spcAft>
+              <a:defRPr sz="1000">
+                <a:solidFill>
+                  <a:srgbClr val="282828"/>
+                </a:solidFill>
+              </a:defRPr>
+            </a:pPr>
+            <a:r>
+              <a:t>• • Do NOT spend capital upgrading HRSG tubes from carbon steel to stainless steel.</a:t>
+            </a:r>
+          </a:p>
+          <a:p>
+            <a:pPr>
+              <a:spcAft>
+                <a:spcPts val="300"/>
+              </a:spcAft>
+              <a:defRPr sz="1000">
+                <a:solidFill>
+                  <a:srgbClr val="282828"/>
+                </a:solidFill>
+              </a:defRPr>
+            </a:pPr>
+            <a:r>
+              <a:t>• • Allocate R&amp;D capital to turbine blade ceramic thermal barrier coatings (TBC) to allow TIT &gt; 1600 K, unlocking +2.5 to +3.8 pp efficiency.</a:t>
             </a:r>
           </a:p>
         </p:txBody>
@@ -7246,7 +7869,7 @@
 </p:sld>
 </file>
 
-<file path=ppt/slides/slide8.xml><?xml version="1.0" encoding="utf-8"?>
+<file path=ppt/slides/slide9.xml><?xml version="1.0" encoding="utf-8"?>
 <p:sld xmlns:a="http://schemas.openxmlformats.org/drawingml/2006/main" xmlns:p="http://schemas.openxmlformats.org/presentationml/2006/main" xmlns:r="http://schemas.openxmlformats.org/officeDocument/2006/relationships">
   <p:cSld>
     <p:spTree>
@@ -7291,7 +7914,7 @@
           </a:p>
           <a:p>
             <a:pPr>
-              <a:defRPr sz="2200" b="1">
+              <a:defRPr sz="2100" b="1">
                 <a:solidFill>
                   <a:srgbClr val="102C57"/>
                 </a:solidFill>
@@ -7320,7 +7943,7 @@
         <p:spPr>
           <a:xfrm>
             <a:off x="731520" y="1463040"/>
-            <a:ext cx="5943600" cy="3962400"/>
+            <a:ext cx="6035040" cy="4023360"/>
           </a:xfrm>
           <a:prstGeom prst="rect">
             <a:avLst/>
@@ -7335,8 +7958,8 @@
         </p:nvSpPr>
         <p:spPr>
           <a:xfrm>
-            <a:off x="6949440" y="1463040"/>
-            <a:ext cx="4480560" cy="4846320"/>
+            <a:off x="7040880" y="1463040"/>
+            <a:ext cx="4389120" cy="4937760"/>
           </a:xfrm>
           <a:prstGeom prst="roundRect">
             <a:avLst/>
@@ -7380,8 +8003,8 @@
         </p:nvSpPr>
         <p:spPr>
           <a:xfrm>
-            <a:off x="7132320" y="1600200"/>
-            <a:ext cx="4114800" cy="4572000"/>
+            <a:off x="7223760" y="1600200"/>
+            <a:ext cx="4023360" cy="4663440"/>
           </a:xfrm>
           <a:prstGeom prst="rect">
             <a:avLst/>
@@ -7396,9 +8019,9 @@
           <a:p>
             <a:pPr>
               <a:spcAft>
-                <a:spcPts val="800"/>
-              </a:spcAft>
-              <a:defRPr sz="1400" b="1">
+                <a:spcPts val="600"/>
+              </a:spcAft>
+              <a:defRPr sz="1300" b="1">
                 <a:solidFill>
                   <a:srgbClr val="102C57"/>
                 </a:solidFill>
@@ -7411,9 +8034,9 @@
           <a:p>
             <a:pPr>
               <a:spcAft>
-                <a:spcPts val="400"/>
-              </a:spcAft>
-              <a:defRPr sz="1100">
+                <a:spcPts val="300"/>
+              </a:spcAft>
+              <a:defRPr sz="1000">
                 <a:solidFill>
                   <a:srgbClr val="282828"/>
                 </a:solidFill>
@@ -7426,24 +8049,39 @@
           <a:p>
             <a:pPr>
               <a:spcAft>
-                <a:spcPts val="400"/>
-              </a:spcAft>
-              <a:defRPr sz="1100">
-                <a:solidFill>
-                  <a:srgbClr val="282828"/>
-                </a:solidFill>
-              </a:defRPr>
-            </a:pPr>
-            <a:r>
-              <a:t>• • 100 non-dominated designs extracted spanning from 52.80% to 53.39% efficiency, and 55.3 MW to 61.8 MW net power.</a:t>
-            </a:r>
-          </a:p>
-          <a:p>
-            <a:pPr>
-              <a:spcAft>
-                <a:spcPts val="400"/>
-              </a:spcAft>
-              <a:defRPr sz="1100">
+                <a:spcPts val="300"/>
+              </a:spcAft>
+              <a:defRPr sz="1000">
+                <a:solidFill>
+                  <a:srgbClr val="282828"/>
+                </a:solidFill>
+              </a:defRPr>
+            </a:pPr>
+            <a:r>
+              <a:t>• • 100 non-dominated designs extracted spanning from 52.8% to 53.40% efficiency, and 55.4 MW to 61.5 MW net power.</a:t>
+            </a:r>
+          </a:p>
+          <a:p>
+            <a:pPr>
+              <a:spcAft>
+                <a:spcPts val="300"/>
+              </a:spcAft>
+              <a:defRPr sz="1000">
+                <a:solidFill>
+                  <a:srgbClr val="282828"/>
+                </a:solidFill>
+              </a:defRPr>
+            </a:pPr>
+            <a:r>
+              <a:t>• • Direct physical re-evaluation aligns the single-objective optimum directly on the front.</a:t>
+            </a:r>
+          </a:p>
+          <a:p>
+            <a:pPr>
+              <a:spcAft>
+                <a:spcPts val="300"/>
+              </a:spcAft>
+              <a:defRPr sz="1000">
                 <a:solidFill>
                   <a:srgbClr val="282828"/>
                 </a:solidFill>
@@ -7456,39 +8094,39 @@
           <a:p>
             <a:pPr>
               <a:spcAft>
-                <a:spcPts val="400"/>
-              </a:spcAft>
-              <a:defRPr sz="1100">
-                <a:solidFill>
-                  <a:srgbClr val="282828"/>
-                </a:solidFill>
-              </a:defRPr>
-            </a:pPr>
-            <a:r>
-              <a:t>• • Maximizing thermal efficiency (ηcc) favors higher compression ratios (rp ≈ 22) and high steam drum pressures (Ps ≈ 46 bar), maximizing combined exergy recovery.</a:t>
-            </a:r>
-          </a:p>
-          <a:p>
-            <a:pPr>
-              <a:spcAft>
-                <a:spcPts val="400"/>
-              </a:spcAft>
-              <a:defRPr sz="1100">
-                <a:solidFill>
-                  <a:srgbClr val="282828"/>
-                </a:solidFill>
-              </a:defRPr>
-            </a:pPr>
-            <a:r>
-              <a:t>• • Maximizing net power (Wnet) favors slightly lower pressure ratios (rp ≈ 16 - 18) where gas turbine specific work (kJ/kg air) peaks, allowing higher flue gas mass flow and larger bottoming steam output.</a:t>
-            </a:r>
-          </a:p>
-          <a:p>
-            <a:pPr>
-              <a:spcAft>
-                <a:spcPts val="400"/>
-              </a:spcAft>
-              <a:defRPr sz="1100">
+                <a:spcPts val="300"/>
+              </a:spcAft>
+              <a:defRPr sz="1000">
+                <a:solidFill>
+                  <a:srgbClr val="282828"/>
+                </a:solidFill>
+              </a:defRPr>
+            </a:pPr>
+            <a:r>
+              <a:t>• • Maximizing thermal efficiency (ηcc) favors higher compression ratios (rp ≈ 20–22), maximizing Brayton exergy recovery.</a:t>
+            </a:r>
+          </a:p>
+          <a:p>
+            <a:pPr>
+              <a:spcAft>
+                <a:spcPts val="300"/>
+              </a:spcAft>
+              <a:defRPr sz="1000">
+                <a:solidFill>
+                  <a:srgbClr val="282828"/>
+                </a:solidFill>
+              </a:defRPr>
+            </a:pPr>
+            <a:r>
+              <a:t>• • Maximizing net power (Wnet) favors lower pressure ratios (rp ≈ 16–17) where gas turbine specific work peaks, yielding hotter flue gas for steam generation.</a:t>
+            </a:r>
+          </a:p>
+          <a:p>
+            <a:pPr>
+              <a:spcAft>
+                <a:spcPts val="300"/>
+              </a:spcAft>
+              <a:defRPr sz="1000">
                 <a:solidFill>
                   <a:srgbClr val="282828"/>
                 </a:solidFill>
@@ -7501,667 +8139,31 @@
           <a:p>
             <a:pPr>
               <a:spcAft>
-                <a:spcPts val="400"/>
-              </a:spcAft>
-              <a:defRPr sz="1100">
-                <a:solidFill>
-                  <a:srgbClr val="282828"/>
-                </a:solidFill>
-              </a:defRPr>
-            </a:pPr>
-            <a:r>
-              <a:t>• • For a baseload utility plant, fuel cost dominates lifetime levelized cost of electricity (LCOE).</a:t>
-            </a:r>
-          </a:p>
-          <a:p>
-            <a:pPr>
-              <a:spcAft>
-                <a:spcPts val="400"/>
-              </a:spcAft>
-              <a:defRPr sz="1100">
-                <a:solidFill>
-                  <a:srgbClr val="282828"/>
-                </a:solidFill>
-              </a:defRPr>
-            </a:pPr>
-            <a:r>
-              <a:t>• • We recommend operating near the high-efficiency elbow: ηcc = 53.25%, Wnet = 57.5 MW.</a:t>
-            </a:r>
-          </a:p>
-          <a:p>
-            <a:pPr>
-              <a:spcAft>
-                <a:spcPts val="400"/>
-              </a:spcAft>
-              <a:defRPr sz="1100">
-                <a:solidFill>
-                  <a:srgbClr val="282828"/>
-                </a:solidFill>
-              </a:defRPr>
-            </a:pPr>
-            <a:r>
-              <a:t>• • This captures 99.8% of maximum efficiency while gaining +2.2 MW (+4.0%) of additional electrical output for minimal marginal capital investment.</a:t>
-            </a:r>
-          </a:p>
-        </p:txBody>
-      </p:sp>
-    </p:spTree>
-  </p:cSld>
-  <p:clrMapOvr>
-    <a:masterClrMapping/>
-  </p:clrMapOvr>
-</p:sld>
-</file>
-
-<file path=ppt/slides/slide9.xml><?xml version="1.0" encoding="utf-8"?>
-<p:sld xmlns:a="http://schemas.openxmlformats.org/drawingml/2006/main" xmlns:p="http://schemas.openxmlformats.org/presentationml/2006/main" xmlns:r="http://schemas.openxmlformats.org/officeDocument/2006/relationships">
-  <p:cSld>
-    <p:spTree>
-      <p:nvGrpSpPr>
-        <p:cNvPr id="1" name=""/>
-        <p:cNvGrpSpPr/>
-        <p:nvPr/>
-      </p:nvGrpSpPr>
-      <p:grpSpPr/>
-      <p:sp>
-        <p:nvSpPr>
-          <p:cNvPr id="2" name="TextBox 1"/>
-          <p:cNvSpPr txBox="1"/>
-          <p:nvPr/>
-        </p:nvSpPr>
-        <p:spPr>
-          <a:xfrm>
-            <a:off x="731520" y="365760"/>
-            <a:ext cx="10698480" cy="1005840"/>
-          </a:xfrm>
-          <a:prstGeom prst="rect">
-            <a:avLst/>
-          </a:prstGeom>
-          <a:noFill/>
-        </p:spPr>
-        <p:txBody>
-          <a:bodyPr wrap="square">
-            <a:spAutoFit/>
-          </a:bodyPr>
-          <a:lstStyle/>
-          <a:p>
-            <a:pPr>
-              <a:defRPr sz="1100" b="1">
-                <a:solidFill>
-                  <a:srgbClr val="3565A9"/>
-                </a:solidFill>
-              </a:defRPr>
-            </a:pPr>
-            <a:r>
-              <a:t>5. CONCLUSION</a:t>
-            </a:r>
-          </a:p>
-          <a:p>
-            <a:pPr>
-              <a:defRPr sz="2200" b="1">
-                <a:solidFill>
-                  <a:srgbClr val="102C57"/>
-                </a:solidFill>
-              </a:defRPr>
-            </a:pPr>
-            <a:r>
-              <a:t>Section 5: Final Recommendations, Binding Constraints &amp; Design Levers</a:t>
-            </a:r>
-          </a:p>
-        </p:txBody>
-      </p:sp>
-      <p:sp>
-        <p:nvSpPr>
-          <p:cNvPr id="3" name="Rounded Rectangle 2"/>
-          <p:cNvSpPr/>
-          <p:nvPr/>
-        </p:nvSpPr>
-        <p:spPr>
-          <a:xfrm>
-            <a:off x="731520" y="1463040"/>
-            <a:ext cx="5212080" cy="4846320"/>
-          </a:xfrm>
-          <a:prstGeom prst="roundRect">
-            <a:avLst/>
-          </a:prstGeom>
-          <a:solidFill>
-            <a:srgbClr val="FFFFFF"/>
-          </a:solidFill>
-          <a:ln w="19050">
-            <a:solidFill>
-              <a:srgbClr val="C8D7E6"/>
-            </a:solidFill>
-          </a:ln>
-        </p:spPr>
-        <p:style>
-          <a:lnRef idx="1">
-            <a:schemeClr val="accent1"/>
-          </a:lnRef>
-          <a:fillRef idx="3">
-            <a:schemeClr val="accent1"/>
-          </a:fillRef>
-          <a:effectRef idx="2">
-            <a:schemeClr val="accent1"/>
-          </a:effectRef>
-          <a:fontRef idx="minor">
-            <a:schemeClr val="lt1"/>
-          </a:fontRef>
-        </p:style>
-        <p:txBody>
-          <a:bodyPr rtlCol="0" anchor="ctr"/>
-          <a:lstStyle/>
-          <a:p>
-            <a:pPr algn="ctr"/>
-          </a:p>
-        </p:txBody>
-      </p:sp>
-      <p:sp>
-        <p:nvSpPr>
-          <p:cNvPr id="4" name="TextBox 3"/>
-          <p:cNvSpPr txBox="1"/>
-          <p:nvPr/>
-        </p:nvSpPr>
-        <p:spPr>
-          <a:xfrm>
-            <a:off x="914400" y="1600200"/>
-            <a:ext cx="4846320" cy="4572000"/>
-          </a:xfrm>
-          <a:prstGeom prst="rect">
-            <a:avLst/>
-          </a:prstGeom>
-          <a:noFill/>
-        </p:spPr>
-        <p:txBody>
-          <a:bodyPr wrap="square">
-            <a:spAutoFit/>
-          </a:bodyPr>
-          <a:lstStyle/>
-          <a:p>
-            <a:pPr>
-              <a:spcAft>
-                <a:spcPts val="800"/>
-              </a:spcAft>
-              <a:defRPr sz="1400" b="1">
-                <a:solidFill>
-                  <a:srgbClr val="102C57"/>
-                </a:solidFill>
-              </a:defRPr>
-            </a:pPr>
-            <a:r>
-              <a:t>Recommended Operating Point Summary</a:t>
-            </a:r>
-          </a:p>
-          <a:p>
-            <a:pPr>
-              <a:spcAft>
-                <a:spcPts val="400"/>
-              </a:spcAft>
-              <a:defRPr sz="1100">
-                <a:solidFill>
-                  <a:srgbClr val="282828"/>
-                </a:solidFill>
-              </a:defRPr>
-            </a:pPr>
-            <a:r>
-              <a:t>• Optimal Design Parameters:</a:t>
-            </a:r>
-          </a:p>
-          <a:p>
-            <a:pPr>
-              <a:spcAft>
-                <a:spcPts val="400"/>
-              </a:spcAft>
-              <a:defRPr sz="1100">
-                <a:solidFill>
-                  <a:srgbClr val="282828"/>
-                </a:solidFill>
-              </a:defRPr>
-            </a:pPr>
-            <a:r>
-              <a:t>• • Compression ratio rp = 21.68</a:t>
-            </a:r>
-          </a:p>
-          <a:p>
-            <a:pPr>
-              <a:spcAft>
-                <a:spcPts val="400"/>
-              </a:spcAft>
-              <a:defRPr sz="1100">
-                <a:solidFill>
-                  <a:srgbClr val="282828"/>
-                </a:solidFill>
-              </a:defRPr>
-            </a:pPr>
-            <a:r>
-              <a:t>• • Turbine inlet temperature TIT = 1500.0 K (1226.85 °C)</a:t>
-            </a:r>
-          </a:p>
-          <a:p>
-            <a:pPr>
-              <a:spcAft>
-                <a:spcPts val="400"/>
-              </a:spcAft>
-              <a:defRPr sz="1100">
-                <a:solidFill>
-                  <a:srgbClr val="282828"/>
-                </a:solidFill>
-              </a:defRPr>
-            </a:pPr>
-            <a:r>
-              <a:t>• • Steam drum pressure Ps = 46.48 bar</a:t>
-            </a:r>
-          </a:p>
-          <a:p>
-            <a:pPr>
-              <a:spcAft>
-                <a:spcPts val="400"/>
-              </a:spcAft>
-              <a:defRPr sz="1100">
-                <a:solidFill>
-                  <a:srgbClr val="282828"/>
-                </a:solidFill>
-              </a:defRPr>
-            </a:pPr>
-            <a:r>
-              <a:t>• • Superheat steam temperature Ts = 539.4 °C (812.6 K)</a:t>
-            </a:r>
-          </a:p>
-          <a:p>
-            <a:pPr>
-              <a:spcAft>
-                <a:spcPts val="400"/>
-              </a:spcAft>
-              <a:defRPr sz="1100">
-                <a:solidFill>
-                  <a:srgbClr val="282828"/>
-                </a:solidFill>
-              </a:defRPr>
-            </a:pPr>
-            <a:r>
-              <a:t>• • Condenser back-pressure Pcond = 0.0500 bar</a:t>
-            </a:r>
-          </a:p>
-          <a:p>
-            <a:pPr>
-              <a:spcAft>
-                <a:spcPts val="400"/>
-              </a:spcAft>
-              <a:defRPr sz="1100">
-                <a:solidFill>
-                  <a:srgbClr val="282828"/>
-                </a:solidFill>
-              </a:defRPr>
-            </a:pPr>
-            <a:r>
-              <a:t>• Performance Metrics:</a:t>
-            </a:r>
-          </a:p>
-          <a:p>
-            <a:pPr>
-              <a:spcAft>
-                <a:spcPts val="400"/>
-              </a:spcAft>
-              <a:defRPr sz="1100">
-                <a:solidFill>
-                  <a:srgbClr val="282828"/>
-                </a:solidFill>
-              </a:defRPr>
-            </a:pPr>
-            <a:r>
-              <a:t>• • Overall Combined-Cycle Efficiency: 53.33%</a:t>
-            </a:r>
-          </a:p>
-          <a:p>
-            <a:pPr>
-              <a:spcAft>
-                <a:spcPts val="400"/>
-              </a:spcAft>
-              <a:defRPr sz="1100">
-                <a:solidFill>
-                  <a:srgbClr val="282828"/>
-                </a:solidFill>
-              </a:defRPr>
-            </a:pPr>
-            <a:r>
-              <a:t>• • Total Plant Net Power Output: 55.30 MW (for 100 kg/s air flow)</a:t>
-            </a:r>
-          </a:p>
-          <a:p>
-            <a:pPr>
-              <a:spcAft>
-                <a:spcPts val="400"/>
-              </a:spcAft>
-              <a:defRPr sz="1100">
-                <a:solidFill>
-                  <a:srgbClr val="282828"/>
-                </a:solidFill>
-              </a:defRPr>
-            </a:pPr>
-            <a:r>
-              <a:t>• • Specific Work: 553.03 kJ/kg air</a:t>
-            </a:r>
-          </a:p>
-          <a:p>
-            <a:pPr>
-              <a:spcAft>
-                <a:spcPts val="400"/>
-              </a:spcAft>
-              <a:defRPr sz="1100">
-                <a:solidFill>
-                  <a:srgbClr val="282828"/>
-                </a:solidFill>
-              </a:defRPr>
-            </a:pPr>
-            <a:r>
-              <a:t>• • Bottoming-to-Topping Work Ratio: 0.4160</a:t>
-            </a:r>
-          </a:p>
-          <a:p>
-            <a:pPr>
-              <a:spcAft>
-                <a:spcPts val="400"/>
-              </a:spcAft>
-              <a:defRPr sz="1100">
-                <a:solidFill>
-                  <a:srgbClr val="282828"/>
-                </a:solidFill>
-              </a:defRPr>
-            </a:pPr>
-            <a:r>
-              <a:t>• • HRSG Thermal Effectiveness: 78.50%</a:t>
-            </a:r>
-          </a:p>
-          <a:p>
-            <a:pPr>
-              <a:spcAft>
-                <a:spcPts val="400"/>
-              </a:spcAft>
-              <a:defRPr sz="1100">
-                <a:solidFill>
-                  <a:srgbClr val="282828"/>
-                </a:solidFill>
-              </a:defRPr>
-            </a:pPr>
-            <a:r>
-              <a:t>• Computational Pipeline Performance:</a:t>
-            </a:r>
-          </a:p>
-          <a:p>
-            <a:pPr>
-              <a:spcAft>
-                <a:spcPts val="400"/>
-              </a:spcAft>
-              <a:defRPr sz="1100">
-                <a:solidFill>
-                  <a:srgbClr val="282828"/>
-                </a:solidFill>
-              </a:defRPr>
-            </a:pPr>
-            <a:r>
-              <a:t>• • LHS + Surrogate required only 500 direct physics runs (vs 3.2 million for full grid search: 6,400x compute reduction).</a:t>
-            </a:r>
-          </a:p>
-          <a:p>
-            <a:pPr>
-              <a:spcAft>
-                <a:spcPts val="400"/>
-              </a:spcAft>
-              <a:defRPr sz="1100">
-                <a:solidFill>
-                  <a:srgbClr val="282828"/>
-                </a:solidFill>
-              </a:defRPr>
-            </a:pPr>
-            <a:r>
-              <a:t>• • Adaptive refinement verified prediction to within 0.0635 pp gap.</a:t>
-            </a:r>
-          </a:p>
-        </p:txBody>
-      </p:sp>
-      <p:sp>
-        <p:nvSpPr>
-          <p:cNvPr id="5" name="Rounded Rectangle 4"/>
-          <p:cNvSpPr/>
-          <p:nvPr/>
-        </p:nvSpPr>
-        <p:spPr>
-          <a:xfrm>
-            <a:off x="6217920" y="1463040"/>
-            <a:ext cx="5212080" cy="4846320"/>
-          </a:xfrm>
-          <a:prstGeom prst="roundRect">
-            <a:avLst/>
-          </a:prstGeom>
-          <a:solidFill>
-            <a:srgbClr val="FFFFFF"/>
-          </a:solidFill>
-          <a:ln w="19050">
-            <a:solidFill>
-              <a:srgbClr val="C8D7E6"/>
-            </a:solidFill>
-          </a:ln>
-        </p:spPr>
-        <p:style>
-          <a:lnRef idx="1">
-            <a:schemeClr val="accent1"/>
-          </a:lnRef>
-          <a:fillRef idx="3">
-            <a:schemeClr val="accent1"/>
-          </a:fillRef>
-          <a:effectRef idx="2">
-            <a:schemeClr val="accent1"/>
-          </a:effectRef>
-          <a:fontRef idx="minor">
-            <a:schemeClr val="lt1"/>
-          </a:fontRef>
-        </p:style>
-        <p:txBody>
-          <a:bodyPr rtlCol="0" anchor="ctr"/>
-          <a:lstStyle/>
-          <a:p>
-            <a:pPr algn="ctr"/>
-          </a:p>
-        </p:txBody>
-      </p:sp>
-      <p:sp>
-        <p:nvSpPr>
-          <p:cNvPr id="6" name="TextBox 5"/>
-          <p:cNvSpPr txBox="1"/>
-          <p:nvPr/>
-        </p:nvSpPr>
-        <p:spPr>
-          <a:xfrm>
-            <a:off x="6400800" y="1600200"/>
-            <a:ext cx="4846320" cy="4572000"/>
-          </a:xfrm>
-          <a:prstGeom prst="rect">
-            <a:avLst/>
-          </a:prstGeom>
-          <a:noFill/>
-        </p:spPr>
-        <p:txBody>
-          <a:bodyPr wrap="square">
-            <a:spAutoFit/>
-          </a:bodyPr>
-          <a:lstStyle/>
-          <a:p>
-            <a:pPr>
-              <a:spcAft>
-                <a:spcPts val="800"/>
-              </a:spcAft>
-              <a:defRPr sz="1400" b="1">
-                <a:solidFill>
-                  <a:srgbClr val="102C57"/>
-                </a:solidFill>
-              </a:defRPr>
-            </a:pPr>
-            <a:r>
-              <a:t>Active Constraints &amp; Biggest Improvement Levers</a:t>
-            </a:r>
-          </a:p>
-          <a:p>
-            <a:pPr>
-              <a:spcAft>
-                <a:spcPts val="400"/>
-              </a:spcAft>
-              <a:defRPr sz="1100">
-                <a:solidFill>
-                  <a:srgbClr val="282828"/>
-                </a:solidFill>
-              </a:defRPr>
-            </a:pPr>
-            <a:r>
-              <a:t>• Binding Constraints at Optimum:</a:t>
-            </a:r>
-          </a:p>
-          <a:p>
-            <a:pPr>
-              <a:spcAft>
-                <a:spcPts val="400"/>
-              </a:spcAft>
-              <a:defRPr sz="1100">
-                <a:solidFill>
-                  <a:srgbClr val="282828"/>
-                </a:solidFill>
-              </a:defRPr>
-            </a:pPr>
-            <a:r>
-              <a:t>• 1. Turbine Inlet Temperature (TIT): Active at upper bound (1500 K) set by uncooled nickel superalloys.</a:t>
-            </a:r>
-          </a:p>
-          <a:p>
-            <a:pPr>
-              <a:spcAft>
-                <a:spcPts val="400"/>
-              </a:spcAft>
-              <a:defRPr sz="1100">
-                <a:solidFill>
-                  <a:srgbClr val="282828"/>
-                </a:solidFill>
-              </a:defRPr>
-            </a:pPr>
-            <a:r>
-              <a:t>• 2. Superheater Approach Temp (ΔTapproach): Active at ΔTapproach = 17.4 K (well above 5 K minimum).</a:t>
-            </a:r>
-          </a:p>
-          <a:p>
-            <a:pPr>
-              <a:spcAft>
-                <a:spcPts val="400"/>
-              </a:spcAft>
-              <a:defRPr sz="1100">
-                <a:solidFill>
-                  <a:srgbClr val="282828"/>
-                </a:solidFill>
-              </a:defRPr>
-            </a:pPr>
-            <a:r>
-              <a:t>• 3. Steam Turbine Exit Quality: x6 = 0.924 satisfies the erosion limit (x6 &gt;= 0.88).</a:t>
-            </a:r>
-          </a:p>
-          <a:p>
-            <a:pPr>
-              <a:spcAft>
-                <a:spcPts val="400"/>
-              </a:spcAft>
-              <a:defRPr sz="1100">
-                <a:solidFill>
-                  <a:srgbClr val="282828"/>
-                </a:solidFill>
-              </a:defRPr>
-            </a:pPr>
-            <a:r>
-              <a:t>• 4. Gas Entering HRSG: T4 = 556.8 °C leaves 93.2 K safety margin below the 650 °C carbon-steel limit.</a:t>
-            </a:r>
-          </a:p>
-          <a:p>
-            <a:pPr>
-              <a:spcAft>
-                <a:spcPts val="400"/>
-              </a:spcAft>
-              <a:defRPr sz="1100">
-                <a:solidFill>
-                  <a:srgbClr val="282828"/>
-                </a:solidFill>
-              </a:defRPr>
-            </a:pPr>
-            <a:r>
-              <a:t>• Inactive Constraints:</a:t>
-            </a:r>
-          </a:p>
-          <a:p>
-            <a:pPr>
-              <a:spcAft>
-                <a:spcPts val="400"/>
-              </a:spcAft>
-              <a:defRPr sz="1100">
-                <a:solidFill>
-                  <a:srgbClr val="282828"/>
-                </a:solidFill>
-              </a:defRPr>
-            </a:pPr>
-            <a:r>
-              <a:t>• • Stack gas temperature (145 °C vs 100 °C dew point ceiling).</a:t>
-            </a:r>
-          </a:p>
-          <a:p>
-            <a:pPr>
-              <a:spcAft>
-                <a:spcPts val="400"/>
-              </a:spcAft>
-              <a:defRPr sz="1100">
-                <a:solidFill>
-                  <a:srgbClr val="282828"/>
-                </a:solidFill>
-              </a:defRPr>
-            </a:pPr>
-            <a:r>
-              <a:t>• • Combustor equivalence ratio (phi = 0.355 vs 0.50 NOx ceiling).</a:t>
-            </a:r>
-          </a:p>
-          <a:p>
-            <a:pPr>
-              <a:spcAft>
-                <a:spcPts val="400"/>
-              </a:spcAft>
-              <a:defRPr sz="1100">
-                <a:solidFill>
-                  <a:srgbClr val="282828"/>
-                </a:solidFill>
-              </a:defRPr>
-            </a:pPr>
-            <a:r>
-              <a:t>• The Single Biggest Design Lever:</a:t>
-            </a:r>
-          </a:p>
-          <a:p>
-            <a:pPr>
-              <a:spcAft>
-                <a:spcPts val="400"/>
-              </a:spcAft>
-              <a:defRPr sz="1100">
-                <a:solidFill>
-                  <a:srgbClr val="282828"/>
-                </a:solidFill>
-              </a:defRPr>
-            </a:pPr>
-            <a:r>
-              <a:t>• • Turbine Inlet Temperature (TIT): Elevating TIT with advanced blade cooling or thermal barrier coatings (TBC) to 1600+ K increases combined cycle efficiency by +2.5 to +3.8 pp.</a:t>
-            </a:r>
-          </a:p>
-          <a:p>
-            <a:pPr>
-              <a:spcAft>
-                <a:spcPts val="400"/>
-              </a:spcAft>
-              <a:defRPr sz="1100">
-                <a:solidFill>
-                  <a:srgbClr val="282828"/>
-                </a:solidFill>
-              </a:defRPr>
-            </a:pPr>
-            <a:r>
-              <a:t>• • Bottoming cycle dual-pressure HRSG: Adding an intermediate pressure drum would capture additional exergy, reducing stack loss to 105 °C and lifting plant efficiency above 56%.</a:t>
+                <a:spcPts val="300"/>
+              </a:spcAft>
+              <a:defRPr sz="1000">
+                <a:solidFill>
+                  <a:srgbClr val="282828"/>
+                </a:solidFill>
+              </a:defRPr>
+            </a:pPr>
+            <a:r>
+              <a:t>• • For a baseload utility plant, fuel cost dominates levelized cost of electricity (LCOE).</a:t>
+            </a:r>
+          </a:p>
+          <a:p>
+            <a:pPr>
+              <a:spcAft>
+                <a:spcPts val="300"/>
+              </a:spcAft>
+              <a:defRPr sz="1000">
+                <a:solidFill>
+                  <a:srgbClr val="282828"/>
+                </a:solidFill>
+              </a:defRPr>
+            </a:pPr>
+            <a:r>
+              <a:t>• • We recommend operating near the high-efficiency elbow: ηcc = 53.30%, Wnet = 57.8 MW (+2.4 MW output for minimal efficiency sacrifice).</a:t>
             </a:r>
           </a:p>
         </p:txBody>
